--- a/docs/ABDS_executive_technical_brief.pptx
+++ b/docs/ABDS_executive_technical_brief.pptx
@@ -1253,7 +1253,7 @@
         <p:spPr>
           <a:xfrm>
             <a:off x="548640" y="6547104"/>
-            <a:ext cx="8046720" cy="182880"/>
+            <a:ext cx="8229600" cy="182880"/>
           </a:xfrm>
           <a:prstGeom prst="rect">
             <a:avLst/>
@@ -1277,7 +1277,7 @@
                 <a:ea typeface="Arial" pitchFamily="34" charset="-122"/>
                 <a:cs typeface="Arial" pitchFamily="34" charset="-120"/>
               </a:rPr>
-              <a:t>AI Billing Delegation Standard (ABDS) - Draft v0.5</a:t>
+              <a:t>Artificial Intelligence Billing Delegation Standard (ABDS) - Draft v0.6</a:t>
             </a:r>
             <a:endParaRPr lang="en-US" sz="750" dirty="0"/>
           </a:p>
@@ -1707,13 +1707,6 @@
 <file path=ppt/slides/slide1.xml><?xml version="1.0" encoding="utf-8"?>
 <p:sld xmlns:a="http://schemas.openxmlformats.org/drawingml/2006/main" xmlns:r="http://schemas.openxmlformats.org/officeDocument/2006/relationships" xmlns:p="http://schemas.openxmlformats.org/presentationml/2006/main">
   <p:cSld name="Slide 1">
-    <p:bg>
-      <p:bgPr>
-        <a:solidFill>
-          <a:srgbClr val="07111F"/>
-        </a:solidFill>
-      </p:bgPr>
-    </p:bg>
     <p:spTree>
       <p:nvGrpSpPr>
         <p:cNvPr id="1" name=""/>
@@ -1736,40 +1729,15 @@
         </p:nvSpPr>
         <p:spPr>
           <a:xfrm>
-            <a:off x="0" y="0"/>
-            <a:ext cx="12191695" cy="6858000"/>
-          </a:xfrm>
-          <a:prstGeom prst="rect">
-            <a:avLst/>
-          </a:prstGeom>
-          <a:solidFill>
-            <a:srgbClr val="07111F"/>
-          </a:solidFill>
-          <a:ln w="12700">
-            <a:solidFill>
-              <a:srgbClr val="07111F"/>
-            </a:solidFill>
-            <a:prstDash val="solid"/>
-          </a:ln>
-        </p:spPr>
-      </p:sp>
-      <p:sp>
-        <p:nvSpPr>
-          <p:cNvPr id="3" name="Shape 1"/>
-          <p:cNvSpPr/>
-          <p:nvPr/>
-        </p:nvSpPr>
-        <p:spPr>
-          <a:xfrm>
-            <a:off x="8092440" y="45720"/>
-            <a:ext cx="3977640" cy="3977640"/>
+            <a:off x="8138160" y="182880"/>
+            <a:ext cx="3657600" cy="3657600"/>
           </a:xfrm>
           <a:prstGeom prst="ellipse">
             <a:avLst/>
           </a:prstGeom>
           <a:solidFill>
             <a:srgbClr val="0B2940">
-              <a:alpha val="85000"/>
+              <a:alpha val="88000"/>
             </a:srgbClr>
           </a:solidFill>
           <a:ln w="12700">
@@ -1784,43 +1752,14 @@
       </p:sp>
       <p:sp>
         <p:nvSpPr>
-          <p:cNvPr id="4" name="Shape 2"/>
-          <p:cNvSpPr/>
-          <p:nvPr/>
-        </p:nvSpPr>
-        <p:spPr>
-          <a:xfrm>
-            <a:off x="8732520" y="320040"/>
-            <a:ext cx="3108960" cy="3108960"/>
-          </a:xfrm>
-          <a:prstGeom prst="ellipse">
-            <a:avLst/>
-          </a:prstGeom>
-          <a:solidFill>
-            <a:srgbClr val="123D58">
-              <a:alpha val="75000"/>
-            </a:srgbClr>
-          </a:solidFill>
-          <a:ln w="12700">
-            <a:solidFill>
-              <a:srgbClr val="123D58">
-                <a:alpha val="0"/>
-              </a:srgbClr>
-            </a:solidFill>
-            <a:prstDash val="solid"/>
-          </a:ln>
-        </p:spPr>
-      </p:sp>
-      <p:sp>
-        <p:nvSpPr>
-          <p:cNvPr id="5" name="Text 3"/>
-          <p:cNvSpPr/>
-          <p:nvPr/>
-        </p:nvSpPr>
-        <p:spPr>
-          <a:xfrm>
-            <a:off x="731520" y="960120"/>
-            <a:ext cx="6949440" cy="1508760"/>
+          <p:cNvPr id="3" name="Text 1"/>
+          <p:cNvSpPr/>
+          <p:nvPr/>
+        </p:nvSpPr>
+        <p:spPr>
+          <a:xfrm>
+            <a:off x="731520" y="914400"/>
+            <a:ext cx="7040880" cy="1554480"/>
           </a:xfrm>
           <a:prstGeom prst="rect">
             <a:avLst/>
@@ -1838,41 +1777,41 @@
               <a:buNone/>
             </a:pPr>
             <a:r>
-              <a:rPr lang="en-US" sz="3500" b="1" dirty="0">
+              <a:rPr lang="en-US" sz="3200" b="1" dirty="0">
                 <a:solidFill>
                   <a:srgbClr val="F5F8FC"/>
                 </a:solidFill>
               </a:rPr>
-              <a:t>AI BILLING</a:t>
-            </a:r>
-            <a:endParaRPr lang="en-US" sz="3500" dirty="0"/>
-          </a:p>
-          <a:p>
-            <a:pPr indent="0" marL="0">
-              <a:buNone/>
-            </a:pPr>
-            <a:r>
-              <a:rPr lang="en-US" sz="3500" b="1" dirty="0">
+              <a:t>ARTIFICIAL INTELLIGENCE</a:t>
+            </a:r>
+            <a:endParaRPr lang="en-US" sz="3200" dirty="0"/>
+          </a:p>
+          <a:p>
+            <a:pPr indent="0" marL="0">
+              <a:buNone/>
+            </a:pPr>
+            <a:r>
+              <a:rPr lang="en-US" sz="3200" b="1" dirty="0">
                 <a:solidFill>
                   <a:srgbClr val="F5F8FC"/>
                 </a:solidFill>
               </a:rPr>
-              <a:t>DELEGATION STANDARD</a:t>
-            </a:r>
-            <a:endParaRPr lang="en-US" sz="3500" dirty="0"/>
-          </a:p>
-        </p:txBody>
-      </p:sp>
-      <p:sp>
-        <p:nvSpPr>
-          <p:cNvPr id="6" name="Text 4"/>
-          <p:cNvSpPr/>
-          <p:nvPr/>
-        </p:nvSpPr>
-        <p:spPr>
-          <a:xfrm>
-            <a:off x="749808" y="2679192"/>
-            <a:ext cx="3200400" cy="566928"/>
+              <a:t>BILLING DELEGATION STANDARD</a:t>
+            </a:r>
+            <a:endParaRPr lang="en-US" sz="3200" dirty="0"/>
+          </a:p>
+        </p:txBody>
+      </p:sp>
+      <p:sp>
+        <p:nvSpPr>
+          <p:cNvPr id="4" name="Text 2"/>
+          <p:cNvSpPr/>
+          <p:nvPr/>
+        </p:nvSpPr>
+        <p:spPr>
+          <a:xfrm>
+            <a:off x="749808" y="2697480"/>
+            <a:ext cx="3383280" cy="566928"/>
           </a:xfrm>
           <a:prstGeom prst="rect">
             <a:avLst/>
@@ -1893,7 +1832,7 @@
                   <a:srgbClr val="35D0E6"/>
                 </a:solidFill>
               </a:rPr>
-              <a:t>ABDS v0.5</a:t>
+              <a:t>ABDS v0.6</a:t>
             </a:r>
             <a:endParaRPr lang="en-US" sz="2500" dirty="0"/>
           </a:p>
@@ -1901,14 +1840,14 @@
       </p:sp>
       <p:sp>
         <p:nvSpPr>
-          <p:cNvPr id="7" name="Text 5"/>
+          <p:cNvPr id="5" name="Text 3"/>
           <p:cNvSpPr/>
           <p:nvPr/>
         </p:nvSpPr>
         <p:spPr>
           <a:xfrm>
             <a:off x="758952" y="3401568"/>
-            <a:ext cx="6400800" cy="777240"/>
+            <a:ext cx="6675120" cy="822960"/>
           </a:xfrm>
           <a:prstGeom prst="rect">
             <a:avLst/>
@@ -1929,7 +1868,7 @@
                   <a:srgbClr val="D8E3F0"/>
                 </a:solidFill>
               </a:rPr>
-              <a:t>Provider-enforced funding, usage attribution,</a:t>
+              <a:t>Provider-enforced funding, consent receipts,</a:t>
             </a:r>
             <a:endParaRPr lang="en-US" sz="1600" dirty="0"/>
           </a:p>
@@ -1943,7 +1882,7 @@
                   <a:srgbClr val="D8E3F0"/>
                 </a:solidFill>
               </a:rPr>
-              <a:t>and settlement for third-party AI applications</a:t>
+              <a:t>usage evidence, reconciliation, and settlement</a:t>
             </a:r>
             <a:endParaRPr lang="en-US" sz="1600" dirty="0"/>
           </a:p>
@@ -1951,14 +1890,14 @@
       </p:sp>
       <p:sp>
         <p:nvSpPr>
-          <p:cNvPr id="8" name="Shape 6"/>
-          <p:cNvSpPr/>
-          <p:nvPr/>
-        </p:nvSpPr>
-        <p:spPr>
-          <a:xfrm>
-            <a:off x="758952" y="4462272"/>
-            <a:ext cx="1600200" cy="329184"/>
+          <p:cNvPr id="6" name="Shape 4"/>
+          <p:cNvSpPr/>
+          <p:nvPr/>
+        </p:nvSpPr>
+        <p:spPr>
+          <a:xfrm>
+            <a:off x="758952" y="4480560"/>
+            <a:ext cx="1554480" cy="329184"/>
           </a:xfrm>
           <a:prstGeom prst="roundRect">
             <a:avLst>
@@ -1978,14 +1917,14 @@
       </p:sp>
       <p:sp>
         <p:nvSpPr>
-          <p:cNvPr id="9" name="Text 7"/>
-          <p:cNvSpPr/>
-          <p:nvPr/>
-        </p:nvSpPr>
-        <p:spPr>
-          <a:xfrm>
-            <a:off x="832104" y="4530852"/>
-            <a:ext cx="1453896" cy="164592"/>
+          <p:cNvPr id="7" name="Text 5"/>
+          <p:cNvSpPr/>
+          <p:nvPr/>
+        </p:nvSpPr>
+        <p:spPr>
+          <a:xfrm>
+            <a:off x="832104" y="4549140"/>
+            <a:ext cx="1408176" cy="164592"/>
           </a:xfrm>
           <a:prstGeom prst="rect">
             <a:avLst/>
@@ -2014,14 +1953,14 @@
       </p:sp>
       <p:sp>
         <p:nvSpPr>
-          <p:cNvPr id="10" name="Shape 8"/>
-          <p:cNvSpPr/>
-          <p:nvPr/>
-        </p:nvSpPr>
-        <p:spPr>
-          <a:xfrm>
-            <a:off x="2514600" y="4462272"/>
-            <a:ext cx="1719072" cy="329184"/>
+          <p:cNvPr id="8" name="Shape 6"/>
+          <p:cNvSpPr/>
+          <p:nvPr/>
+        </p:nvSpPr>
+        <p:spPr>
+          <a:xfrm>
+            <a:off x="2487168" y="4480560"/>
+            <a:ext cx="1645920" cy="329184"/>
           </a:xfrm>
           <a:prstGeom prst="roundRect">
             <a:avLst>
@@ -2041,14 +1980,14 @@
       </p:sp>
       <p:sp>
         <p:nvSpPr>
-          <p:cNvPr id="11" name="Text 9"/>
-          <p:cNvSpPr/>
-          <p:nvPr/>
-        </p:nvSpPr>
-        <p:spPr>
-          <a:xfrm>
-            <a:off x="2587752" y="4530852"/>
-            <a:ext cx="1572768" cy="164592"/>
+          <p:cNvPr id="9" name="Text 7"/>
+          <p:cNvSpPr/>
+          <p:nvPr/>
+        </p:nvSpPr>
+        <p:spPr>
+          <a:xfrm>
+            <a:off x="2560320" y="4549140"/>
+            <a:ext cx="1499616" cy="164592"/>
           </a:xfrm>
           <a:prstGeom prst="rect">
             <a:avLst/>
@@ -2077,14 +2016,14 @@
       </p:sp>
       <p:sp>
         <p:nvSpPr>
-          <p:cNvPr id="12" name="Shape 10"/>
-          <p:cNvSpPr/>
-          <p:nvPr/>
-        </p:nvSpPr>
-        <p:spPr>
-          <a:xfrm>
-            <a:off x="4389120" y="4462272"/>
-            <a:ext cx="2029968" cy="329184"/>
+          <p:cNvPr id="10" name="Shape 8"/>
+          <p:cNvSpPr/>
+          <p:nvPr/>
+        </p:nvSpPr>
+        <p:spPr>
+          <a:xfrm>
+            <a:off x="4315968" y="4480560"/>
+            <a:ext cx="2011680" cy="329184"/>
           </a:xfrm>
           <a:prstGeom prst="roundRect">
             <a:avLst>
@@ -2104,14 +2043,14 @@
       </p:sp>
       <p:sp>
         <p:nvSpPr>
-          <p:cNvPr id="13" name="Text 11"/>
-          <p:cNvSpPr/>
-          <p:nvPr/>
-        </p:nvSpPr>
-        <p:spPr>
-          <a:xfrm>
-            <a:off x="4462272" y="4530852"/>
-            <a:ext cx="1883664" cy="164592"/>
+          <p:cNvPr id="11" name="Text 9"/>
+          <p:cNvSpPr/>
+          <p:nvPr/>
+        </p:nvSpPr>
+        <p:spPr>
+          <a:xfrm>
+            <a:off x="4389120" y="4549140"/>
+            <a:ext cx="1865376" cy="164592"/>
           </a:xfrm>
           <a:prstGeom prst="rect">
             <a:avLst/>
@@ -2132,7 +2071,7 @@
                   <a:srgbClr val="FFFFFF"/>
                 </a:solidFill>
               </a:rPr>
-              <a:t>Append-only events</a:t>
+              <a:t>Append-only audit</a:t>
             </a:r>
             <a:endParaRPr lang="en-US" sz="870" dirty="0"/>
           </a:p>
@@ -2140,60 +2079,24 @@
       </p:sp>
       <p:sp>
         <p:nvSpPr>
-          <p:cNvPr id="14" name="Text 12"/>
-          <p:cNvSpPr/>
-          <p:nvPr/>
-        </p:nvSpPr>
-        <p:spPr>
-          <a:xfrm>
-            <a:off x="758952" y="5138928"/>
-            <a:ext cx="4114800" cy="320040"/>
-          </a:xfrm>
-          <a:prstGeom prst="rect">
-            <a:avLst/>
-          </a:prstGeom>
-          <a:noFill/>
-          <a:ln/>
-        </p:spPr>
-        <p:txBody>
-          <a:bodyPr wrap="square" lIns="0" tIns="0" rIns="0" bIns="0" rtlCol="0" anchor="ctr"/>
-          <a:lstStyle/>
-          <a:p>
-            <a:pPr indent="0" marL="0">
-              <a:buNone/>
-            </a:pPr>
-            <a:r>
-              <a:rPr lang="en-US" sz="1200" b="1" dirty="0">
-                <a:solidFill>
-                  <a:srgbClr val="8FA7C0"/>
-                </a:solidFill>
-              </a:rPr>
-              <a:t>Executive &amp; Technical Brief</a:t>
-            </a:r>
-            <a:endParaRPr lang="en-US" sz="1200" dirty="0"/>
-          </a:p>
-        </p:txBody>
-      </p:sp>
-      <p:sp>
-        <p:nvSpPr>
-          <p:cNvPr id="15" name="Shape 13"/>
-          <p:cNvSpPr/>
-          <p:nvPr/>
-        </p:nvSpPr>
-        <p:spPr>
-          <a:xfrm>
-            <a:off x="8458200" y="1078992"/>
-            <a:ext cx="2423160" cy="621792"/>
+          <p:cNvPr id="12" name="Shape 10"/>
+          <p:cNvSpPr/>
+          <p:nvPr/>
+        </p:nvSpPr>
+        <p:spPr>
+          <a:xfrm>
+            <a:off x="8366760" y="1051560"/>
+            <a:ext cx="2651760" cy="621792"/>
           </a:xfrm>
           <a:prstGeom prst="roundRect">
             <a:avLst>
-              <a:gd name="adj" fmla="val 10294"/>
+              <a:gd name="adj" fmla="val 8824"/>
             </a:avLst>
           </a:prstGeom>
           <a:solidFill>
             <a:srgbClr val="10243A"/>
           </a:solidFill>
-          <a:ln w="15240">
+          <a:ln w="16510">
             <a:solidFill>
               <a:srgbClr val="35D0E6"/>
             </a:solidFill>
@@ -2203,14 +2106,14 @@
       </p:sp>
       <p:sp>
         <p:nvSpPr>
-          <p:cNvPr id="16" name="Text 14"/>
-          <p:cNvSpPr/>
-          <p:nvPr/>
-        </p:nvSpPr>
-        <p:spPr>
-          <a:xfrm>
-            <a:off x="8549640" y="1188720"/>
-            <a:ext cx="2240280" cy="438912"/>
+          <p:cNvPr id="13" name="Text 11"/>
+          <p:cNvSpPr/>
+          <p:nvPr/>
+        </p:nvSpPr>
+        <p:spPr>
+          <a:xfrm>
+            <a:off x="8458200" y="1124712"/>
+            <a:ext cx="2468880" cy="475488"/>
           </a:xfrm>
           <a:prstGeom prst="rect">
             <a:avLst/>
@@ -2233,7 +2136,7 @@
                   <a:srgbClr val="F5F8FC"/>
                 </a:solidFill>
               </a:rPr>
-              <a:t>Delegated AI Grant</a:t>
+              <a:t>Consent Receipt</a:t>
             </a:r>
             <a:endParaRPr lang="en-US" sz="1300" dirty="0"/>
           </a:p>
@@ -2241,24 +2144,24 @@
       </p:sp>
       <p:sp>
         <p:nvSpPr>
-          <p:cNvPr id="17" name="Shape 15"/>
-          <p:cNvSpPr/>
-          <p:nvPr/>
-        </p:nvSpPr>
-        <p:spPr>
-          <a:xfrm>
-            <a:off x="8458200" y="2075688"/>
-            <a:ext cx="2423160" cy="621792"/>
+          <p:cNvPr id="14" name="Shape 12"/>
+          <p:cNvSpPr/>
+          <p:nvPr/>
+        </p:nvSpPr>
+        <p:spPr>
+          <a:xfrm>
+            <a:off x="8366760" y="2029968"/>
+            <a:ext cx="2651760" cy="621792"/>
           </a:xfrm>
           <a:prstGeom prst="roundRect">
             <a:avLst>
-              <a:gd name="adj" fmla="val 10294"/>
+              <a:gd name="adj" fmla="val 8824"/>
             </a:avLst>
           </a:prstGeom>
           <a:solidFill>
             <a:srgbClr val="10243A"/>
           </a:solidFill>
-          <a:ln w="15240">
+          <a:ln w="16510">
             <a:solidFill>
               <a:srgbClr val="5D8CFF"/>
             </a:solidFill>
@@ -2268,14 +2171,14 @@
       </p:sp>
       <p:sp>
         <p:nvSpPr>
-          <p:cNvPr id="18" name="Text 16"/>
-          <p:cNvSpPr/>
-          <p:nvPr/>
-        </p:nvSpPr>
-        <p:spPr>
-          <a:xfrm>
-            <a:off x="8549640" y="2185416"/>
-            <a:ext cx="2240280" cy="438912"/>
+          <p:cNvPr id="15" name="Text 13"/>
+          <p:cNvSpPr/>
+          <p:nvPr/>
+        </p:nvSpPr>
+        <p:spPr>
+          <a:xfrm>
+            <a:off x="8458200" y="2103120"/>
+            <a:ext cx="2468880" cy="475488"/>
           </a:xfrm>
           <a:prstGeom prst="rect">
             <a:avLst/>
@@ -2298,7 +2201,7 @@
                   <a:srgbClr val="F5F8FC"/>
                 </a:solidFill>
               </a:rPr>
-              <a:t>Execution Token</a:t>
+              <a:t>Delegated AI Grant</a:t>
             </a:r>
             <a:endParaRPr lang="en-US" sz="1300" dirty="0"/>
           </a:p>
@@ -2306,24 +2209,24 @@
       </p:sp>
       <p:sp>
         <p:nvSpPr>
-          <p:cNvPr id="19" name="Shape 17"/>
-          <p:cNvSpPr/>
-          <p:nvPr/>
-        </p:nvSpPr>
-        <p:spPr>
-          <a:xfrm>
-            <a:off x="7571232" y="3182112"/>
-            <a:ext cx="2048256" cy="731520"/>
+          <p:cNvPr id="16" name="Shape 14"/>
+          <p:cNvSpPr/>
+          <p:nvPr/>
+        </p:nvSpPr>
+        <p:spPr>
+          <a:xfrm>
+            <a:off x="8366760" y="3008376"/>
+            <a:ext cx="2651760" cy="621792"/>
           </a:xfrm>
           <a:prstGeom prst="roundRect">
             <a:avLst>
-              <a:gd name="adj" fmla="val 8750"/>
+              <a:gd name="adj" fmla="val 8824"/>
             </a:avLst>
           </a:prstGeom>
           <a:solidFill>
             <a:srgbClr val="10243A"/>
           </a:solidFill>
-          <a:ln w="15240">
+          <a:ln w="16510">
             <a:solidFill>
               <a:srgbClr val="52D273"/>
             </a:solidFill>
@@ -2333,14 +2236,14 @@
       </p:sp>
       <p:sp>
         <p:nvSpPr>
-          <p:cNvPr id="20" name="Text 18"/>
-          <p:cNvSpPr/>
-          <p:nvPr/>
-        </p:nvSpPr>
-        <p:spPr>
-          <a:xfrm>
-            <a:off x="7662672" y="3291840"/>
-            <a:ext cx="1865376" cy="548640"/>
+          <p:cNvPr id="17" name="Text 15"/>
+          <p:cNvSpPr/>
+          <p:nvPr/>
+        </p:nvSpPr>
+        <p:spPr>
+          <a:xfrm>
+            <a:off x="8458200" y="3081528"/>
+            <a:ext cx="2468880" cy="475488"/>
           </a:xfrm>
           <a:prstGeom prst="rect">
             <a:avLst/>
@@ -2358,54 +2261,54 @@
               <a:buNone/>
             </a:pPr>
             <a:r>
-              <a:rPr lang="en-US" sz="1200" b="1" dirty="0">
+              <a:rPr lang="en-US" sz="1300" b="1" dirty="0">
                 <a:solidFill>
                   <a:srgbClr val="F5F8FC"/>
                 </a:solidFill>
               </a:rPr>
-              <a:t>Usage Event Plane</a:t>
-            </a:r>
-            <a:endParaRPr lang="en-US" sz="1200" dirty="0"/>
-          </a:p>
-        </p:txBody>
-      </p:sp>
-      <p:sp>
-        <p:nvSpPr>
-          <p:cNvPr id="21" name="Shape 19"/>
-          <p:cNvSpPr/>
-          <p:nvPr/>
-        </p:nvSpPr>
-        <p:spPr>
-          <a:xfrm>
-            <a:off x="9720072" y="3182112"/>
-            <a:ext cx="2048256" cy="731520"/>
+              <a:t>Execution Token</a:t>
+            </a:r>
+            <a:endParaRPr lang="en-US" sz="1300" dirty="0"/>
+          </a:p>
+        </p:txBody>
+      </p:sp>
+      <p:sp>
+        <p:nvSpPr>
+          <p:cNvPr id="18" name="Shape 16"/>
+          <p:cNvSpPr/>
+          <p:nvPr/>
+        </p:nvSpPr>
+        <p:spPr>
+          <a:xfrm>
+            <a:off x="7543800" y="4160520"/>
+            <a:ext cx="2103120" cy="685800"/>
           </a:xfrm>
           <a:prstGeom prst="roundRect">
             <a:avLst>
-              <a:gd name="adj" fmla="val 8750"/>
+              <a:gd name="adj" fmla="val 8000"/>
             </a:avLst>
           </a:prstGeom>
           <a:solidFill>
             <a:srgbClr val="10243A"/>
           </a:solidFill>
-          <a:ln w="15240">
-            <a:solidFill>
-              <a:srgbClr val="FFBE55"/>
-            </a:solidFill>
-            <a:prstDash val="solid"/>
-          </a:ln>
-        </p:spPr>
-      </p:sp>
-      <p:sp>
-        <p:nvSpPr>
-          <p:cNvPr id="22" name="Text 20"/>
-          <p:cNvSpPr/>
-          <p:nvPr/>
-        </p:nvSpPr>
-        <p:spPr>
-          <a:xfrm>
-            <a:off x="9811512" y="3291840"/>
-            <a:ext cx="1865376" cy="548640"/>
+          <a:ln w="16510">
+            <a:solidFill>
+              <a:srgbClr val="35D0E6"/>
+            </a:solidFill>
+            <a:prstDash val="solid"/>
+          </a:ln>
+        </p:spPr>
+      </p:sp>
+      <p:sp>
+        <p:nvSpPr>
+          <p:cNvPr id="19" name="Text 17"/>
+          <p:cNvSpPr/>
+          <p:nvPr/>
+        </p:nvSpPr>
+        <p:spPr>
+          <a:xfrm>
+            <a:off x="7635240" y="4233672"/>
+            <a:ext cx="1920240" cy="539496"/>
           </a:xfrm>
           <a:prstGeom prst="rect">
             <a:avLst/>
@@ -2428,7 +2331,7 @@
                   <a:srgbClr val="F5F8FC"/>
                 </a:solidFill>
               </a:rPr>
-              <a:t>Ledger Event Plane</a:t>
+              <a:t>Usage Evidence</a:t>
             </a:r>
             <a:endParaRPr lang="en-US" sz="1200" dirty="0"/>
           </a:p>
@@ -2436,14 +2339,103 @@
       </p:sp>
       <p:sp>
         <p:nvSpPr>
+          <p:cNvPr id="20" name="Shape 18"/>
+          <p:cNvSpPr/>
+          <p:nvPr/>
+        </p:nvSpPr>
+        <p:spPr>
+          <a:xfrm>
+            <a:off x="9829800" y="4160520"/>
+            <a:ext cx="2103120" cy="685800"/>
+          </a:xfrm>
+          <a:prstGeom prst="roundRect">
+            <a:avLst>
+              <a:gd name="adj" fmla="val 8000"/>
+            </a:avLst>
+          </a:prstGeom>
+          <a:solidFill>
+            <a:srgbClr val="10243A"/>
+          </a:solidFill>
+          <a:ln w="16510">
+            <a:solidFill>
+              <a:srgbClr val="FFBE55"/>
+            </a:solidFill>
+            <a:prstDash val="solid"/>
+          </a:ln>
+        </p:spPr>
+      </p:sp>
+      <p:sp>
+        <p:nvSpPr>
+          <p:cNvPr id="21" name="Text 19"/>
+          <p:cNvSpPr/>
+          <p:nvPr/>
+        </p:nvSpPr>
+        <p:spPr>
+          <a:xfrm>
+            <a:off x="9921240" y="4233672"/>
+            <a:ext cx="1920240" cy="539496"/>
+          </a:xfrm>
+          <a:prstGeom prst="rect">
+            <a:avLst/>
+          </a:prstGeom>
+          <a:noFill/>
+          <a:ln/>
+        </p:spPr>
+        <p:txBody>
+          <a:bodyPr wrap="square" lIns="254" tIns="254" rIns="254" bIns="254" rtlCol="0" anchor="ctr">
+            <a:normAutofit/>
+          </a:bodyPr>
+          <a:lstStyle/>
+          <a:p>
+            <a:pPr algn="ctr" indent="0" marL="0">
+              <a:buNone/>
+            </a:pPr>
+            <a:r>
+              <a:rPr lang="en-US" sz="1200" b="1" dirty="0">
+                <a:solidFill>
+                  <a:srgbClr val="F5F8FC"/>
+                </a:solidFill>
+              </a:rPr>
+              <a:t>Economic Ledger</a:t>
+            </a:r>
+            <a:endParaRPr lang="en-US" sz="1200" dirty="0"/>
+          </a:p>
+        </p:txBody>
+      </p:sp>
+      <p:sp>
+        <p:nvSpPr>
+          <p:cNvPr id="22" name="Shape 20"/>
+          <p:cNvSpPr/>
+          <p:nvPr/>
+        </p:nvSpPr>
+        <p:spPr>
+          <a:xfrm>
+            <a:off x="9692640" y="1673352"/>
+            <a:ext cx="0" cy="338328"/>
+          </a:xfrm>
+          <a:prstGeom prst="line">
+            <a:avLst/>
+          </a:prstGeom>
+          <a:noFill/>
+          <a:ln w="25400">
+            <a:solidFill>
+              <a:srgbClr val="35D0E6"/>
+            </a:solidFill>
+            <a:prstDash val="solid"/>
+            <a:tailEnd type="triangle"/>
+          </a:ln>
+        </p:spPr>
+      </p:sp>
+      <p:sp>
+        <p:nvSpPr>
           <p:cNvPr id="23" name="Shape 21"/>
           <p:cNvSpPr/>
           <p:nvPr/>
         </p:nvSpPr>
         <p:spPr>
           <a:xfrm>
-            <a:off x="9674352" y="1700784"/>
-            <a:ext cx="0" cy="356616"/>
+            <a:off x="9692640" y="2651760"/>
+            <a:ext cx="0" cy="338328"/>
           </a:xfrm>
           <a:prstGeom prst="line">
             <a:avLst/>
@@ -2451,7 +2443,7 @@
           <a:noFill/>
           <a:ln w="25400">
             <a:solidFill>
-              <a:srgbClr val="35D0E6"/>
+              <a:srgbClr val="5D8CFF"/>
             </a:solidFill>
             <a:prstDash val="solid"/>
             <a:tailEnd type="triangle"/>
@@ -2466,8 +2458,8 @@
         </p:nvSpPr>
         <p:spPr>
           <a:xfrm>
-            <a:off x="9674352" y="2706624"/>
-            <a:ext cx="-1060704" cy="457200"/>
+            <a:off x="9692640" y="3630168"/>
+            <a:ext cx="-1097280" cy="512064"/>
           </a:xfrm>
           <a:prstGeom prst="line">
             <a:avLst/>
@@ -2475,7 +2467,7 @@
           <a:noFill/>
           <a:ln w="25400">
             <a:solidFill>
-              <a:srgbClr val="5D8CFF"/>
+              <a:srgbClr val="52D273"/>
             </a:solidFill>
             <a:prstDash val="solid"/>
             <a:tailEnd type="triangle"/>
@@ -2490,8 +2482,8 @@
         </p:nvSpPr>
         <p:spPr>
           <a:xfrm>
-            <a:off x="9674352" y="2706624"/>
-            <a:ext cx="1069848" cy="457200"/>
+            <a:off x="9692640" y="3630168"/>
+            <a:ext cx="1188720" cy="512064"/>
           </a:xfrm>
           <a:prstGeom prst="line">
             <a:avLst/>
@@ -2499,7 +2491,7 @@
           <a:noFill/>
           <a:ln w="25400">
             <a:solidFill>
-              <a:srgbClr val="5D8CFF"/>
+              <a:srgbClr val="52D273"/>
             </a:solidFill>
             <a:prstDash val="solid"/>
             <a:tailEnd type="triangle"/>
@@ -2608,11 +2600,8 @@
                 <a:solidFill>
                   <a:srgbClr val="F5F8FC"/>
                 </a:solidFill>
-                <a:latin typeface="Arial" pitchFamily="34" charset="0"/>
-                <a:ea typeface="Arial" pitchFamily="34" charset="-122"/>
-                <a:cs typeface="Arial" pitchFamily="34" charset="-120"/>
-              </a:rPr>
-              <a:t>Why ABDS needed a v0.5 upgrade</a:t>
+              </a:rPr>
+              <a:t>From authorization to trustworthy accounting</a:t>
             </a:r>
             <a:endParaRPr lang="en-US" sz="2500" dirty="0"/>
           </a:p>
@@ -2627,7 +2616,7 @@
         <p:spPr>
           <a:xfrm>
             <a:off x="612648" y="932688"/>
-            <a:ext cx="10789920" cy="329184"/>
+            <a:ext cx="10789920" cy="310896"/>
           </a:xfrm>
           <a:prstGeom prst="rect">
             <a:avLst/>
@@ -2647,11 +2636,8 @@
                 <a:solidFill>
                   <a:srgbClr val="8FA7C0"/>
                 </a:solidFill>
-                <a:latin typeface="Arial" pitchFamily="34" charset="0"/>
-                <a:ea typeface="Arial" pitchFamily="34" charset="-122"/>
-                <a:cs typeface="Arial" pitchFamily="34" charset="-120"/>
-              </a:rPr>
-              <a:t>The authorization core was necessary - but not sufficient for production cost control.</a:t>
+              </a:rPr>
+              <a:t>v0.6 is a narrow trust extension of the v0.5 accounting architecture.</a:t>
             </a:r>
             <a:endParaRPr lang="en-US" sz="1150" dirty="0"/>
           </a:p>
@@ -2670,7 +2656,7 @@
           </a:xfrm>
           <a:prstGeom prst="roundRect">
             <a:avLst>
-              <a:gd name="adj" fmla="val 4000"/>
+              <a:gd name="adj" fmla="val 3000"/>
             </a:avLst>
           </a:prstGeom>
           <a:solidFill>
@@ -2699,11 +2685,11 @@
             <a:avLst/>
           </a:prstGeom>
           <a:solidFill>
-            <a:srgbClr val="FF6B6B"/>
+            <a:srgbClr val="5D8CFF"/>
           </a:solidFill>
           <a:ln w="12700">
             <a:solidFill>
-              <a:srgbClr val="FF6B6B"/>
+              <a:srgbClr val="5D8CFF"/>
             </a:solidFill>
             <a:prstDash val="solid"/>
           </a:ln>
@@ -2739,7 +2725,7 @@
                   <a:srgbClr val="F5F8FC"/>
                 </a:solidFill>
               </a:rPr>
-              <a:t>Legacy gap 1 - Invoice opacity</a:t>
+              <a:t>v0.4 - Who may fund?</a:t>
             </a:r>
             <a:endParaRPr lang="en-US" sz="1300" dirty="0"/>
           </a:p>
@@ -2753,8 +2739,8 @@
         </p:nvSpPr>
         <p:spPr>
           <a:xfrm>
-            <a:off x="795528" y="1920240"/>
-            <a:ext cx="3172968" cy="1188720"/>
+            <a:off x="795528" y="1929384"/>
+            <a:ext cx="3154680" cy="1170432"/>
           </a:xfrm>
           <a:prstGeom prst="rect">
             <a:avLst/>
@@ -2772,14 +2758,14 @@
               <a:buNone/>
             </a:pPr>
             <a:r>
-              <a:rPr lang="en-US" sz="1040" dirty="0">
+              <a:rPr lang="en-US" sz="1030" dirty="0">
                 <a:solidFill>
                   <a:srgbClr val="D8E3F0"/>
                 </a:solidFill>
               </a:rPr>
-              <a:t>A Provider invoice cannot explain which user, workspace, feature, workflow, agent step, route, retry, or model attempt caused the cost.</a:t>
-            </a:r>
-            <a:endParaRPr lang="en-US" sz="1040" dirty="0"/>
+              <a:t>Payer-neutral roles, Sponsor funding, structured economic authorization, privacy, and no silent payer substitution.</a:t>
+            </a:r>
+            <a:endParaRPr lang="en-US" sz="1030" dirty="0"/>
           </a:p>
         </p:txBody>
       </p:sp>
@@ -2796,7 +2782,7 @@
           </a:xfrm>
           <a:prstGeom prst="roundRect">
             <a:avLst>
-              <a:gd name="adj" fmla="val 4000"/>
+              <a:gd name="adj" fmla="val 3000"/>
             </a:avLst>
           </a:prstGeom>
           <a:solidFill>
@@ -2825,11 +2811,11 @@
             <a:avLst/>
           </a:prstGeom>
           <a:solidFill>
-            <a:srgbClr val="FFBE55"/>
+            <a:srgbClr val="52D273"/>
           </a:solidFill>
           <a:ln w="12700">
             <a:solidFill>
-              <a:srgbClr val="FFBE55"/>
+              <a:srgbClr val="52D273"/>
             </a:solidFill>
             <a:prstDash val="solid"/>
           </a:ln>
@@ -2865,7 +2851,7 @@
                   <a:srgbClr val="F5F8FC"/>
                 </a:solidFill>
               </a:rPr>
-              <a:t>Legacy gap 2 - Variable cost</a:t>
+              <a:t>v0.5 - What happened?</a:t>
             </a:r>
             <a:endParaRPr lang="en-US" sz="1300" dirty="0"/>
           </a:p>
@@ -2879,8 +2865,8 @@
         </p:nvSpPr>
         <p:spPr>
           <a:xfrm>
-            <a:off x="4544568" y="1920240"/>
-            <a:ext cx="3172968" cy="1188720"/>
+            <a:off x="4544568" y="1929384"/>
+            <a:ext cx="3154680" cy="1170432"/>
           </a:xfrm>
           <a:prstGeom prst="rect">
             <a:avLst/>
@@ -2898,14 +2884,14 @@
               <a:buNone/>
             </a:pPr>
             <a:r>
-              <a:rPr lang="en-US" sz="1040" dirty="0">
+              <a:rPr lang="en-US" sz="1030" dirty="0">
                 <a:solidFill>
                   <a:srgbClr val="D8E3F0"/>
                 </a:solidFill>
               </a:rPr>
-              <a:t>Streaming, multimodal, batch and agentic operations do not have a reliable final cost when the request begins.</a:t>
-            </a:r>
-            <a:endParaRPr lang="en-US" sz="1040" dirty="0"/>
+              <a:t>One event per physical attempt, separate Ledger Events, retries and fallback, reservation, settlement, and adjustment.</a:t>
+            </a:r>
+            <a:endParaRPr lang="en-US" sz="1030" dirty="0"/>
           </a:p>
         </p:txBody>
       </p:sp>
@@ -2922,7 +2908,7 @@
           </a:xfrm>
           <a:prstGeom prst="roundRect">
             <a:avLst>
-              <a:gd name="adj" fmla="val 4000"/>
+              <a:gd name="adj" fmla="val 3000"/>
             </a:avLst>
           </a:prstGeom>
           <a:solidFill>
@@ -2951,11 +2937,11 @@
             <a:avLst/>
           </a:prstGeom>
           <a:solidFill>
-            <a:srgbClr val="5D8CFF"/>
+            <a:srgbClr val="FFBE55"/>
           </a:solidFill>
           <a:ln w="12700">
             <a:solidFill>
-              <a:srgbClr val="5D8CFF"/>
+              <a:srgbClr val="FFBE55"/>
             </a:solidFill>
             <a:prstDash val="solid"/>
           </a:ln>
@@ -2991,7 +2977,7 @@
                   <a:srgbClr val="F5F8FC"/>
                 </a:solidFill>
               </a:rPr>
-              <a:t>Legacy gap 3 - Hidden retries</a:t>
+              <a:t>v0.6 - What proves it?</a:t>
             </a:r>
             <a:endParaRPr lang="en-US" sz="1300" dirty="0"/>
           </a:p>
@@ -3005,8 +2991,8 @@
         </p:nvSpPr>
         <p:spPr>
           <a:xfrm>
-            <a:off x="8293608" y="1920240"/>
-            <a:ext cx="3172968" cy="1188720"/>
+            <a:off x="8293608" y="1929384"/>
+            <a:ext cx="3154680" cy="1170432"/>
           </a:xfrm>
           <a:prstGeom prst="rect">
             <a:avLst/>
@@ -3024,395 +3010,54 @@
               <a:buNone/>
             </a:pPr>
             <a:r>
-              <a:rPr lang="en-US" sz="1040" dirty="0">
+              <a:rPr lang="en-US" sz="1030" dirty="0">
                 <a:solidFill>
                   <a:srgbClr val="D8E3F0"/>
                 </a:solidFill>
               </a:rPr>
-              <a:t>One logical action may trigger several billable physical attempts through retries, fallback, routing or safety calls.</a:t>
-            </a:r>
-            <a:endParaRPr lang="en-US" sz="1040" dirty="0"/>
-          </a:p>
-        </p:txBody>
-      </p:sp>
-      <p:sp>
-        <p:nvSpPr>
-          <p:cNvPr id="16" name="Text 14"/>
-          <p:cNvSpPr/>
-          <p:nvPr/>
-        </p:nvSpPr>
-        <p:spPr>
-          <a:xfrm>
-            <a:off x="640080" y="3675888"/>
-            <a:ext cx="5303520" cy="411480"/>
-          </a:xfrm>
-          <a:prstGeom prst="rect">
-            <a:avLst/>
-          </a:prstGeom>
-          <a:noFill/>
-          <a:ln/>
-        </p:spPr>
-        <p:txBody>
-          <a:bodyPr wrap="square" lIns="0" tIns="0" rIns="0" bIns="0" rtlCol="0" anchor="ctr"/>
-          <a:lstStyle/>
-          <a:p>
-            <a:pPr indent="0" marL="0">
-              <a:buNone/>
-            </a:pPr>
-            <a:r>
-              <a:rPr lang="en-US" sz="1900" b="1" dirty="0">
-                <a:solidFill>
-                  <a:srgbClr val="F5F8FC"/>
-                </a:solidFill>
-              </a:rPr>
-              <a:t>v0.5 adds the missing operational layer</a:t>
-            </a:r>
-            <a:endParaRPr lang="en-US" sz="1900" dirty="0"/>
-          </a:p>
-        </p:txBody>
-      </p:sp>
-      <p:sp>
-        <p:nvSpPr>
-          <p:cNvPr id="17" name="Shape 15"/>
-          <p:cNvSpPr/>
-          <p:nvPr/>
-        </p:nvSpPr>
-        <p:spPr>
-          <a:xfrm>
-            <a:off x="777240" y="4251960"/>
-            <a:ext cx="146304" cy="146304"/>
-          </a:xfrm>
-          <a:prstGeom prst="ellipse">
-            <a:avLst/>
-          </a:prstGeom>
-          <a:solidFill>
-            <a:srgbClr val="52D273"/>
-          </a:solidFill>
-          <a:ln w="12700">
-            <a:solidFill>
-              <a:srgbClr val="52D273"/>
-            </a:solidFill>
-            <a:prstDash val="solid"/>
-          </a:ln>
-        </p:spPr>
-      </p:sp>
-      <p:sp>
-        <p:nvSpPr>
-          <p:cNvPr id="18" name="Text 16"/>
-          <p:cNvSpPr/>
-          <p:nvPr/>
-        </p:nvSpPr>
-        <p:spPr>
-          <a:xfrm>
-            <a:off x="1024128" y="4197096"/>
-            <a:ext cx="5486400" cy="246888"/>
-          </a:xfrm>
-          <a:prstGeom prst="rect">
-            <a:avLst/>
-          </a:prstGeom>
-          <a:noFill/>
-          <a:ln/>
-        </p:spPr>
-        <p:txBody>
-          <a:bodyPr wrap="square" lIns="0" tIns="0" rIns="0" bIns="0" rtlCol="0" anchor="ctr"/>
-          <a:lstStyle/>
-          <a:p>
-            <a:pPr indent="0" marL="0">
-              <a:buNone/>
-            </a:pPr>
-            <a:r>
-              <a:rPr lang="en-US" sz="1120" dirty="0">
-                <a:solidFill>
-                  <a:srgbClr val="D8E3F0"/>
-                </a:solidFill>
-              </a:rPr>
-              <a:t>One immutable event per physical attempt</a:t>
-            </a:r>
-            <a:endParaRPr lang="en-US" sz="1120" dirty="0"/>
-          </a:p>
-        </p:txBody>
-      </p:sp>
-      <p:sp>
-        <p:nvSpPr>
-          <p:cNvPr id="19" name="Shape 17"/>
-          <p:cNvSpPr/>
-          <p:nvPr/>
-        </p:nvSpPr>
-        <p:spPr>
-          <a:xfrm>
-            <a:off x="777240" y="4608576"/>
-            <a:ext cx="146304" cy="146304"/>
-          </a:xfrm>
-          <a:prstGeom prst="ellipse">
-            <a:avLst/>
-          </a:prstGeom>
-          <a:solidFill>
-            <a:srgbClr val="35D0E6"/>
-          </a:solidFill>
-          <a:ln w="12700">
-            <a:solidFill>
-              <a:srgbClr val="35D0E6"/>
-            </a:solidFill>
-            <a:prstDash val="solid"/>
-          </a:ln>
-        </p:spPr>
-      </p:sp>
-      <p:sp>
-        <p:nvSpPr>
-          <p:cNvPr id="20" name="Text 18"/>
-          <p:cNvSpPr/>
-          <p:nvPr/>
-        </p:nvSpPr>
-        <p:spPr>
-          <a:xfrm>
-            <a:off x="1024128" y="4553712"/>
-            <a:ext cx="5486400" cy="246888"/>
-          </a:xfrm>
-          <a:prstGeom prst="rect">
-            <a:avLst/>
-          </a:prstGeom>
-          <a:noFill/>
-          <a:ln/>
-        </p:spPr>
-        <p:txBody>
-          <a:bodyPr wrap="square" lIns="0" tIns="0" rIns="0" bIns="0" rtlCol="0" anchor="ctr"/>
-          <a:lstStyle/>
-          <a:p>
-            <a:pPr indent="0" marL="0">
-              <a:buNone/>
-            </a:pPr>
-            <a:r>
-              <a:rPr lang="en-US" sz="1120" dirty="0">
-                <a:solidFill>
-                  <a:srgbClr val="D8E3F0"/>
-                </a:solidFill>
-              </a:rPr>
-              <a:t>Separate technical usage and economic ledger events</a:t>
-            </a:r>
-            <a:endParaRPr lang="en-US" sz="1120" dirty="0"/>
-          </a:p>
-        </p:txBody>
-      </p:sp>
-      <p:sp>
-        <p:nvSpPr>
-          <p:cNvPr id="21" name="Shape 19"/>
-          <p:cNvSpPr/>
-          <p:nvPr/>
-        </p:nvSpPr>
-        <p:spPr>
-          <a:xfrm>
-            <a:off x="777240" y="4965192"/>
-            <a:ext cx="146304" cy="146304"/>
-          </a:xfrm>
-          <a:prstGeom prst="ellipse">
-            <a:avLst/>
-          </a:prstGeom>
-          <a:solidFill>
-            <a:srgbClr val="5D8CFF"/>
-          </a:solidFill>
-          <a:ln w="12700">
-            <a:solidFill>
-              <a:srgbClr val="5D8CFF"/>
-            </a:solidFill>
-            <a:prstDash val="solid"/>
-          </a:ln>
-        </p:spPr>
-      </p:sp>
-      <p:sp>
-        <p:nvSpPr>
-          <p:cNvPr id="22" name="Text 20"/>
-          <p:cNvSpPr/>
-          <p:nvPr/>
-        </p:nvSpPr>
-        <p:spPr>
-          <a:xfrm>
-            <a:off x="1024128" y="4910328"/>
-            <a:ext cx="5486400" cy="246888"/>
-          </a:xfrm>
-          <a:prstGeom prst="rect">
-            <a:avLst/>
-          </a:prstGeom>
-          <a:noFill/>
-          <a:ln/>
-        </p:spPr>
-        <p:txBody>
-          <a:bodyPr wrap="square" lIns="0" tIns="0" rIns="0" bIns="0" rtlCol="0" anchor="ctr"/>
-          <a:lstStyle/>
-          <a:p>
-            <a:pPr indent="0" marL="0">
-              <a:buNone/>
-            </a:pPr>
-            <a:r>
-              <a:rPr lang="en-US" sz="1120" dirty="0">
-                <a:solidFill>
-                  <a:srgbClr val="D8E3F0"/>
-                </a:solidFill>
-              </a:rPr>
-              <a:t>Requested vs resolved model and route attribution</a:t>
-            </a:r>
-            <a:endParaRPr lang="en-US" sz="1120" dirty="0"/>
-          </a:p>
-        </p:txBody>
-      </p:sp>
-      <p:sp>
-        <p:nvSpPr>
-          <p:cNvPr id="23" name="Shape 21"/>
-          <p:cNvSpPr/>
-          <p:nvPr/>
-        </p:nvSpPr>
-        <p:spPr>
-          <a:xfrm>
-            <a:off x="777240" y="5321808"/>
-            <a:ext cx="146304" cy="146304"/>
-          </a:xfrm>
-          <a:prstGeom prst="ellipse">
-            <a:avLst/>
-          </a:prstGeom>
-          <a:solidFill>
-            <a:srgbClr val="FFBE55"/>
-          </a:solidFill>
-          <a:ln w="12700">
-            <a:solidFill>
-              <a:srgbClr val="FFBE55"/>
-            </a:solidFill>
-            <a:prstDash val="solid"/>
-          </a:ln>
-        </p:spPr>
-      </p:sp>
-      <p:sp>
-        <p:nvSpPr>
-          <p:cNvPr id="24" name="Text 22"/>
-          <p:cNvSpPr/>
-          <p:nvPr/>
-        </p:nvSpPr>
-        <p:spPr>
-          <a:xfrm>
-            <a:off x="1024128" y="5266944"/>
-            <a:ext cx="5486400" cy="246888"/>
-          </a:xfrm>
-          <a:prstGeom prst="rect">
-            <a:avLst/>
-          </a:prstGeom>
-          <a:noFill/>
-          <a:ln/>
-        </p:spPr>
-        <p:txBody>
-          <a:bodyPr wrap="square" lIns="0" tIns="0" rIns="0" bIns="0" rtlCol="0" anchor="ctr"/>
-          <a:lstStyle/>
-          <a:p>
-            <a:pPr indent="0" marL="0">
-              <a:buNone/>
-            </a:pPr>
-            <a:r>
-              <a:rPr lang="en-US" sz="1120" dirty="0">
-                <a:solidFill>
-                  <a:srgbClr val="D8E3F0"/>
-                </a:solidFill>
-              </a:rPr>
-              <a:t>Estimate - reserve - execute - settle - release</a:t>
-            </a:r>
-            <a:endParaRPr lang="en-US" sz="1120" dirty="0"/>
-          </a:p>
-        </p:txBody>
-      </p:sp>
-      <p:sp>
-        <p:nvSpPr>
-          <p:cNvPr id="25" name="Shape 23"/>
-          <p:cNvSpPr/>
-          <p:nvPr/>
-        </p:nvSpPr>
-        <p:spPr>
-          <a:xfrm>
-            <a:off x="777240" y="5678424"/>
-            <a:ext cx="146304" cy="146304"/>
-          </a:xfrm>
-          <a:prstGeom prst="ellipse">
-            <a:avLst/>
-          </a:prstGeom>
-          <a:solidFill>
-            <a:srgbClr val="FF6B6B"/>
-          </a:solidFill>
-          <a:ln w="12700">
-            <a:solidFill>
-              <a:srgbClr val="FF6B6B"/>
-            </a:solidFill>
-            <a:prstDash val="solid"/>
-          </a:ln>
-        </p:spPr>
-      </p:sp>
-      <p:sp>
-        <p:nvSpPr>
-          <p:cNvPr id="26" name="Text 24"/>
-          <p:cNvSpPr/>
-          <p:nvPr/>
-        </p:nvSpPr>
-        <p:spPr>
-          <a:xfrm>
-            <a:off x="1024128" y="5623560"/>
-            <a:ext cx="5486400" cy="246888"/>
-          </a:xfrm>
-          <a:prstGeom prst="rect">
-            <a:avLst/>
-          </a:prstGeom>
-          <a:noFill/>
-          <a:ln/>
-        </p:spPr>
-        <p:txBody>
-          <a:bodyPr wrap="square" lIns="0" tIns="0" rIns="0" bIns="0" rtlCol="0" anchor="ctr"/>
-          <a:lstStyle/>
-          <a:p>
-            <a:pPr indent="0" marL="0">
-              <a:buNone/>
-            </a:pPr>
-            <a:r>
-              <a:rPr lang="en-US" sz="1120" dirty="0">
-                <a:solidFill>
-                  <a:srgbClr val="D8E3F0"/>
-                </a:solidFill>
-              </a:rPr>
-              <a:t>Idempotency, reconciliation and compensating adjustments</a:t>
-            </a:r>
-            <a:endParaRPr lang="en-US" sz="1120" dirty="0"/>
-          </a:p>
-        </p:txBody>
-      </p:sp>
-      <p:sp>
-        <p:nvSpPr>
-          <p:cNvPr id="27" name="Shape 25"/>
-          <p:cNvSpPr/>
-          <p:nvPr/>
-        </p:nvSpPr>
-        <p:spPr>
-          <a:xfrm>
-            <a:off x="7315200" y="3977640"/>
-            <a:ext cx="4160520" cy="1417320"/>
+              <a:t>Consent Receipts, evidence classes, scoped ordering, Provider reconciliation, replay control, and negative tests.</a:t>
+            </a:r>
+            <a:endParaRPr lang="en-US" sz="1030" dirty="0"/>
+          </a:p>
+        </p:txBody>
+      </p:sp>
+      <p:sp>
+        <p:nvSpPr>
+          <p:cNvPr id="16" name="Shape 14"/>
+          <p:cNvSpPr/>
+          <p:nvPr/>
+        </p:nvSpPr>
+        <p:spPr>
+          <a:xfrm>
+            <a:off x="914400" y="3977640"/>
+            <a:ext cx="2743200" cy="658368"/>
           </a:xfrm>
           <a:prstGeom prst="roundRect">
             <a:avLst>
-              <a:gd name="adj" fmla="val 4516"/>
+              <a:gd name="adj" fmla="val 8333"/>
             </a:avLst>
           </a:prstGeom>
           <a:solidFill>
             <a:srgbClr val="10243A"/>
           </a:solidFill>
-          <a:ln w="15240">
-            <a:solidFill>
-              <a:srgbClr val="35D0E6"/>
-            </a:solidFill>
-            <a:prstDash val="solid"/>
-          </a:ln>
-        </p:spPr>
-      </p:sp>
-      <p:sp>
-        <p:nvSpPr>
-          <p:cNvPr id="28" name="Text 26"/>
-          <p:cNvSpPr/>
-          <p:nvPr/>
-        </p:nvSpPr>
-        <p:spPr>
-          <a:xfrm>
-            <a:off x="7406640" y="4087368"/>
-            <a:ext cx="3977640" cy="1234440"/>
+          <a:ln w="16510">
+            <a:solidFill>
+              <a:srgbClr val="5D8CFF"/>
+            </a:solidFill>
+            <a:prstDash val="solid"/>
+          </a:ln>
+        </p:spPr>
+      </p:sp>
+      <p:sp>
+        <p:nvSpPr>
+          <p:cNvPr id="17" name="Text 15"/>
+          <p:cNvSpPr/>
+          <p:nvPr/>
+        </p:nvSpPr>
+        <p:spPr>
+          <a:xfrm>
+            <a:off x="1005840" y="4050792"/>
+            <a:ext cx="2560320" cy="512064"/>
           </a:xfrm>
           <a:prstGeom prst="rect">
             <a:avLst/>
@@ -3430,42 +3075,228 @@
               <a:buNone/>
             </a:pPr>
             <a:r>
-              <a:rPr lang="en-US" sz="1500" b="1" dirty="0">
+              <a:rPr lang="en-US" sz="1400" b="1" dirty="0">
                 <a:solidFill>
                   <a:srgbClr val="F5F8FC"/>
                 </a:solidFill>
               </a:rPr>
-              <a:t>From “who may spend?”</a:t>
-            </a:r>
-            <a:endParaRPr lang="en-US" sz="1500" dirty="0"/>
-          </a:p>
+              <a:t>Grant + Token</a:t>
+            </a:r>
+            <a:endParaRPr lang="en-US" sz="1400" dirty="0"/>
+          </a:p>
+        </p:txBody>
+      </p:sp>
+      <p:sp>
+        <p:nvSpPr>
+          <p:cNvPr id="18" name="Shape 16"/>
+          <p:cNvSpPr/>
+          <p:nvPr/>
+        </p:nvSpPr>
+        <p:spPr>
+          <a:xfrm>
+            <a:off x="3703320" y="4306824"/>
+            <a:ext cx="868680" cy="0"/>
+          </a:xfrm>
+          <a:prstGeom prst="line">
+            <a:avLst/>
+          </a:prstGeom>
+          <a:noFill/>
+          <a:ln w="25400">
+            <a:solidFill>
+              <a:srgbClr val="8FA7C0"/>
+            </a:solidFill>
+            <a:prstDash val="solid"/>
+            <a:tailEnd type="triangle"/>
+          </a:ln>
+        </p:spPr>
+      </p:sp>
+      <p:sp>
+        <p:nvSpPr>
+          <p:cNvPr id="19" name="Shape 17"/>
+          <p:cNvSpPr/>
+          <p:nvPr/>
+        </p:nvSpPr>
+        <p:spPr>
+          <a:xfrm>
+            <a:off x="4617720" y="3977640"/>
+            <a:ext cx="2743200" cy="658368"/>
+          </a:xfrm>
+          <a:prstGeom prst="roundRect">
+            <a:avLst>
+              <a:gd name="adj" fmla="val 8333"/>
+            </a:avLst>
+          </a:prstGeom>
+          <a:solidFill>
+            <a:srgbClr val="10243A"/>
+          </a:solidFill>
+          <a:ln w="16510">
+            <a:solidFill>
+              <a:srgbClr val="52D273"/>
+            </a:solidFill>
+            <a:prstDash val="solid"/>
+          </a:ln>
+        </p:spPr>
+      </p:sp>
+      <p:sp>
+        <p:nvSpPr>
+          <p:cNvPr id="20" name="Text 18"/>
+          <p:cNvSpPr/>
+          <p:nvPr/>
+        </p:nvSpPr>
+        <p:spPr>
+          <a:xfrm>
+            <a:off x="4709160" y="4050792"/>
+            <a:ext cx="2560320" cy="512064"/>
+          </a:xfrm>
+          <a:prstGeom prst="rect">
+            <a:avLst/>
+          </a:prstGeom>
+          <a:noFill/>
+          <a:ln/>
+        </p:spPr>
+        <p:txBody>
+          <a:bodyPr wrap="square" lIns="254" tIns="254" rIns="254" bIns="254" rtlCol="0" anchor="ctr">
+            <a:normAutofit/>
+          </a:bodyPr>
+          <a:lstStyle/>
           <a:p>
             <a:pPr algn="ctr" indent="0" marL="0">
               <a:buNone/>
             </a:pPr>
             <a:r>
-              <a:rPr lang="en-US" sz="1500" b="1" dirty="0">
+              <a:rPr lang="en-US" sz="1400" b="1" dirty="0">
                 <a:solidFill>
                   <a:srgbClr val="F5F8FC"/>
                 </a:solidFill>
               </a:rPr>
-              <a:t>to</a:t>
-            </a:r>
-            <a:endParaRPr lang="en-US" sz="1500" dirty="0"/>
-          </a:p>
+              <a:t>Usage + Ledger Events</a:t>
+            </a:r>
+            <a:endParaRPr lang="en-US" sz="1400" dirty="0"/>
+          </a:p>
+        </p:txBody>
+      </p:sp>
+      <p:sp>
+        <p:nvSpPr>
+          <p:cNvPr id="21" name="Shape 19"/>
+          <p:cNvSpPr/>
+          <p:nvPr/>
+        </p:nvSpPr>
+        <p:spPr>
+          <a:xfrm>
+            <a:off x="7406640" y="4306824"/>
+            <a:ext cx="868680" cy="0"/>
+          </a:xfrm>
+          <a:prstGeom prst="line">
+            <a:avLst/>
+          </a:prstGeom>
+          <a:noFill/>
+          <a:ln w="25400">
+            <a:solidFill>
+              <a:srgbClr val="8FA7C0"/>
+            </a:solidFill>
+            <a:prstDash val="solid"/>
+            <a:tailEnd type="triangle"/>
+          </a:ln>
+        </p:spPr>
+      </p:sp>
+      <p:sp>
+        <p:nvSpPr>
+          <p:cNvPr id="22" name="Shape 20"/>
+          <p:cNvSpPr/>
+          <p:nvPr/>
+        </p:nvSpPr>
+        <p:spPr>
+          <a:xfrm>
+            <a:off x="8321040" y="3977640"/>
+            <a:ext cx="2743200" cy="658368"/>
+          </a:xfrm>
+          <a:prstGeom prst="roundRect">
+            <a:avLst>
+              <a:gd name="adj" fmla="val 8333"/>
+            </a:avLst>
+          </a:prstGeom>
+          <a:solidFill>
+            <a:srgbClr val="10243A"/>
+          </a:solidFill>
+          <a:ln w="16510">
+            <a:solidFill>
+              <a:srgbClr val="FFBE55"/>
+            </a:solidFill>
+            <a:prstDash val="solid"/>
+          </a:ln>
+        </p:spPr>
+      </p:sp>
+      <p:sp>
+        <p:nvSpPr>
+          <p:cNvPr id="23" name="Text 21"/>
+          <p:cNvSpPr/>
+          <p:nvPr/>
+        </p:nvSpPr>
+        <p:spPr>
+          <a:xfrm>
+            <a:off x="8412480" y="4050792"/>
+            <a:ext cx="2560320" cy="512064"/>
+          </a:xfrm>
+          <a:prstGeom prst="rect">
+            <a:avLst/>
+          </a:prstGeom>
+          <a:noFill/>
+          <a:ln/>
+        </p:spPr>
+        <p:txBody>
+          <a:bodyPr wrap="square" lIns="254" tIns="254" rIns="254" bIns="254" rtlCol="0" anchor="ctr">
+            <a:normAutofit/>
+          </a:bodyPr>
+          <a:lstStyle/>
           <a:p>
             <a:pPr algn="ctr" indent="0" marL="0">
               <a:buNone/>
             </a:pPr>
             <a:r>
-              <a:rPr lang="en-US" sz="1500" b="1" dirty="0">
+              <a:rPr lang="en-US" sz="1400" b="1" dirty="0">
                 <a:solidFill>
                   <a:srgbClr val="F5F8FC"/>
                 </a:solidFill>
               </a:rPr>
-              <a:t>“who spent, why, where, and how was it settled?”</a:t>
-            </a:r>
-            <a:endParaRPr lang="en-US" sz="1500" dirty="0"/>
+              <a:t>Evidence + Reconciliation</a:t>
+            </a:r>
+            <a:endParaRPr lang="en-US" sz="1400" dirty="0"/>
+          </a:p>
+        </p:txBody>
+      </p:sp>
+      <p:sp>
+        <p:nvSpPr>
+          <p:cNvPr id="24" name="Text 22"/>
+          <p:cNvSpPr/>
+          <p:nvPr/>
+        </p:nvSpPr>
+        <p:spPr>
+          <a:xfrm>
+            <a:off x="3017520" y="5166360"/>
+            <a:ext cx="6217920" cy="365760"/>
+          </a:xfrm>
+          <a:prstGeom prst="rect">
+            <a:avLst/>
+          </a:prstGeom>
+          <a:noFill/>
+          <a:ln/>
+        </p:spPr>
+        <p:txBody>
+          <a:bodyPr wrap="square" lIns="0" tIns="0" rIns="0" bIns="0" rtlCol="0" anchor="ctr"/>
+          <a:lstStyle/>
+          <a:p>
+            <a:pPr algn="ctr" indent="0" marL="0">
+              <a:buNone/>
+            </a:pPr>
+            <a:r>
+              <a:rPr lang="en-US" sz="1400" b="1" dirty="0">
+                <a:solidFill>
+                  <a:srgbClr val="35D0E6"/>
+                </a:solidFill>
+              </a:rPr>
+              <a:t>Existing v0.5 schema identifiers remain unchanged.</a:t>
+            </a:r>
+            <a:endParaRPr lang="en-US" sz="1400" dirty="0"/>
           </a:p>
         </p:txBody>
       </p:sp>
@@ -3571,11 +3402,8 @@
                 <a:solidFill>
                   <a:srgbClr val="F5F8FC"/>
                 </a:solidFill>
-                <a:latin typeface="Arial" pitchFamily="34" charset="0"/>
-                <a:ea typeface="Arial" pitchFamily="34" charset="-122"/>
-                <a:cs typeface="Arial" pitchFamily="34" charset="-120"/>
-              </a:rPr>
-              <a:t>Payer-neutral authorization core</a:t>
+              </a:rPr>
+              <a:t>The v0.6 trust chain</a:t>
             </a:r>
             <a:endParaRPr lang="en-US" sz="2500" dirty="0"/>
           </a:p>
@@ -3590,7 +3418,7 @@
         <p:spPr>
           <a:xfrm>
             <a:off x="612648" y="932688"/>
-            <a:ext cx="10789920" cy="329184"/>
+            <a:ext cx="10789920" cy="310896"/>
           </a:xfrm>
           <a:prstGeom prst="rect">
             <a:avLst/>
@@ -3610,11 +3438,8 @@
                 <a:solidFill>
                   <a:srgbClr val="8FA7C0"/>
                 </a:solidFill>
-                <a:latin typeface="Arial" pitchFamily="34" charset="0"/>
-                <a:ea typeface="Arial" pitchFamily="34" charset="-122"/>
-                <a:cs typeface="Arial" pitchFamily="34" charset="-120"/>
-              </a:rPr>
-              <a:t>The funding party can differ from the person using the application.</a:t>
+              </a:rPr>
+              <a:t>Each object answers a different authorization, execution, evidence, or accounting question.</a:t>
             </a:r>
             <a:endParaRPr lang="en-US" sz="1150" dirty="0"/>
           </a:p>
@@ -3628,20 +3453,20 @@
         </p:nvSpPr>
         <p:spPr>
           <a:xfrm>
-            <a:off x="457200" y="1417320"/>
-            <a:ext cx="1965960" cy="777240"/>
+            <a:off x="320040" y="1920240"/>
+            <a:ext cx="1234440" cy="804672"/>
           </a:xfrm>
           <a:prstGeom prst="roundRect">
             <a:avLst>
-              <a:gd name="adj" fmla="val 8235"/>
+              <a:gd name="adj" fmla="val 6818"/>
             </a:avLst>
           </a:prstGeom>
           <a:solidFill>
             <a:srgbClr val="10243A"/>
           </a:solidFill>
-          <a:ln w="15240">
-            <a:solidFill>
-              <a:srgbClr val="5D8CFF"/>
+          <a:ln w="16510">
+            <a:solidFill>
+              <a:srgbClr val="35D0E6"/>
             </a:solidFill>
             <a:prstDash val="solid"/>
           </a:ln>
@@ -3655,8 +3480,8 @@
         </p:nvSpPr>
         <p:spPr>
           <a:xfrm>
-            <a:off x="548640" y="1527048"/>
-            <a:ext cx="1783080" cy="594360"/>
+            <a:off x="411480" y="1993392"/>
+            <a:ext cx="1051560" cy="658368"/>
           </a:xfrm>
           <a:prstGeom prst="rect">
             <a:avLst/>
@@ -3674,28 +3499,28 @@
               <a:buNone/>
             </a:pPr>
             <a:r>
-              <a:rPr lang="en-US" sz="1200" b="1" dirty="0">
+              <a:rPr lang="en-US" sz="1100" b="1" dirty="0">
                 <a:solidFill>
                   <a:srgbClr val="F5F8FC"/>
                 </a:solidFill>
               </a:rPr>
-              <a:t>User</a:t>
-            </a:r>
-            <a:endParaRPr lang="en-US" sz="1200" dirty="0"/>
+              <a:t>Consent</a:t>
+            </a:r>
+            <a:endParaRPr lang="en-US" sz="1100" dirty="0"/>
           </a:p>
           <a:p>
             <a:pPr algn="ctr" indent="0" marL="0">
               <a:buNone/>
             </a:pPr>
             <a:r>
-              <a:rPr lang="en-US" sz="1200" b="1" dirty="0">
+              <a:rPr lang="en-US" sz="1100" b="1" dirty="0">
                 <a:solidFill>
                   <a:srgbClr val="F5F8FC"/>
                 </a:solidFill>
               </a:rPr>
-              <a:t>Entitlement</a:t>
-            </a:r>
-            <a:endParaRPr lang="en-US" sz="1200" dirty="0"/>
+              <a:t>Receipt</a:t>
+            </a:r>
+            <a:endParaRPr lang="en-US" sz="1100" dirty="0"/>
           </a:p>
         </p:txBody>
       </p:sp>
@@ -3707,35 +3532,59 @@
         </p:nvSpPr>
         <p:spPr>
           <a:xfrm>
-            <a:off x="2761488" y="1417320"/>
-            <a:ext cx="1965960" cy="777240"/>
+            <a:off x="1554480" y="2322576"/>
+            <a:ext cx="182880" cy="0"/>
+          </a:xfrm>
+          <a:prstGeom prst="line">
+            <a:avLst/>
+          </a:prstGeom>
+          <a:noFill/>
+          <a:ln w="19050">
+            <a:solidFill>
+              <a:srgbClr val="8FA7C0"/>
+            </a:solidFill>
+            <a:prstDash val="solid"/>
+            <a:tailEnd type="triangle"/>
+          </a:ln>
+        </p:spPr>
+      </p:sp>
+      <p:sp>
+        <p:nvSpPr>
+          <p:cNvPr id="7" name="Shape 5"/>
+          <p:cNvSpPr/>
+          <p:nvPr/>
+        </p:nvSpPr>
+        <p:spPr>
+          <a:xfrm>
+            <a:off x="1764792" y="1920240"/>
+            <a:ext cx="1234440" cy="804672"/>
           </a:xfrm>
           <a:prstGeom prst="roundRect">
             <a:avLst>
-              <a:gd name="adj" fmla="val 8235"/>
+              <a:gd name="adj" fmla="val 6818"/>
             </a:avLst>
           </a:prstGeom>
           <a:solidFill>
             <a:srgbClr val="10243A"/>
           </a:solidFill>
-          <a:ln w="15240">
-            <a:solidFill>
-              <a:srgbClr val="35D0E6"/>
-            </a:solidFill>
-            <a:prstDash val="solid"/>
-          </a:ln>
-        </p:spPr>
-      </p:sp>
-      <p:sp>
-        <p:nvSpPr>
-          <p:cNvPr id="7" name="Text 5"/>
-          <p:cNvSpPr/>
-          <p:nvPr/>
-        </p:nvSpPr>
-        <p:spPr>
-          <a:xfrm>
-            <a:off x="2852928" y="1527048"/>
-            <a:ext cx="1783080" cy="594360"/>
+          <a:ln w="16510">
+            <a:solidFill>
+              <a:srgbClr val="5D8CFF"/>
+            </a:solidFill>
+            <a:prstDash val="solid"/>
+          </a:ln>
+        </p:spPr>
+      </p:sp>
+      <p:sp>
+        <p:nvSpPr>
+          <p:cNvPr id="8" name="Text 6"/>
+          <p:cNvSpPr/>
+          <p:nvPr/>
+        </p:nvSpPr>
+        <p:spPr>
+          <a:xfrm>
+            <a:off x="1856232" y="1993392"/>
+            <a:ext cx="1051560" cy="658368"/>
           </a:xfrm>
           <a:prstGeom prst="rect">
             <a:avLst/>
@@ -3753,51 +3602,75 @@
               <a:buNone/>
             </a:pPr>
             <a:r>
-              <a:rPr lang="en-US" sz="1200" b="1" dirty="0">
+              <a:rPr lang="en-US" sz="1100" b="1" dirty="0">
                 <a:solidFill>
                   <a:srgbClr val="F5F8FC"/>
                 </a:solidFill>
               </a:rPr>
-              <a:t>Organization</a:t>
-            </a:r>
-            <a:endParaRPr lang="en-US" sz="1200" dirty="0"/>
+              <a:t>Delegated</a:t>
+            </a:r>
+            <a:endParaRPr lang="en-US" sz="1100" dirty="0"/>
           </a:p>
           <a:p>
             <a:pPr algn="ctr" indent="0" marL="0">
               <a:buNone/>
             </a:pPr>
             <a:r>
-              <a:rPr lang="en-US" sz="1200" b="1" dirty="0">
+              <a:rPr lang="en-US" sz="1100" b="1" dirty="0">
                 <a:solidFill>
                   <a:srgbClr val="F5F8FC"/>
                 </a:solidFill>
               </a:rPr>
-              <a:t>Budget</a:t>
-            </a:r>
-            <a:endParaRPr lang="en-US" sz="1200" dirty="0"/>
-          </a:p>
-        </p:txBody>
-      </p:sp>
-      <p:sp>
-        <p:nvSpPr>
-          <p:cNvPr id="8" name="Shape 6"/>
-          <p:cNvSpPr/>
-          <p:nvPr/>
-        </p:nvSpPr>
-        <p:spPr>
-          <a:xfrm>
-            <a:off x="5065776" y="1417320"/>
-            <a:ext cx="1965960" cy="777240"/>
+              <a:t>AI Grant</a:t>
+            </a:r>
+            <a:endParaRPr lang="en-US" sz="1100" dirty="0"/>
+          </a:p>
+        </p:txBody>
+      </p:sp>
+      <p:sp>
+        <p:nvSpPr>
+          <p:cNvPr id="9" name="Shape 7"/>
+          <p:cNvSpPr/>
+          <p:nvPr/>
+        </p:nvSpPr>
+        <p:spPr>
+          <a:xfrm>
+            <a:off x="2999232" y="2322576"/>
+            <a:ext cx="182880" cy="0"/>
+          </a:xfrm>
+          <a:prstGeom prst="line">
+            <a:avLst/>
+          </a:prstGeom>
+          <a:noFill/>
+          <a:ln w="19050">
+            <a:solidFill>
+              <a:srgbClr val="8FA7C0"/>
+            </a:solidFill>
+            <a:prstDash val="solid"/>
+            <a:tailEnd type="triangle"/>
+          </a:ln>
+        </p:spPr>
+      </p:sp>
+      <p:sp>
+        <p:nvSpPr>
+          <p:cNvPr id="10" name="Shape 8"/>
+          <p:cNvSpPr/>
+          <p:nvPr/>
+        </p:nvSpPr>
+        <p:spPr>
+          <a:xfrm>
+            <a:off x="3209544" y="1920240"/>
+            <a:ext cx="1234440" cy="804672"/>
           </a:xfrm>
           <a:prstGeom prst="roundRect">
             <a:avLst>
-              <a:gd name="adj" fmla="val 8235"/>
+              <a:gd name="adj" fmla="val 6818"/>
             </a:avLst>
           </a:prstGeom>
           <a:solidFill>
             <a:srgbClr val="10243A"/>
           </a:solidFill>
-          <a:ln w="15240">
+          <a:ln w="16510">
             <a:solidFill>
               <a:srgbClr val="52D273"/>
             </a:solidFill>
@@ -3807,14 +3680,14 @@
       </p:sp>
       <p:sp>
         <p:nvSpPr>
-          <p:cNvPr id="9" name="Text 7"/>
-          <p:cNvSpPr/>
-          <p:nvPr/>
-        </p:nvSpPr>
-        <p:spPr>
-          <a:xfrm>
-            <a:off x="5157216" y="1527048"/>
-            <a:ext cx="1783080" cy="594360"/>
+          <p:cNvPr id="11" name="Text 9"/>
+          <p:cNvSpPr/>
+          <p:nvPr/>
+        </p:nvSpPr>
+        <p:spPr>
+          <a:xfrm>
+            <a:off x="3300984" y="1993392"/>
+            <a:ext cx="1051560" cy="658368"/>
           </a:xfrm>
           <a:prstGeom prst="rect">
             <a:avLst/>
@@ -3832,68 +3705,92 @@
               <a:buNone/>
             </a:pPr>
             <a:r>
-              <a:rPr lang="en-US" sz="1200" b="1" dirty="0">
+              <a:rPr lang="en-US" sz="1100" b="1" dirty="0">
                 <a:solidFill>
                   <a:srgbClr val="F5F8FC"/>
                 </a:solidFill>
               </a:rPr>
-              <a:t>Sponsor</a:t>
-            </a:r>
-            <a:endParaRPr lang="en-US" sz="1200" dirty="0"/>
+              <a:t>Short-lived</a:t>
+            </a:r>
+            <a:endParaRPr lang="en-US" sz="1100" dirty="0"/>
           </a:p>
           <a:p>
             <a:pPr algn="ctr" indent="0" marL="0">
               <a:buNone/>
             </a:pPr>
             <a:r>
-              <a:rPr lang="en-US" sz="1200" b="1" dirty="0">
+              <a:rPr lang="en-US" sz="1100" b="1" dirty="0">
                 <a:solidFill>
                   <a:srgbClr val="F5F8FC"/>
                 </a:solidFill>
               </a:rPr>
-              <a:t>Budget</a:t>
-            </a:r>
-            <a:endParaRPr lang="en-US" sz="1200" dirty="0"/>
-          </a:p>
-        </p:txBody>
-      </p:sp>
-      <p:sp>
-        <p:nvSpPr>
-          <p:cNvPr id="10" name="Shape 8"/>
-          <p:cNvSpPr/>
-          <p:nvPr/>
-        </p:nvSpPr>
-        <p:spPr>
-          <a:xfrm>
-            <a:off x="7370064" y="1417320"/>
-            <a:ext cx="1965960" cy="777240"/>
+              <a:t>Token</a:t>
+            </a:r>
+            <a:endParaRPr lang="en-US" sz="1100" dirty="0"/>
+          </a:p>
+        </p:txBody>
+      </p:sp>
+      <p:sp>
+        <p:nvSpPr>
+          <p:cNvPr id="12" name="Shape 10"/>
+          <p:cNvSpPr/>
+          <p:nvPr/>
+        </p:nvSpPr>
+        <p:spPr>
+          <a:xfrm>
+            <a:off x="4443984" y="2322576"/>
+            <a:ext cx="182880" cy="0"/>
+          </a:xfrm>
+          <a:prstGeom prst="line">
+            <a:avLst/>
+          </a:prstGeom>
+          <a:noFill/>
+          <a:ln w="19050">
+            <a:solidFill>
+              <a:srgbClr val="8FA7C0"/>
+            </a:solidFill>
+            <a:prstDash val="solid"/>
+            <a:tailEnd type="triangle"/>
+          </a:ln>
+        </p:spPr>
+      </p:sp>
+      <p:sp>
+        <p:nvSpPr>
+          <p:cNvPr id="13" name="Shape 11"/>
+          <p:cNvSpPr/>
+          <p:nvPr/>
+        </p:nvSpPr>
+        <p:spPr>
+          <a:xfrm>
+            <a:off x="4654296" y="1920240"/>
+            <a:ext cx="1234440" cy="804672"/>
           </a:xfrm>
           <a:prstGeom prst="roundRect">
             <a:avLst>
-              <a:gd name="adj" fmla="val 8235"/>
+              <a:gd name="adj" fmla="val 6818"/>
             </a:avLst>
           </a:prstGeom>
           <a:solidFill>
             <a:srgbClr val="10243A"/>
           </a:solidFill>
-          <a:ln w="15240">
-            <a:solidFill>
-              <a:srgbClr val="FFBE55"/>
-            </a:solidFill>
-            <a:prstDash val="solid"/>
-          </a:ln>
-        </p:spPr>
-      </p:sp>
-      <p:sp>
-        <p:nvSpPr>
-          <p:cNvPr id="11" name="Text 9"/>
-          <p:cNvSpPr/>
-          <p:nvPr/>
-        </p:nvSpPr>
-        <p:spPr>
-          <a:xfrm>
-            <a:off x="7461504" y="1527048"/>
-            <a:ext cx="1783080" cy="594360"/>
+          <a:ln w="16510">
+            <a:solidFill>
+              <a:srgbClr val="F5F8FC"/>
+            </a:solidFill>
+            <a:prstDash val="solid"/>
+          </a:ln>
+        </p:spPr>
+      </p:sp>
+      <p:sp>
+        <p:nvSpPr>
+          <p:cNvPr id="14" name="Text 12"/>
+          <p:cNvSpPr/>
+          <p:nvPr/>
+        </p:nvSpPr>
+        <p:spPr>
+          <a:xfrm>
+            <a:off x="4745736" y="1993392"/>
+            <a:ext cx="1051560" cy="658368"/>
           </a:xfrm>
           <a:prstGeom prst="rect">
             <a:avLst/>
@@ -3911,68 +3808,92 @@
               <a:buNone/>
             </a:pPr>
             <a:r>
-              <a:rPr lang="en-US" sz="1200" b="1" dirty="0">
+              <a:rPr lang="en-US" sz="1100" b="1" dirty="0">
                 <a:solidFill>
                   <a:srgbClr val="F5F8FC"/>
                 </a:solidFill>
               </a:rPr>
               <a:t>Provider</a:t>
             </a:r>
-            <a:endParaRPr lang="en-US" sz="1200" dirty="0"/>
+            <a:endParaRPr lang="en-US" sz="1100" dirty="0"/>
           </a:p>
           <a:p>
             <a:pPr algn="ctr" indent="0" marL="0">
               <a:buNone/>
             </a:pPr>
             <a:r>
-              <a:rPr lang="en-US" sz="1200" b="1" dirty="0">
+              <a:rPr lang="en-US" sz="1100" b="1" dirty="0">
                 <a:solidFill>
                   <a:srgbClr val="F5F8FC"/>
                 </a:solidFill>
               </a:rPr>
-              <a:t>Promotion</a:t>
-            </a:r>
-            <a:endParaRPr lang="en-US" sz="1200" dirty="0"/>
-          </a:p>
-        </p:txBody>
-      </p:sp>
-      <p:sp>
-        <p:nvSpPr>
-          <p:cNvPr id="12" name="Shape 10"/>
-          <p:cNvSpPr/>
-          <p:nvPr/>
-        </p:nvSpPr>
-        <p:spPr>
-          <a:xfrm>
-            <a:off x="9674352" y="1417320"/>
-            <a:ext cx="1965960" cy="777240"/>
+              <a:t>Execution</a:t>
+            </a:r>
+            <a:endParaRPr lang="en-US" sz="1100" dirty="0"/>
+          </a:p>
+        </p:txBody>
+      </p:sp>
+      <p:sp>
+        <p:nvSpPr>
+          <p:cNvPr id="15" name="Shape 13"/>
+          <p:cNvSpPr/>
+          <p:nvPr/>
+        </p:nvSpPr>
+        <p:spPr>
+          <a:xfrm>
+            <a:off x="5888736" y="2322576"/>
+            <a:ext cx="182880" cy="0"/>
+          </a:xfrm>
+          <a:prstGeom prst="line">
+            <a:avLst/>
+          </a:prstGeom>
+          <a:noFill/>
+          <a:ln w="19050">
+            <a:solidFill>
+              <a:srgbClr val="8FA7C0"/>
+            </a:solidFill>
+            <a:prstDash val="solid"/>
+            <a:tailEnd type="triangle"/>
+          </a:ln>
+        </p:spPr>
+      </p:sp>
+      <p:sp>
+        <p:nvSpPr>
+          <p:cNvPr id="16" name="Shape 14"/>
+          <p:cNvSpPr/>
+          <p:nvPr/>
+        </p:nvSpPr>
+        <p:spPr>
+          <a:xfrm>
+            <a:off x="6099048" y="1920240"/>
+            <a:ext cx="1234440" cy="804672"/>
           </a:xfrm>
           <a:prstGeom prst="roundRect">
             <a:avLst>
-              <a:gd name="adj" fmla="val 8235"/>
+              <a:gd name="adj" fmla="val 6818"/>
             </a:avLst>
           </a:prstGeom>
           <a:solidFill>
             <a:srgbClr val="10243A"/>
           </a:solidFill>
-          <a:ln w="15240">
-            <a:solidFill>
-              <a:srgbClr val="FF6B6B"/>
-            </a:solidFill>
-            <a:prstDash val="solid"/>
-          </a:ln>
-        </p:spPr>
-      </p:sp>
-      <p:sp>
-        <p:nvSpPr>
-          <p:cNvPr id="13" name="Text 11"/>
-          <p:cNvSpPr/>
-          <p:nvPr/>
-        </p:nvSpPr>
-        <p:spPr>
-          <a:xfrm>
-            <a:off x="9765792" y="1527048"/>
-            <a:ext cx="1783080" cy="594360"/>
+          <a:ln w="16510">
+            <a:solidFill>
+              <a:srgbClr val="35D0E6"/>
+            </a:solidFill>
+            <a:prstDash val="solid"/>
+          </a:ln>
+        </p:spPr>
+      </p:sp>
+      <p:sp>
+        <p:nvSpPr>
+          <p:cNvPr id="17" name="Text 15"/>
+          <p:cNvSpPr/>
+          <p:nvPr/>
+        </p:nvSpPr>
+        <p:spPr>
+          <a:xfrm>
+            <a:off x="6190488" y="1993392"/>
+            <a:ext cx="1051560" cy="658368"/>
           </a:xfrm>
           <a:prstGeom prst="rect">
             <a:avLst/>
@@ -3990,68 +3911,92 @@
               <a:buNone/>
             </a:pPr>
             <a:r>
-              <a:rPr lang="en-US" sz="1200" b="1" dirty="0">
+              <a:rPr lang="en-US" sz="1100" b="1" dirty="0">
                 <a:solidFill>
                   <a:srgbClr val="F5F8FC"/>
                 </a:solidFill>
               </a:rPr>
-              <a:t>Developer</a:t>
-            </a:r>
-            <a:endParaRPr lang="en-US" sz="1200" dirty="0"/>
+              <a:t>Usage</a:t>
+            </a:r>
+            <a:endParaRPr lang="en-US" sz="1100" dirty="0"/>
           </a:p>
           <a:p>
             <a:pPr algn="ctr" indent="0" marL="0">
               <a:buNone/>
             </a:pPr>
             <a:r>
-              <a:rPr lang="en-US" sz="1200" b="1" dirty="0">
+              <a:rPr lang="en-US" sz="1100" b="1" dirty="0">
                 <a:solidFill>
                   <a:srgbClr val="F5F8FC"/>
                 </a:solidFill>
               </a:rPr>
-              <a:t>Account</a:t>
-            </a:r>
-            <a:endParaRPr lang="en-US" sz="1200" dirty="0"/>
-          </a:p>
-        </p:txBody>
-      </p:sp>
-      <p:sp>
-        <p:nvSpPr>
-          <p:cNvPr id="14" name="Shape 12"/>
-          <p:cNvSpPr/>
-          <p:nvPr/>
-        </p:nvSpPr>
-        <p:spPr>
-          <a:xfrm>
-            <a:off x="4069080" y="2862072"/>
-            <a:ext cx="4023360" cy="777240"/>
+              <a:t>Event</a:t>
+            </a:r>
+            <a:endParaRPr lang="en-US" sz="1100" dirty="0"/>
+          </a:p>
+        </p:txBody>
+      </p:sp>
+      <p:sp>
+        <p:nvSpPr>
+          <p:cNvPr id="18" name="Shape 16"/>
+          <p:cNvSpPr/>
+          <p:nvPr/>
+        </p:nvSpPr>
+        <p:spPr>
+          <a:xfrm>
+            <a:off x="7333488" y="2322576"/>
+            <a:ext cx="182880" cy="0"/>
+          </a:xfrm>
+          <a:prstGeom prst="line">
+            <a:avLst/>
+          </a:prstGeom>
+          <a:noFill/>
+          <a:ln w="19050">
+            <a:solidFill>
+              <a:srgbClr val="8FA7C0"/>
+            </a:solidFill>
+            <a:prstDash val="solid"/>
+            <a:tailEnd type="triangle"/>
+          </a:ln>
+        </p:spPr>
+      </p:sp>
+      <p:sp>
+        <p:nvSpPr>
+          <p:cNvPr id="19" name="Shape 17"/>
+          <p:cNvSpPr/>
+          <p:nvPr/>
+        </p:nvSpPr>
+        <p:spPr>
+          <a:xfrm>
+            <a:off x="7543800" y="1920240"/>
+            <a:ext cx="1234440" cy="804672"/>
           </a:xfrm>
           <a:prstGeom prst="roundRect">
             <a:avLst>
-              <a:gd name="adj" fmla="val 8235"/>
+              <a:gd name="adj" fmla="val 6818"/>
             </a:avLst>
           </a:prstGeom>
           <a:solidFill>
             <a:srgbClr val="10243A"/>
           </a:solidFill>
-          <a:ln w="15240">
-            <a:solidFill>
-              <a:srgbClr val="35D0E6"/>
-            </a:solidFill>
-            <a:prstDash val="solid"/>
-          </a:ln>
-        </p:spPr>
-      </p:sp>
-      <p:sp>
-        <p:nvSpPr>
-          <p:cNvPr id="15" name="Text 13"/>
-          <p:cNvSpPr/>
-          <p:nvPr/>
-        </p:nvSpPr>
-        <p:spPr>
-          <a:xfrm>
-            <a:off x="4160520" y="2971800"/>
-            <a:ext cx="3840480" cy="594360"/>
+          <a:ln w="16510">
+            <a:solidFill>
+              <a:srgbClr val="52D273"/>
+            </a:solidFill>
+            <a:prstDash val="solid"/>
+          </a:ln>
+        </p:spPr>
+      </p:sp>
+      <p:sp>
+        <p:nvSpPr>
+          <p:cNvPr id="20" name="Text 18"/>
+          <p:cNvSpPr/>
+          <p:nvPr/>
+        </p:nvSpPr>
+        <p:spPr>
+          <a:xfrm>
+            <a:off x="7635240" y="1993392"/>
+            <a:ext cx="1051560" cy="658368"/>
           </a:xfrm>
           <a:prstGeom prst="rect">
             <a:avLst/>
@@ -4069,54 +4014,92 @@
               <a:buNone/>
             </a:pPr>
             <a:r>
-              <a:rPr lang="en-US" sz="1600" b="1" dirty="0">
+              <a:rPr lang="en-US" sz="1100" b="1" dirty="0">
                 <a:solidFill>
                   <a:srgbClr val="F5F8FC"/>
                 </a:solidFill>
               </a:rPr>
-              <a:t>Provider-maintained Delegated AI Grant</a:t>
-            </a:r>
-            <a:endParaRPr lang="en-US" sz="1600" dirty="0"/>
-          </a:p>
-        </p:txBody>
-      </p:sp>
-      <p:sp>
-        <p:nvSpPr>
-          <p:cNvPr id="16" name="Shape 14"/>
-          <p:cNvSpPr/>
-          <p:nvPr/>
-        </p:nvSpPr>
-        <p:spPr>
-          <a:xfrm>
-            <a:off x="4434840" y="4087368"/>
-            <a:ext cx="3291840" cy="685800"/>
+              <a:t>Evidence</a:t>
+            </a:r>
+            <a:endParaRPr lang="en-US" sz="1100" dirty="0"/>
+          </a:p>
+          <a:p>
+            <a:pPr algn="ctr" indent="0" marL="0">
+              <a:buNone/>
+            </a:pPr>
+            <a:r>
+              <a:rPr lang="en-US" sz="1100" b="1" dirty="0">
+                <a:solidFill>
+                  <a:srgbClr val="F5F8FC"/>
+                </a:solidFill>
+              </a:rPr>
+              <a:t>Provenance</a:t>
+            </a:r>
+            <a:endParaRPr lang="en-US" sz="1100" dirty="0"/>
+          </a:p>
+        </p:txBody>
+      </p:sp>
+      <p:sp>
+        <p:nvSpPr>
+          <p:cNvPr id="21" name="Shape 19"/>
+          <p:cNvSpPr/>
+          <p:nvPr/>
+        </p:nvSpPr>
+        <p:spPr>
+          <a:xfrm>
+            <a:off x="8778240" y="2322576"/>
+            <a:ext cx="182880" cy="0"/>
+          </a:xfrm>
+          <a:prstGeom prst="line">
+            <a:avLst/>
+          </a:prstGeom>
+          <a:noFill/>
+          <a:ln w="19050">
+            <a:solidFill>
+              <a:srgbClr val="8FA7C0"/>
+            </a:solidFill>
+            <a:prstDash val="solid"/>
+            <a:tailEnd type="triangle"/>
+          </a:ln>
+        </p:spPr>
+      </p:sp>
+      <p:sp>
+        <p:nvSpPr>
+          <p:cNvPr id="22" name="Shape 20"/>
+          <p:cNvSpPr/>
+          <p:nvPr/>
+        </p:nvSpPr>
+        <p:spPr>
+          <a:xfrm>
+            <a:off x="8988552" y="1920240"/>
+            <a:ext cx="1234440" cy="804672"/>
           </a:xfrm>
           <a:prstGeom prst="roundRect">
             <a:avLst>
-              <a:gd name="adj" fmla="val 9333"/>
+              <a:gd name="adj" fmla="val 6818"/>
             </a:avLst>
           </a:prstGeom>
           <a:solidFill>
             <a:srgbClr val="10243A"/>
           </a:solidFill>
-          <a:ln w="15240">
-            <a:solidFill>
-              <a:srgbClr val="5D8CFF"/>
-            </a:solidFill>
-            <a:prstDash val="solid"/>
-          </a:ln>
-        </p:spPr>
-      </p:sp>
-      <p:sp>
-        <p:nvSpPr>
-          <p:cNvPr id="17" name="Text 15"/>
-          <p:cNvSpPr/>
-          <p:nvPr/>
-        </p:nvSpPr>
-        <p:spPr>
-          <a:xfrm>
-            <a:off x="4526280" y="4197096"/>
-            <a:ext cx="3108960" cy="502920"/>
+          <a:ln w="16510">
+            <a:solidFill>
+              <a:srgbClr val="FFBE55"/>
+            </a:solidFill>
+            <a:prstDash val="solid"/>
+          </a:ln>
+        </p:spPr>
+      </p:sp>
+      <p:sp>
+        <p:nvSpPr>
+          <p:cNvPr id="23" name="Text 21"/>
+          <p:cNvSpPr/>
+          <p:nvPr/>
+        </p:nvSpPr>
+        <p:spPr>
+          <a:xfrm>
+            <a:off x="9079992" y="1993392"/>
+            <a:ext cx="1051560" cy="658368"/>
           </a:xfrm>
           <a:prstGeom prst="rect">
             <a:avLst/>
@@ -4134,54 +4117,78 @@
               <a:buNone/>
             </a:pPr>
             <a:r>
-              <a:rPr lang="en-US" sz="1500" b="1" dirty="0">
+              <a:rPr lang="en-US" sz="1100" b="1" dirty="0">
                 <a:solidFill>
                   <a:srgbClr val="F5F8FC"/>
                 </a:solidFill>
               </a:rPr>
-              <a:t>Short-lived Execution Token</a:t>
-            </a:r>
-            <a:endParaRPr lang="en-US" sz="1500" dirty="0"/>
-          </a:p>
-        </p:txBody>
-      </p:sp>
-      <p:sp>
-        <p:nvSpPr>
-          <p:cNvPr id="18" name="Shape 16"/>
-          <p:cNvSpPr/>
-          <p:nvPr/>
-        </p:nvSpPr>
-        <p:spPr>
-          <a:xfrm>
-            <a:off x="4069080" y="5184648"/>
-            <a:ext cx="4023360" cy="713232"/>
+              <a:t>Reconciliation</a:t>
+            </a:r>
+            <a:endParaRPr lang="en-US" sz="1100" dirty="0"/>
+          </a:p>
+        </p:txBody>
+      </p:sp>
+      <p:sp>
+        <p:nvSpPr>
+          <p:cNvPr id="24" name="Shape 22"/>
+          <p:cNvSpPr/>
+          <p:nvPr/>
+        </p:nvSpPr>
+        <p:spPr>
+          <a:xfrm>
+            <a:off x="10222992" y="2322576"/>
+            <a:ext cx="182880" cy="0"/>
+          </a:xfrm>
+          <a:prstGeom prst="line">
+            <a:avLst/>
+          </a:prstGeom>
+          <a:noFill/>
+          <a:ln w="19050">
+            <a:solidFill>
+              <a:srgbClr val="8FA7C0"/>
+            </a:solidFill>
+            <a:prstDash val="solid"/>
+            <a:tailEnd type="triangle"/>
+          </a:ln>
+        </p:spPr>
+      </p:sp>
+      <p:sp>
+        <p:nvSpPr>
+          <p:cNvPr id="25" name="Shape 23"/>
+          <p:cNvSpPr/>
+          <p:nvPr/>
+        </p:nvSpPr>
+        <p:spPr>
+          <a:xfrm>
+            <a:off x="10433304" y="1920240"/>
+            <a:ext cx="1234440" cy="804672"/>
           </a:xfrm>
           <a:prstGeom prst="roundRect">
             <a:avLst>
-              <a:gd name="adj" fmla="val 8974"/>
+              <a:gd name="adj" fmla="val 6818"/>
             </a:avLst>
           </a:prstGeom>
           <a:solidFill>
             <a:srgbClr val="10243A"/>
           </a:solidFill>
-          <a:ln w="15240">
-            <a:solidFill>
-              <a:srgbClr val="52D273"/>
-            </a:solidFill>
-            <a:prstDash val="solid"/>
-          </a:ln>
-        </p:spPr>
-      </p:sp>
-      <p:sp>
-        <p:nvSpPr>
-          <p:cNvPr id="19" name="Text 17"/>
-          <p:cNvSpPr/>
-          <p:nvPr/>
-        </p:nvSpPr>
-        <p:spPr>
-          <a:xfrm>
-            <a:off x="4160520" y="5294376"/>
-            <a:ext cx="3840480" cy="530352"/>
+          <a:ln w="16510">
+            <a:solidFill>
+              <a:srgbClr val="5D8CFF"/>
+            </a:solidFill>
+            <a:prstDash val="solid"/>
+          </a:ln>
+        </p:spPr>
+      </p:sp>
+      <p:sp>
+        <p:nvSpPr>
+          <p:cNvPr id="26" name="Text 24"/>
+          <p:cNvSpPr/>
+          <p:nvPr/>
+        </p:nvSpPr>
+        <p:spPr>
+          <a:xfrm>
+            <a:off x="10524744" y="1993392"/>
+            <a:ext cx="1051560" cy="658368"/>
           </a:xfrm>
           <a:prstGeom prst="rect">
             <a:avLst/>
@@ -4199,184 +4206,30 @@
               <a:buNone/>
             </a:pPr>
             <a:r>
-              <a:rPr lang="en-US" sz="1600" b="1" dirty="0">
+              <a:rPr lang="en-US" sz="1100" b="1" dirty="0">
                 <a:solidFill>
                   <a:srgbClr val="F5F8FC"/>
                 </a:solidFill>
               </a:rPr>
-              <a:t>Provider Execution</a:t>
-            </a:r>
-            <a:endParaRPr lang="en-US" sz="1600" dirty="0"/>
-          </a:p>
-        </p:txBody>
-      </p:sp>
-      <p:sp>
-        <p:nvSpPr>
-          <p:cNvPr id="20" name="Shape 18"/>
-          <p:cNvSpPr/>
-          <p:nvPr/>
-        </p:nvSpPr>
-        <p:spPr>
-          <a:xfrm>
-            <a:off x="1444752" y="2194560"/>
-            <a:ext cx="4636008" cy="640080"/>
-          </a:xfrm>
-          <a:prstGeom prst="line">
-            <a:avLst/>
-          </a:prstGeom>
-          <a:noFill/>
-          <a:ln w="19050">
-            <a:solidFill>
-              <a:srgbClr val="5D8CFF"/>
-            </a:solidFill>
-            <a:prstDash val="solid"/>
-            <a:tailEnd type="triangle"/>
-          </a:ln>
-        </p:spPr>
-      </p:sp>
-      <p:sp>
-        <p:nvSpPr>
-          <p:cNvPr id="21" name="Shape 19"/>
-          <p:cNvSpPr/>
-          <p:nvPr/>
-        </p:nvSpPr>
-        <p:spPr>
-          <a:xfrm>
-            <a:off x="3749040" y="2194560"/>
-            <a:ext cx="2331720" cy="640080"/>
-          </a:xfrm>
-          <a:prstGeom prst="line">
-            <a:avLst/>
-          </a:prstGeom>
-          <a:noFill/>
-          <a:ln w="19050">
-            <a:solidFill>
-              <a:srgbClr val="35D0E6"/>
-            </a:solidFill>
-            <a:prstDash val="solid"/>
-            <a:tailEnd type="triangle"/>
-          </a:ln>
-        </p:spPr>
-      </p:sp>
-      <p:sp>
-        <p:nvSpPr>
-          <p:cNvPr id="22" name="Shape 20"/>
-          <p:cNvSpPr/>
-          <p:nvPr/>
-        </p:nvSpPr>
-        <p:spPr>
-          <a:xfrm>
-            <a:off x="6053328" y="2194560"/>
-            <a:ext cx="27432" cy="640080"/>
-          </a:xfrm>
-          <a:prstGeom prst="line">
-            <a:avLst/>
-          </a:prstGeom>
-          <a:noFill/>
-          <a:ln w="19050">
-            <a:solidFill>
-              <a:srgbClr val="52D273"/>
-            </a:solidFill>
-            <a:prstDash val="solid"/>
-            <a:tailEnd type="triangle"/>
-          </a:ln>
-        </p:spPr>
-      </p:sp>
-      <p:sp>
-        <p:nvSpPr>
-          <p:cNvPr id="23" name="Shape 21"/>
-          <p:cNvSpPr/>
-          <p:nvPr/>
-        </p:nvSpPr>
-        <p:spPr>
-          <a:xfrm>
-            <a:off x="8357616" y="2194560"/>
-            <a:ext cx="-2276856" cy="640080"/>
-          </a:xfrm>
-          <a:prstGeom prst="line">
-            <a:avLst/>
-          </a:prstGeom>
-          <a:noFill/>
-          <a:ln w="19050">
-            <a:solidFill>
-              <a:srgbClr val="FFBE55"/>
-            </a:solidFill>
-            <a:prstDash val="solid"/>
-            <a:tailEnd type="triangle"/>
-          </a:ln>
-        </p:spPr>
-      </p:sp>
-      <p:sp>
-        <p:nvSpPr>
-          <p:cNvPr id="24" name="Shape 22"/>
-          <p:cNvSpPr/>
-          <p:nvPr/>
-        </p:nvSpPr>
-        <p:spPr>
-          <a:xfrm>
-            <a:off x="10661904" y="2194560"/>
-            <a:ext cx="-4581144" cy="640080"/>
-          </a:xfrm>
-          <a:prstGeom prst="line">
-            <a:avLst/>
-          </a:prstGeom>
-          <a:noFill/>
-          <a:ln w="19050">
-            <a:solidFill>
-              <a:srgbClr val="FF6B6B"/>
-            </a:solidFill>
-            <a:prstDash val="solid"/>
-            <a:tailEnd type="triangle"/>
-          </a:ln>
-        </p:spPr>
-      </p:sp>
-      <p:sp>
-        <p:nvSpPr>
-          <p:cNvPr id="25" name="Shape 23"/>
-          <p:cNvSpPr/>
-          <p:nvPr/>
-        </p:nvSpPr>
-        <p:spPr>
-          <a:xfrm>
-            <a:off x="6080760" y="3639312"/>
-            <a:ext cx="0" cy="420624"/>
-          </a:xfrm>
-          <a:prstGeom prst="line">
-            <a:avLst/>
-          </a:prstGeom>
-          <a:noFill/>
-          <a:ln w="27940">
-            <a:solidFill>
-              <a:srgbClr val="35D0E6"/>
-            </a:solidFill>
-            <a:prstDash val="solid"/>
-            <a:tailEnd type="triangle"/>
-          </a:ln>
-        </p:spPr>
-      </p:sp>
-      <p:sp>
-        <p:nvSpPr>
-          <p:cNvPr id="26" name="Shape 24"/>
-          <p:cNvSpPr/>
-          <p:nvPr/>
-        </p:nvSpPr>
-        <p:spPr>
-          <a:xfrm>
-            <a:off x="6080760" y="4782312"/>
-            <a:ext cx="0" cy="374904"/>
-          </a:xfrm>
-          <a:prstGeom prst="line">
-            <a:avLst/>
-          </a:prstGeom>
-          <a:noFill/>
-          <a:ln w="27940">
-            <a:solidFill>
-              <a:srgbClr val="5D8CFF"/>
-            </a:solidFill>
-            <a:prstDash val="solid"/>
-            <a:tailEnd type="triangle"/>
-          </a:ln>
-        </p:spPr>
+              <a:t>Ledger</a:t>
+            </a:r>
+            <a:endParaRPr lang="en-US" sz="1100" dirty="0"/>
+          </a:p>
+          <a:p>
+            <a:pPr algn="ctr" indent="0" marL="0">
+              <a:buNone/>
+            </a:pPr>
+            <a:r>
+              <a:rPr lang="en-US" sz="1100" b="1" dirty="0">
+                <a:solidFill>
+                  <a:srgbClr val="F5F8FC"/>
+                </a:solidFill>
+              </a:rPr>
+              <a:t>Settlement</a:t>
+            </a:r>
+            <a:endParaRPr lang="en-US" sz="1100" dirty="0"/>
+          </a:p>
+        </p:txBody>
       </p:sp>
       <p:sp>
         <p:nvSpPr>
@@ -4386,12 +4239,12 @@
         </p:nvSpPr>
         <p:spPr>
           <a:xfrm>
-            <a:off x="8549640" y="2788920"/>
-            <a:ext cx="3063240" cy="3154680"/>
+            <a:off x="640080" y="3337560"/>
+            <a:ext cx="3429000" cy="2011680"/>
           </a:xfrm>
           <a:prstGeom prst="roundRect">
             <a:avLst>
-              <a:gd name="adj" fmla="val 2388"/>
+              <a:gd name="adj" fmla="val 2727"/>
             </a:avLst>
           </a:prstGeom>
           <a:solidFill>
@@ -4413,8 +4266,182 @@
         </p:nvSpPr>
         <p:spPr>
           <a:xfrm>
-            <a:off x="8549640" y="2788920"/>
-            <a:ext cx="64008" cy="3154680"/>
+            <a:off x="640080" y="3337560"/>
+            <a:ext cx="64008" cy="2011680"/>
+          </a:xfrm>
+          <a:prstGeom prst="rect">
+            <a:avLst/>
+          </a:prstGeom>
+          <a:solidFill>
+            <a:srgbClr val="5D8CFF"/>
+          </a:solidFill>
+          <a:ln w="12700">
+            <a:solidFill>
+              <a:srgbClr val="5D8CFF"/>
+            </a:solidFill>
+            <a:prstDash val="solid"/>
+          </a:ln>
+        </p:spPr>
+      </p:sp>
+      <p:sp>
+        <p:nvSpPr>
+          <p:cNvPr id="29" name="Text 27"/>
+          <p:cNvSpPr/>
+          <p:nvPr/>
+        </p:nvSpPr>
+        <p:spPr>
+          <a:xfrm>
+            <a:off x="841248" y="3483864"/>
+            <a:ext cx="3108960" cy="292608"/>
+          </a:xfrm>
+          <a:prstGeom prst="rect">
+            <a:avLst/>
+          </a:prstGeom>
+          <a:noFill/>
+          <a:ln/>
+        </p:spPr>
+        <p:txBody>
+          <a:bodyPr wrap="square" lIns="0" tIns="0" rIns="0" bIns="0" rtlCol="0" anchor="ctr"/>
+          <a:lstStyle/>
+          <a:p>
+            <a:pPr indent="0" marL="0">
+              <a:buNone/>
+            </a:pPr>
+            <a:r>
+              <a:rPr lang="en-US" sz="1300" b="1" dirty="0">
+                <a:solidFill>
+                  <a:srgbClr val="F5F8FC"/>
+                </a:solidFill>
+              </a:rPr>
+              <a:t>Authorization boundary</a:t>
+            </a:r>
+            <a:endParaRPr lang="en-US" sz="1300" dirty="0"/>
+          </a:p>
+        </p:txBody>
+      </p:sp>
+      <p:sp>
+        <p:nvSpPr>
+          <p:cNvPr id="30" name="Text 28"/>
+          <p:cNvSpPr/>
+          <p:nvPr/>
+        </p:nvSpPr>
+        <p:spPr>
+          <a:xfrm>
+            <a:off x="841248" y="3849624"/>
+            <a:ext cx="3063240" cy="1353312"/>
+          </a:xfrm>
+          <a:prstGeom prst="rect">
+            <a:avLst/>
+          </a:prstGeom>
+          <a:noFill/>
+          <a:ln/>
+        </p:spPr>
+        <p:txBody>
+          <a:bodyPr wrap="square" lIns="254" tIns="254" rIns="254" bIns="254" rtlCol="0" anchor="t">
+            <a:normAutofit/>
+          </a:bodyPr>
+          <a:lstStyle/>
+          <a:p>
+            <a:pPr indent="0" marL="0">
+              <a:buNone/>
+            </a:pPr>
+            <a:r>
+              <a:rPr lang="en-US" sz="1030" dirty="0">
+                <a:solidFill>
+                  <a:srgbClr val="D8E3F0"/>
+                </a:solidFill>
+              </a:rPr>
+              <a:t>Receipt: what was approved.</a:t>
+            </a:r>
+            <a:endParaRPr lang="en-US" sz="1030" dirty="0"/>
+          </a:p>
+          <a:p>
+            <a:pPr indent="0" marL="0">
+              <a:buNone/>
+            </a:pPr>
+            <a:r>
+              <a:rPr lang="en-US" sz="1030" dirty="0">
+                <a:solidFill>
+                  <a:srgbClr val="D8E3F0"/>
+                </a:solidFill>
+              </a:rPr>
+              <a:t>Grant: current Provider policy.</a:t>
+            </a:r>
+            <a:endParaRPr lang="en-US" sz="1030" dirty="0"/>
+          </a:p>
+          <a:p>
+            <a:pPr indent="0" marL="0">
+              <a:buNone/>
+            </a:pPr>
+            <a:r>
+              <a:rPr lang="en-US" sz="1030" dirty="0">
+                <a:solidFill>
+                  <a:srgbClr val="D8E3F0"/>
+                </a:solidFill>
+              </a:rPr>
+              <a:t>Token: short-lived execution authority.</a:t>
+            </a:r>
+            <a:endParaRPr lang="en-US" sz="1030" dirty="0"/>
+          </a:p>
+          <a:p>
+            <a:pPr indent="0" marL="0">
+              <a:buNone/>
+            </a:pPr>
+            <a:endParaRPr lang="en-US" sz="1030" dirty="0"/>
+          </a:p>
+          <a:p>
+            <a:pPr indent="0" marL="0">
+              <a:buNone/>
+            </a:pPr>
+            <a:r>
+              <a:rPr lang="en-US" sz="1030" dirty="0">
+                <a:solidFill>
+                  <a:srgbClr val="D8E3F0"/>
+                </a:solidFill>
+              </a:rPr>
+              <a:t>Mutable balances never live in bearer claims.</a:t>
+            </a:r>
+            <a:endParaRPr lang="en-US" sz="1030" dirty="0"/>
+          </a:p>
+        </p:txBody>
+      </p:sp>
+      <p:sp>
+        <p:nvSpPr>
+          <p:cNvPr id="31" name="Shape 29"/>
+          <p:cNvSpPr/>
+          <p:nvPr/>
+        </p:nvSpPr>
+        <p:spPr>
+          <a:xfrm>
+            <a:off x="4389120" y="3337560"/>
+            <a:ext cx="3429000" cy="2011680"/>
+          </a:xfrm>
+          <a:prstGeom prst="roundRect">
+            <a:avLst>
+              <a:gd name="adj" fmla="val 2727"/>
+            </a:avLst>
+          </a:prstGeom>
+          <a:solidFill>
+            <a:srgbClr val="0D1B2D"/>
+          </a:solidFill>
+          <a:ln w="12700">
+            <a:solidFill>
+              <a:srgbClr val="244763"/>
+            </a:solidFill>
+            <a:prstDash val="solid"/>
+          </a:ln>
+        </p:spPr>
+      </p:sp>
+      <p:sp>
+        <p:nvSpPr>
+          <p:cNvPr id="32" name="Shape 30"/>
+          <p:cNvSpPr/>
+          <p:nvPr/>
+        </p:nvSpPr>
+        <p:spPr>
+          <a:xfrm>
+            <a:off x="4389120" y="3337560"/>
+            <a:ext cx="64008" cy="2011680"/>
           </a:xfrm>
           <a:prstGeom prst="rect">
             <a:avLst/>
@@ -4432,14 +4459,14 @@
       </p:sp>
       <p:sp>
         <p:nvSpPr>
-          <p:cNvPr id="29" name="Text 27"/>
-          <p:cNvSpPr/>
-          <p:nvPr/>
-        </p:nvSpPr>
-        <p:spPr>
-          <a:xfrm>
-            <a:off x="8750808" y="2935224"/>
-            <a:ext cx="2743200" cy="292608"/>
+          <p:cNvPr id="33" name="Text 31"/>
+          <p:cNvSpPr/>
+          <p:nvPr/>
+        </p:nvSpPr>
+        <p:spPr>
+          <a:xfrm>
+            <a:off x="4590288" y="3483864"/>
+            <a:ext cx="3108960" cy="292608"/>
           </a:xfrm>
           <a:prstGeom prst="rect">
             <a:avLst/>
@@ -4460,7 +4487,7 @@
                   <a:srgbClr val="F5F8FC"/>
                 </a:solidFill>
               </a:rPr>
-              <a:t>Non-negotiable safeguards</a:t>
+              <a:t>Evidence boundary</a:t>
             </a:r>
             <a:endParaRPr lang="en-US" sz="1300" dirty="0"/>
           </a:p>
@@ -4468,14 +4495,14 @@
       </p:sp>
       <p:sp>
         <p:nvSpPr>
-          <p:cNvPr id="30" name="Text 28"/>
-          <p:cNvSpPr/>
-          <p:nvPr/>
-        </p:nvSpPr>
-        <p:spPr>
-          <a:xfrm>
-            <a:off x="8750808" y="3291840"/>
-            <a:ext cx="2715768" cy="2514600"/>
+          <p:cNvPr id="34" name="Text 32"/>
+          <p:cNvSpPr/>
+          <p:nvPr/>
+        </p:nvSpPr>
+        <p:spPr>
+          <a:xfrm>
+            <a:off x="4590288" y="3849624"/>
+            <a:ext cx="3063240" cy="1353312"/>
           </a:xfrm>
           <a:prstGeom prst="rect">
             <a:avLst/>
@@ -4493,74 +4520,194 @@
               <a:buNone/>
             </a:pPr>
             <a:r>
-              <a:rPr lang="en-US" sz="1040" dirty="0">
+              <a:rPr lang="en-US" sz="1030" dirty="0">
                 <a:solidFill>
                   <a:srgbClr val="D8E3F0"/>
                 </a:solidFill>
               </a:rPr>
-              <a:t>• Mutable quota and settlement state stay Provider-side.</a:t>
-            </a:r>
-            <a:endParaRPr lang="en-US" sz="1040" dirty="0"/>
-          </a:p>
-          <a:p>
-            <a:pPr indent="0" marL="0">
-              <a:buNone/>
-            </a:pPr>
-            <a:endParaRPr lang="en-US" sz="1040" dirty="0"/>
-          </a:p>
-          <a:p>
-            <a:pPr indent="0" marL="0">
-              <a:buNone/>
-            </a:pPr>
-            <a:r>
-              <a:rPr lang="en-US" sz="1040" dirty="0">
+              <a:t>Usage Event: what occurred.</a:t>
+            </a:r>
+            <a:endParaRPr lang="en-US" sz="1030" dirty="0"/>
+          </a:p>
+          <a:p>
+            <a:pPr indent="0" marL="0">
+              <a:buNone/>
+            </a:pPr>
+            <a:r>
+              <a:rPr lang="en-US" sz="1030" dirty="0">
                 <a:solidFill>
                   <a:srgbClr val="D8E3F0"/>
                 </a:solidFill>
               </a:rPr>
-              <a:t>• The payer cannot change silently.</a:t>
-            </a:r>
-            <a:endParaRPr lang="en-US" sz="1040" dirty="0"/>
-          </a:p>
-          <a:p>
-            <a:pPr indent="0" marL="0">
-              <a:buNone/>
-            </a:pPr>
-            <a:endParaRPr lang="en-US" sz="1040" dirty="0"/>
-          </a:p>
-          <a:p>
-            <a:pPr indent="0" marL="0">
-              <a:buNone/>
-            </a:pPr>
-            <a:r>
-              <a:rPr lang="en-US" sz="1040" dirty="0">
+              <a:t>Evidence class: who asserts it.</a:t>
+            </a:r>
+            <a:endParaRPr lang="en-US" sz="1030" dirty="0"/>
+          </a:p>
+          <a:p>
+            <a:pPr indent="0" marL="0">
+              <a:buNone/>
+            </a:pPr>
+            <a:endParaRPr lang="en-US" sz="1030" dirty="0"/>
+          </a:p>
+          <a:p>
+            <a:pPr indent="0" marL="0">
+              <a:buNone/>
+            </a:pPr>
+            <a:r>
+              <a:rPr lang="en-US" sz="1030" dirty="0">
                 <a:solidFill>
                   <a:srgbClr val="D8E3F0"/>
                 </a:solidFill>
               </a:rPr>
-              <a:t>• Funding never implies access to prompts, outputs, files or identity.</a:t>
-            </a:r>
-            <a:endParaRPr lang="en-US" sz="1040" dirty="0"/>
-          </a:p>
-          <a:p>
-            <a:pPr indent="0" marL="0">
-              <a:buNone/>
-            </a:pPr>
-            <a:endParaRPr lang="en-US" sz="1040" dirty="0"/>
-          </a:p>
-          <a:p>
-            <a:pPr indent="0" marL="0">
-              <a:buNone/>
-            </a:pPr>
-            <a:r>
-              <a:rPr lang="en-US" sz="1040" dirty="0">
+              <a:t>Gateway observations remain provisional until Provider evidence is available.</a:t>
+            </a:r>
+            <a:endParaRPr lang="en-US" sz="1030" dirty="0"/>
+          </a:p>
+        </p:txBody>
+      </p:sp>
+      <p:sp>
+        <p:nvSpPr>
+          <p:cNvPr id="35" name="Shape 33"/>
+          <p:cNvSpPr/>
+          <p:nvPr/>
+        </p:nvSpPr>
+        <p:spPr>
+          <a:xfrm>
+            <a:off x="8138160" y="3337560"/>
+            <a:ext cx="3429000" cy="2011680"/>
+          </a:xfrm>
+          <a:prstGeom prst="roundRect">
+            <a:avLst>
+              <a:gd name="adj" fmla="val 2727"/>
+            </a:avLst>
+          </a:prstGeom>
+          <a:solidFill>
+            <a:srgbClr val="0D1B2D"/>
+          </a:solidFill>
+          <a:ln w="12700">
+            <a:solidFill>
+              <a:srgbClr val="244763"/>
+            </a:solidFill>
+            <a:prstDash val="solid"/>
+          </a:ln>
+        </p:spPr>
+      </p:sp>
+      <p:sp>
+        <p:nvSpPr>
+          <p:cNvPr id="36" name="Shape 34"/>
+          <p:cNvSpPr/>
+          <p:nvPr/>
+        </p:nvSpPr>
+        <p:spPr>
+          <a:xfrm>
+            <a:off x="8138160" y="3337560"/>
+            <a:ext cx="64008" cy="2011680"/>
+          </a:xfrm>
+          <a:prstGeom prst="rect">
+            <a:avLst/>
+          </a:prstGeom>
+          <a:solidFill>
+            <a:srgbClr val="FFBE55"/>
+          </a:solidFill>
+          <a:ln w="12700">
+            <a:solidFill>
+              <a:srgbClr val="FFBE55"/>
+            </a:solidFill>
+            <a:prstDash val="solid"/>
+          </a:ln>
+        </p:spPr>
+      </p:sp>
+      <p:sp>
+        <p:nvSpPr>
+          <p:cNvPr id="37" name="Text 35"/>
+          <p:cNvSpPr/>
+          <p:nvPr/>
+        </p:nvSpPr>
+        <p:spPr>
+          <a:xfrm>
+            <a:off x="8339328" y="3483864"/>
+            <a:ext cx="3108960" cy="292608"/>
+          </a:xfrm>
+          <a:prstGeom prst="rect">
+            <a:avLst/>
+          </a:prstGeom>
+          <a:noFill/>
+          <a:ln/>
+        </p:spPr>
+        <p:txBody>
+          <a:bodyPr wrap="square" lIns="0" tIns="0" rIns="0" bIns="0" rtlCol="0" anchor="ctr"/>
+          <a:lstStyle/>
+          <a:p>
+            <a:pPr indent="0" marL="0">
+              <a:buNone/>
+            </a:pPr>
+            <a:r>
+              <a:rPr lang="en-US" sz="1300" b="1" dirty="0">
+                <a:solidFill>
+                  <a:srgbClr val="F5F8FC"/>
+                </a:solidFill>
+              </a:rPr>
+              <a:t>Economic boundary</a:t>
+            </a:r>
+            <a:endParaRPr lang="en-US" sz="1300" dirty="0"/>
+          </a:p>
+        </p:txBody>
+      </p:sp>
+      <p:sp>
+        <p:nvSpPr>
+          <p:cNvPr id="38" name="Text 36"/>
+          <p:cNvSpPr/>
+          <p:nvPr/>
+        </p:nvSpPr>
+        <p:spPr>
+          <a:xfrm>
+            <a:off x="8339328" y="3849624"/>
+            <a:ext cx="3063240" cy="1353312"/>
+          </a:xfrm>
+          <a:prstGeom prst="rect">
+            <a:avLst/>
+          </a:prstGeom>
+          <a:noFill/>
+          <a:ln/>
+        </p:spPr>
+        <p:txBody>
+          <a:bodyPr wrap="square" lIns="254" tIns="254" rIns="254" bIns="254" rtlCol="0" anchor="t">
+            <a:normAutofit/>
+          </a:bodyPr>
+          <a:lstStyle/>
+          <a:p>
+            <a:pPr indent="0" marL="0">
+              <a:buNone/>
+            </a:pPr>
+            <a:r>
+              <a:rPr lang="en-US" sz="1030" dirty="0">
                 <a:solidFill>
                   <a:srgbClr val="D8E3F0"/>
                 </a:solidFill>
               </a:rPr>
-              <a:t>• The token can only narrow - never expand - the grant.</a:t>
-            </a:r>
-            <a:endParaRPr lang="en-US" sz="1040" dirty="0"/>
+              <a:t>Reservation and settlement remain Provider-authoritative.</a:t>
+            </a:r>
+            <a:endParaRPr lang="en-US" sz="1030" dirty="0"/>
+          </a:p>
+          <a:p>
+            <a:pPr indent="0" marL="0">
+              <a:buNone/>
+            </a:pPr>
+            <a:endParaRPr lang="en-US" sz="1030" dirty="0"/>
+          </a:p>
+          <a:p>
+            <a:pPr indent="0" marL="0">
+              <a:buNone/>
+            </a:pPr>
+            <a:r>
+              <a:rPr lang="en-US" sz="1030" dirty="0">
+                <a:solidFill>
+                  <a:srgbClr val="D8E3F0"/>
+                </a:solidFill>
+              </a:rPr>
+              <a:t>Late differences create reconciliation and compensating adjustments - not rewritten history.</a:t>
+            </a:r>
+            <a:endParaRPr lang="en-US" sz="1030" dirty="0"/>
           </a:p>
         </p:txBody>
       </p:sp>
@@ -4666,11 +4813,8 @@
                 <a:solidFill>
                   <a:srgbClr val="F5F8FC"/>
                 </a:solidFill>
-                <a:latin typeface="Arial" pitchFamily="34" charset="0"/>
-                <a:ea typeface="Arial" pitchFamily="34" charset="-122"/>
-                <a:cs typeface="Arial" pitchFamily="34" charset="-120"/>
-              </a:rPr>
-              <a:t>The v0.5 two-plane architecture</a:t>
+              </a:rPr>
+              <a:t>Three evidence classes</a:t>
             </a:r>
             <a:endParaRPr lang="en-US" sz="2500" dirty="0"/>
           </a:p>
@@ -4685,7 +4829,7 @@
         <p:spPr>
           <a:xfrm>
             <a:off x="612648" y="932688"/>
-            <a:ext cx="10789920" cy="329184"/>
+            <a:ext cx="10789920" cy="310896"/>
           </a:xfrm>
           <a:prstGeom prst="rect">
             <a:avLst/>
@@ -4705,11 +4849,8 @@
                 <a:solidFill>
                   <a:srgbClr val="8FA7C0"/>
                 </a:solidFill>
-                <a:latin typeface="Arial" pitchFamily="34" charset="0"/>
-                <a:ea typeface="Arial" pitchFamily="34" charset="-122"/>
-                <a:cs typeface="Arial" pitchFamily="34" charset="-120"/>
-              </a:rPr>
-              <a:t>Technical facts and economic mutations have different trust, privacy and correction requirements.</a:t>
+              </a:rPr>
+              <a:t>Authority must be explicit rather than inferred from where an event was stored.</a:t>
             </a:r>
             <a:endParaRPr lang="en-US" sz="1150" dirty="0"/>
           </a:p>
@@ -4723,125 +4864,12 @@
         </p:nvSpPr>
         <p:spPr>
           <a:xfrm>
-            <a:off x="4590288" y="1325880"/>
-            <a:ext cx="2999232" cy="694944"/>
+            <a:off x="594360" y="1417320"/>
+            <a:ext cx="3520440" cy="2971800"/>
           </a:xfrm>
           <a:prstGeom prst="roundRect">
             <a:avLst>
-              <a:gd name="adj" fmla="val 9211"/>
-            </a:avLst>
-          </a:prstGeom>
-          <a:solidFill>
-            <a:srgbClr val="10243A"/>
-          </a:solidFill>
-          <a:ln w="15240">
-            <a:solidFill>
-              <a:srgbClr val="F5F8FC"/>
-            </a:solidFill>
-            <a:prstDash val="solid"/>
-          </a:ln>
-        </p:spPr>
-      </p:sp>
-      <p:sp>
-        <p:nvSpPr>
-          <p:cNvPr id="5" name="Text 3"/>
-          <p:cNvSpPr/>
-          <p:nvPr/>
-        </p:nvSpPr>
-        <p:spPr>
-          <a:xfrm>
-            <a:off x="4681728" y="1435608"/>
-            <a:ext cx="2816352" cy="512064"/>
-          </a:xfrm>
-          <a:prstGeom prst="rect">
-            <a:avLst/>
-          </a:prstGeom>
-          <a:noFill/>
-          <a:ln/>
-        </p:spPr>
-        <p:txBody>
-          <a:bodyPr wrap="square" lIns="254" tIns="254" rIns="254" bIns="254" rtlCol="0" anchor="ctr">
-            <a:normAutofit/>
-          </a:bodyPr>
-          <a:lstStyle/>
-          <a:p>
-            <a:pPr algn="ctr" indent="0" marL="0">
-              <a:buNone/>
-            </a:pPr>
-            <a:r>
-              <a:rPr lang="en-US" sz="1700" b="1" dirty="0">
-                <a:solidFill>
-                  <a:srgbClr val="F5F8FC"/>
-                </a:solidFill>
-              </a:rPr>
-              <a:t>Provider Execution</a:t>
-            </a:r>
-            <a:endParaRPr lang="en-US" sz="1700" dirty="0"/>
-          </a:p>
-        </p:txBody>
-      </p:sp>
-      <p:sp>
-        <p:nvSpPr>
-          <p:cNvPr id="6" name="Shape 4"/>
-          <p:cNvSpPr/>
-          <p:nvPr/>
-        </p:nvSpPr>
-        <p:spPr>
-          <a:xfrm>
-            <a:off x="5486400" y="2057400"/>
-            <a:ext cx="-2514600" cy="685800"/>
-          </a:xfrm>
-          <a:prstGeom prst="line">
-            <a:avLst/>
-          </a:prstGeom>
-          <a:noFill/>
-          <a:ln w="31750">
-            <a:solidFill>
-              <a:srgbClr val="52D273"/>
-            </a:solidFill>
-            <a:prstDash val="solid"/>
-            <a:tailEnd type="triangle"/>
-          </a:ln>
-        </p:spPr>
-      </p:sp>
-      <p:sp>
-        <p:nvSpPr>
-          <p:cNvPr id="7" name="Shape 5"/>
-          <p:cNvSpPr/>
-          <p:nvPr/>
-        </p:nvSpPr>
-        <p:spPr>
-          <a:xfrm>
-            <a:off x="6675120" y="2057400"/>
-            <a:ext cx="2514600" cy="685800"/>
-          </a:xfrm>
-          <a:prstGeom prst="line">
-            <a:avLst/>
-          </a:prstGeom>
-          <a:noFill/>
-          <a:ln w="31750">
-            <a:solidFill>
-              <a:srgbClr val="FFBE55"/>
-            </a:solidFill>
-            <a:prstDash val="solid"/>
-            <a:tailEnd type="triangle"/>
-          </a:ln>
-        </p:spPr>
-      </p:sp>
-      <p:sp>
-        <p:nvSpPr>
-          <p:cNvPr id="8" name="Shape 6"/>
-          <p:cNvSpPr/>
-          <p:nvPr/>
-        </p:nvSpPr>
-        <p:spPr>
-          <a:xfrm>
-            <a:off x="640080" y="2743200"/>
-            <a:ext cx="4800600" cy="3035808"/>
-          </a:xfrm>
-          <a:prstGeom prst="roundRect">
-            <a:avLst>
-              <a:gd name="adj" fmla="val 2410"/>
+              <a:gd name="adj" fmla="val 1846"/>
             </a:avLst>
           </a:prstGeom>
           <a:solidFill>
@@ -4857,14 +4885,14 @@
       </p:sp>
       <p:sp>
         <p:nvSpPr>
-          <p:cNvPr id="9" name="Shape 7"/>
-          <p:cNvSpPr/>
-          <p:nvPr/>
-        </p:nvSpPr>
-        <p:spPr>
-          <a:xfrm>
-            <a:off x="640080" y="2743200"/>
-            <a:ext cx="64008" cy="3035808"/>
+          <p:cNvPr id="5" name="Shape 3"/>
+          <p:cNvSpPr/>
+          <p:nvPr/>
+        </p:nvSpPr>
+        <p:spPr>
+          <a:xfrm>
+            <a:off x="594360" y="1417320"/>
+            <a:ext cx="64008" cy="2971800"/>
           </a:xfrm>
           <a:prstGeom prst="rect">
             <a:avLst/>
@@ -4882,14 +4910,14 @@
       </p:sp>
       <p:sp>
         <p:nvSpPr>
-          <p:cNvPr id="10" name="Text 8"/>
-          <p:cNvSpPr/>
-          <p:nvPr/>
-        </p:nvSpPr>
-        <p:spPr>
-          <a:xfrm>
-            <a:off x="841248" y="2889504"/>
-            <a:ext cx="4480560" cy="292608"/>
+          <p:cNvPr id="6" name="Text 4"/>
+          <p:cNvSpPr/>
+          <p:nvPr/>
+        </p:nvSpPr>
+        <p:spPr>
+          <a:xfrm>
+            <a:off x="795528" y="1563624"/>
+            <a:ext cx="3200400" cy="292608"/>
           </a:xfrm>
           <a:prstGeom prst="rect">
             <a:avLst/>
@@ -4910,7 +4938,7 @@
                   <a:srgbClr val="F5F8FC"/>
                 </a:solidFill>
               </a:rPr>
-              <a:t>USAGE EVENT PLANE</a:t>
+              <a:t>PROVIDER-SIGNED</a:t>
             </a:r>
             <a:endParaRPr lang="en-US" sz="1300" dirty="0"/>
           </a:p>
@@ -4918,14 +4946,14 @@
       </p:sp>
       <p:sp>
         <p:nvSpPr>
-          <p:cNvPr id="11" name="Text 9"/>
-          <p:cNvSpPr/>
-          <p:nvPr/>
-        </p:nvSpPr>
-        <p:spPr>
-          <a:xfrm>
-            <a:off x="841248" y="3246120"/>
-            <a:ext cx="4453128" cy="2395728"/>
+          <p:cNvPr id="7" name="Text 5"/>
+          <p:cNvSpPr/>
+          <p:nvPr/>
+        </p:nvSpPr>
+        <p:spPr>
+          <a:xfrm>
+            <a:off x="795528" y="1929384"/>
+            <a:ext cx="3154680" cy="2313432"/>
           </a:xfrm>
           <a:prstGeom prst="rect">
             <a:avLst/>
@@ -4943,127 +4971,71 @@
               <a:buNone/>
             </a:pPr>
             <a:r>
-              <a:rPr lang="en-US" sz="1040" dirty="0">
+              <a:rPr lang="en-US" sz="1030" dirty="0">
                 <a:solidFill>
                   <a:srgbClr val="D8E3F0"/>
                 </a:solidFill>
               </a:rPr>
-              <a:t>What technically happened</a:t>
-            </a:r>
-            <a:endParaRPr lang="en-US" sz="1040" dirty="0"/>
-          </a:p>
-          <a:p>
-            <a:pPr indent="0" marL="0">
-              <a:buNone/>
-            </a:pPr>
-            <a:endParaRPr lang="en-US" sz="1040" dirty="0"/>
-          </a:p>
-          <a:p>
-            <a:pPr indent="0" marL="0">
-              <a:buNone/>
-            </a:pPr>
-            <a:r>
-              <a:rPr lang="en-US" sz="1040" dirty="0">
+              <a:t>Provider event, settlement receipt, or verifiable batch manifest.</a:t>
+            </a:r>
+            <a:endParaRPr lang="en-US" sz="1030" dirty="0"/>
+          </a:p>
+          <a:p>
+            <a:pPr indent="0" marL="0">
+              <a:buNone/>
+            </a:pPr>
+            <a:endParaRPr lang="en-US" sz="1030" dirty="0"/>
+          </a:p>
+          <a:p>
+            <a:pPr indent="0" marL="0">
+              <a:buNone/>
+            </a:pPr>
+            <a:r>
+              <a:rPr lang="en-US" sz="1030" dirty="0">
                 <a:solidFill>
                   <a:srgbClr val="D8E3F0"/>
                 </a:solidFill>
               </a:rPr>
-              <a:t>• logical request + physical attempt</a:t>
-            </a:r>
-            <a:endParaRPr lang="en-US" sz="1040" dirty="0"/>
-          </a:p>
-          <a:p>
-            <a:pPr indent="0" marL="0">
-              <a:buNone/>
-            </a:pPr>
-            <a:r>
-              <a:rPr lang="en-US" sz="1040" dirty="0">
+              <a:t>Preferred provider-native target.</a:t>
+            </a:r>
+            <a:endParaRPr lang="en-US" sz="1030" dirty="0"/>
+          </a:p>
+          <a:p>
+            <a:pPr indent="0" marL="0">
+              <a:buNone/>
+            </a:pPr>
+            <a:endParaRPr lang="en-US" sz="1030" dirty="0"/>
+          </a:p>
+          <a:p>
+            <a:pPr indent="0" marL="0">
+              <a:buNone/>
+            </a:pPr>
+            <a:r>
+              <a:rPr lang="en-US" sz="1030" dirty="0">
                 <a:solidFill>
                   <a:srgbClr val="D8E3F0"/>
                 </a:solidFill>
               </a:rPr>
-              <a:t>• requested and resolved model</a:t>
-            </a:r>
-            <a:endParaRPr lang="en-US" sz="1040" dirty="0"/>
-          </a:p>
-          <a:p>
-            <a:pPr indent="0" marL="0">
-              <a:buNone/>
-            </a:pPr>
-            <a:r>
-              <a:rPr lang="en-US" sz="1040" dirty="0">
-                <a:solidFill>
-                  <a:srgbClr val="D8E3F0"/>
-                </a:solidFill>
-              </a:rPr>
-              <a:t>• Provider route, retry and outcome</a:t>
-            </a:r>
-            <a:endParaRPr lang="en-US" sz="1040" dirty="0"/>
-          </a:p>
-          <a:p>
-            <a:pPr indent="0" marL="0">
-              <a:buNone/>
-            </a:pPr>
-            <a:r>
-              <a:rPr lang="en-US" sz="1040" dirty="0">
-                <a:solidFill>
-                  <a:srgbClr val="D8E3F0"/>
-                </a:solidFill>
-              </a:rPr>
-              <a:t>• tokens, modalities, tools and latency</a:t>
-            </a:r>
-            <a:endParaRPr lang="en-US" sz="1040" dirty="0"/>
-          </a:p>
-          <a:p>
-            <a:pPr indent="0" marL="0">
-              <a:buNone/>
-            </a:pPr>
-            <a:r>
-              <a:rPr lang="en-US" sz="1040" dirty="0">
-                <a:solidFill>
-                  <a:srgbClr val="D8E3F0"/>
-                </a:solidFill>
-              </a:rPr>
-              <a:t>• optional workspace / workflow / agent refs</a:t>
-            </a:r>
-            <a:endParaRPr lang="en-US" sz="1040" dirty="0"/>
-          </a:p>
-          <a:p>
-            <a:pPr indent="0" marL="0">
-              <a:buNone/>
-            </a:pPr>
-            <a:endParaRPr lang="en-US" sz="1040" dirty="0"/>
-          </a:p>
-          <a:p>
-            <a:pPr indent="0" marL="0">
-              <a:buNone/>
-            </a:pPr>
-            <a:r>
-              <a:rPr lang="en-US" sz="1040" dirty="0">
-                <a:solidFill>
-                  <a:srgbClr val="D8E3F0"/>
-                </a:solidFill>
-              </a:rPr>
-              <a:t>One immutable event per billable attempt.</a:t>
-            </a:r>
-            <a:endParaRPr lang="en-US" sz="1040" dirty="0"/>
-          </a:p>
-        </p:txBody>
-      </p:sp>
-      <p:sp>
-        <p:nvSpPr>
-          <p:cNvPr id="12" name="Shape 10"/>
-          <p:cNvSpPr/>
-          <p:nvPr/>
-        </p:nvSpPr>
-        <p:spPr>
-          <a:xfrm>
-            <a:off x="6748272" y="2743200"/>
-            <a:ext cx="4800600" cy="3035808"/>
+              <a:t>Binds issuer, Provider request/event IDs, digest, key ID, signature format, signature, and time.</a:t>
+            </a:r>
+            <a:endParaRPr lang="en-US" sz="1030" dirty="0"/>
+          </a:p>
+        </p:txBody>
+      </p:sp>
+      <p:sp>
+        <p:nvSpPr>
+          <p:cNvPr id="8" name="Shape 6"/>
+          <p:cNvSpPr/>
+          <p:nvPr/>
+        </p:nvSpPr>
+        <p:spPr>
+          <a:xfrm>
+            <a:off x="4343400" y="1417320"/>
+            <a:ext cx="3520440" cy="2971800"/>
           </a:xfrm>
           <a:prstGeom prst="roundRect">
             <a:avLst>
-              <a:gd name="adj" fmla="val 2410"/>
+              <a:gd name="adj" fmla="val 1846"/>
             </a:avLst>
           </a:prstGeom>
           <a:solidFill>
@@ -5079,14 +5051,180 @@
       </p:sp>
       <p:sp>
         <p:nvSpPr>
+          <p:cNvPr id="9" name="Shape 7"/>
+          <p:cNvSpPr/>
+          <p:nvPr/>
+        </p:nvSpPr>
+        <p:spPr>
+          <a:xfrm>
+            <a:off x="4343400" y="1417320"/>
+            <a:ext cx="64008" cy="2971800"/>
+          </a:xfrm>
+          <a:prstGeom prst="rect">
+            <a:avLst/>
+          </a:prstGeom>
+          <a:solidFill>
+            <a:srgbClr val="5D8CFF"/>
+          </a:solidFill>
+          <a:ln w="12700">
+            <a:solidFill>
+              <a:srgbClr val="5D8CFF"/>
+            </a:solidFill>
+            <a:prstDash val="solid"/>
+          </a:ln>
+        </p:spPr>
+      </p:sp>
+      <p:sp>
+        <p:nvSpPr>
+          <p:cNvPr id="10" name="Text 8"/>
+          <p:cNvSpPr/>
+          <p:nvPr/>
+        </p:nvSpPr>
+        <p:spPr>
+          <a:xfrm>
+            <a:off x="4544568" y="1563624"/>
+            <a:ext cx="3200400" cy="292608"/>
+          </a:xfrm>
+          <a:prstGeom prst="rect">
+            <a:avLst/>
+          </a:prstGeom>
+          <a:noFill/>
+          <a:ln/>
+        </p:spPr>
+        <p:txBody>
+          <a:bodyPr wrap="square" lIns="0" tIns="0" rIns="0" bIns="0" rtlCol="0" anchor="ctr"/>
+          <a:lstStyle/>
+          <a:p>
+            <a:pPr indent="0" marL="0">
+              <a:buNone/>
+            </a:pPr>
+            <a:r>
+              <a:rPr lang="en-US" sz="1300" b="1" dirty="0">
+                <a:solidFill>
+                  <a:srgbClr val="F5F8FC"/>
+                </a:solidFill>
+              </a:rPr>
+              <a:t>PROVIDER-REPORTED</a:t>
+            </a:r>
+            <a:endParaRPr lang="en-US" sz="1300" dirty="0"/>
+          </a:p>
+        </p:txBody>
+      </p:sp>
+      <p:sp>
+        <p:nvSpPr>
+          <p:cNvPr id="11" name="Text 9"/>
+          <p:cNvSpPr/>
+          <p:nvPr/>
+        </p:nvSpPr>
+        <p:spPr>
+          <a:xfrm>
+            <a:off x="4544568" y="1929384"/>
+            <a:ext cx="3154680" cy="2313432"/>
+          </a:xfrm>
+          <a:prstGeom prst="rect">
+            <a:avLst/>
+          </a:prstGeom>
+          <a:noFill/>
+          <a:ln/>
+        </p:spPr>
+        <p:txBody>
+          <a:bodyPr wrap="square" lIns="254" tIns="254" rIns="254" bIns="254" rtlCol="0" anchor="t">
+            <a:normAutofit/>
+          </a:bodyPr>
+          <a:lstStyle/>
+          <a:p>
+            <a:pPr indent="0" marL="0">
+              <a:buNone/>
+            </a:pPr>
+            <a:r>
+              <a:rPr lang="en-US" sz="1030" dirty="0">
+                <a:solidFill>
+                  <a:srgbClr val="D8E3F0"/>
+                </a:solidFill>
+              </a:rPr>
+              <a:t>Authenticated Provider API response, usage endpoint, export, or billing record.</a:t>
+            </a:r>
+            <a:endParaRPr lang="en-US" sz="1030" dirty="0"/>
+          </a:p>
+          <a:p>
+            <a:pPr indent="0" marL="0">
+              <a:buNone/>
+            </a:pPr>
+            <a:endParaRPr lang="en-US" sz="1030" dirty="0"/>
+          </a:p>
+          <a:p>
+            <a:pPr indent="0" marL="0">
+              <a:buNone/>
+            </a:pPr>
+            <a:r>
+              <a:rPr lang="en-US" sz="1030" dirty="0">
+                <a:solidFill>
+                  <a:srgbClr val="D8E3F0"/>
+                </a:solidFill>
+              </a:rPr>
+              <a:t>Provider evidence without a native ABDS signature.</a:t>
+            </a:r>
+            <a:endParaRPr lang="en-US" sz="1030" dirty="0"/>
+          </a:p>
+          <a:p>
+            <a:pPr indent="0" marL="0">
+              <a:buNone/>
+            </a:pPr>
+            <a:endParaRPr lang="en-US" sz="1030" dirty="0"/>
+          </a:p>
+          <a:p>
+            <a:pPr indent="0" marL="0">
+              <a:buNone/>
+            </a:pPr>
+            <a:r>
+              <a:rPr lang="en-US" sz="1030" dirty="0">
+                <a:solidFill>
+                  <a:srgbClr val="D8E3F0"/>
+                </a:solidFill>
+              </a:rPr>
+              <a:t>Preserve Provider request and billing references.</a:t>
+            </a:r>
+            <a:endParaRPr lang="en-US" sz="1030" dirty="0"/>
+          </a:p>
+        </p:txBody>
+      </p:sp>
+      <p:sp>
+        <p:nvSpPr>
+          <p:cNvPr id="12" name="Shape 10"/>
+          <p:cNvSpPr/>
+          <p:nvPr/>
+        </p:nvSpPr>
+        <p:spPr>
+          <a:xfrm>
+            <a:off x="8092440" y="1417320"/>
+            <a:ext cx="3520440" cy="2971800"/>
+          </a:xfrm>
+          <a:prstGeom prst="roundRect">
+            <a:avLst>
+              <a:gd name="adj" fmla="val 1846"/>
+            </a:avLst>
+          </a:prstGeom>
+          <a:solidFill>
+            <a:srgbClr val="0D1B2D"/>
+          </a:solidFill>
+          <a:ln w="12700">
+            <a:solidFill>
+              <a:srgbClr val="244763"/>
+            </a:solidFill>
+            <a:prstDash val="solid"/>
+          </a:ln>
+        </p:spPr>
+      </p:sp>
+      <p:sp>
+        <p:nvSpPr>
           <p:cNvPr id="13" name="Shape 11"/>
           <p:cNvSpPr/>
           <p:nvPr/>
         </p:nvSpPr>
         <p:spPr>
           <a:xfrm>
-            <a:off x="6748272" y="2743200"/>
-            <a:ext cx="64008" cy="3035808"/>
+            <a:off x="8092440" y="1417320"/>
+            <a:ext cx="64008" cy="2971800"/>
           </a:xfrm>
           <a:prstGeom prst="rect">
             <a:avLst/>
@@ -5110,8 +5248,8 @@
         </p:nvSpPr>
         <p:spPr>
           <a:xfrm>
-            <a:off x="6949440" y="2889504"/>
-            <a:ext cx="4480560" cy="292608"/>
+            <a:off x="8293608" y="1563624"/>
+            <a:ext cx="3200400" cy="292608"/>
           </a:xfrm>
           <a:prstGeom prst="rect">
             <a:avLst/>
@@ -5132,7 +5270,7 @@
                   <a:srgbClr val="F5F8FC"/>
                 </a:solidFill>
               </a:rPr>
-              <a:t>ECONOMIC LEDGER PLANE</a:t>
+              <a:t>GATEWAY-ATTESTED</a:t>
             </a:r>
             <a:endParaRPr lang="en-US" sz="1300" dirty="0"/>
           </a:p>
@@ -5146,8 +5284,8 @@
         </p:nvSpPr>
         <p:spPr>
           <a:xfrm>
-            <a:off x="6949440" y="3246120"/>
-            <a:ext cx="4453128" cy="2395728"/>
+            <a:off x="8293608" y="1929384"/>
+            <a:ext cx="3154680" cy="2313432"/>
           </a:xfrm>
           <a:prstGeom prst="rect">
             <a:avLst/>
@@ -5165,124 +5303,54 @@
               <a:buNone/>
             </a:pPr>
             <a:r>
-              <a:rPr lang="en-US" sz="1040" dirty="0">
+              <a:rPr lang="en-US" sz="1030" dirty="0">
                 <a:solidFill>
                   <a:srgbClr val="D8E3F0"/>
                 </a:solidFill>
               </a:rPr>
-              <a:t>What happened economically</a:t>
-            </a:r>
-            <a:endParaRPr lang="en-US" sz="1040" dirty="0"/>
-          </a:p>
-          <a:p>
-            <a:pPr indent="0" marL="0">
-              <a:buNone/>
-            </a:pPr>
-            <a:endParaRPr lang="en-US" sz="1040" dirty="0"/>
-          </a:p>
-          <a:p>
-            <a:pPr indent="0" marL="0">
-              <a:buNone/>
-            </a:pPr>
-            <a:r>
-              <a:rPr lang="en-US" sz="1040" dirty="0">
+              <a:t>Gateway estimate or locally observed response.</a:t>
+            </a:r>
+            <a:endParaRPr lang="en-US" sz="1030" dirty="0"/>
+          </a:p>
+          <a:p>
+            <a:pPr indent="0" marL="0">
+              <a:buNone/>
+            </a:pPr>
+            <a:endParaRPr lang="en-US" sz="1030" dirty="0"/>
+          </a:p>
+          <a:p>
+            <a:pPr indent="0" marL="0">
+              <a:buNone/>
+            </a:pPr>
+            <a:r>
+              <a:rPr lang="en-US" sz="1030" dirty="0">
                 <a:solidFill>
                   <a:srgbClr val="D8E3F0"/>
                 </a:solidFill>
               </a:rPr>
-              <a:t>• reservation created</a:t>
-            </a:r>
-            <a:endParaRPr lang="en-US" sz="1040" dirty="0"/>
-          </a:p>
-          <a:p>
-            <a:pPr indent="0" marL="0">
-              <a:buNone/>
-            </a:pPr>
-            <a:r>
-              <a:rPr lang="en-US" sz="1040" dirty="0">
+              <a:t>Useful for current APIs, but provisional.</a:t>
+            </a:r>
+            <a:endParaRPr lang="en-US" sz="1030" dirty="0"/>
+          </a:p>
+          <a:p>
+            <a:pPr indent="0" marL="0">
+              <a:buNone/>
+            </a:pPr>
+            <a:endParaRPr lang="en-US" sz="1030" dirty="0"/>
+          </a:p>
+          <a:p>
+            <a:pPr indent="0" marL="0">
+              <a:buNone/>
+            </a:pPr>
+            <a:r>
+              <a:rPr lang="en-US" sz="1030" dirty="0">
                 <a:solidFill>
                   <a:srgbClr val="D8E3F0"/>
                 </a:solidFill>
               </a:rPr>
-              <a:t>• settlement posted</a:t>
-            </a:r>
-            <a:endParaRPr lang="en-US" sz="1040" dirty="0"/>
-          </a:p>
-          <a:p>
-            <a:pPr indent="0" marL="0">
-              <a:buNone/>
-            </a:pPr>
-            <a:r>
-              <a:rPr lang="en-US" sz="1040" dirty="0">
-                <a:solidFill>
-                  <a:srgbClr val="D8E3F0"/>
-                </a:solidFill>
-              </a:rPr>
-              <a:t>• unused quantity released</a:t>
-            </a:r>
-            <a:endParaRPr lang="en-US" sz="1040" dirty="0"/>
-          </a:p>
-          <a:p>
-            <a:pPr indent="0" marL="0">
-              <a:buNone/>
-            </a:pPr>
-            <a:r>
-              <a:rPr lang="en-US" sz="1040" dirty="0">
-                <a:solidFill>
-                  <a:srgbClr val="D8E3F0"/>
-                </a:solidFill>
-              </a:rPr>
-              <a:t>• reservation expired</a:t>
-            </a:r>
-            <a:endParaRPr lang="en-US" sz="1040" dirty="0"/>
-          </a:p>
-          <a:p>
-            <a:pPr indent="0" marL="0">
-              <a:buNone/>
-            </a:pPr>
-            <a:r>
-              <a:rPr lang="en-US" sz="1040" dirty="0">
-                <a:solidFill>
-                  <a:srgbClr val="D8E3F0"/>
-                </a:solidFill>
-              </a:rPr>
-              <a:t>• execution denied</a:t>
-            </a:r>
-            <a:endParaRPr lang="en-US" sz="1040" dirty="0"/>
-          </a:p>
-          <a:p>
-            <a:pPr indent="0" marL="0">
-              <a:buNone/>
-            </a:pPr>
-            <a:r>
-              <a:rPr lang="en-US" sz="1040" dirty="0">
-                <a:solidFill>
-                  <a:srgbClr val="D8E3F0"/>
-                </a:solidFill>
-              </a:rPr>
-              <a:t>• compensating adjustment</a:t>
-            </a:r>
-            <a:endParaRPr lang="en-US" sz="1040" dirty="0"/>
-          </a:p>
-          <a:p>
-            <a:pPr indent="0" marL="0">
-              <a:buNone/>
-            </a:pPr>
-            <a:endParaRPr lang="en-US" sz="1040" dirty="0"/>
-          </a:p>
-          <a:p>
-            <a:pPr indent="0" marL="0">
-              <a:buNone/>
-            </a:pPr>
-            <a:r>
-              <a:rPr lang="en-US" sz="1040" dirty="0">
-                <a:solidFill>
-                  <a:srgbClr val="D8E3F0"/>
-                </a:solidFill>
-              </a:rPr>
-              <a:t>Provider-authoritative and idempotent.</a:t>
-            </a:r>
-            <a:endParaRPr lang="en-US" sz="1040" dirty="0"/>
+              <a:t>Must not be represented as Provider-authoritative evidence.</a:t>
+            </a:r>
+            <a:endParaRPr lang="en-US" sz="1030" dirty="0"/>
           </a:p>
         </p:txBody>
       </p:sp>
@@ -5294,8 +5362,8 @@
         </p:nvSpPr>
         <p:spPr>
           <a:xfrm>
-            <a:off x="1828800" y="5989320"/>
-            <a:ext cx="8503920" cy="274320"/>
+            <a:off x="914400" y="5074920"/>
+            <a:ext cx="10332720" cy="457200"/>
           </a:xfrm>
           <a:prstGeom prst="rect">
             <a:avLst/>
@@ -5311,14 +5379,14 @@
               <a:buNone/>
             </a:pPr>
             <a:r>
-              <a:rPr lang="en-US" sz="1100" b="1" dirty="0">
+              <a:rPr lang="en-US" sz="1700" b="1" dirty="0">
                 <a:solidFill>
                   <a:srgbClr val="35D0E6"/>
                 </a:solidFill>
               </a:rPr>
-              <a:t>Client labels help explain product behavior, but cannot change the payer or billed quantity.</a:t>
-            </a:r>
-            <a:endParaRPr lang="en-US" sz="1100" dirty="0"/>
+              <a:t>estimated  -&gt;  gateway observed  -&gt;  Provider reported  -&gt;  reconciled  -&gt;  final</a:t>
+            </a:r>
+            <a:endParaRPr lang="en-US" sz="1700" dirty="0"/>
           </a:p>
         </p:txBody>
       </p:sp>
@@ -5424,11 +5492,8 @@
                 <a:solidFill>
                   <a:srgbClr val="F5F8FC"/>
                 </a:solidFill>
-                <a:latin typeface="Arial" pitchFamily="34" charset="0"/>
-                <a:ea typeface="Arial" pitchFamily="34" charset="-122"/>
-                <a:cs typeface="Arial" pitchFamily="34" charset="-120"/>
-              </a:rPr>
-              <a:t>Attribution hierarchy and retry visibility</a:t>
+              </a:rPr>
+              <a:t>Consent Receipts make approval auditable</a:t>
             </a:r>
             <a:endParaRPr lang="en-US" sz="2500" dirty="0"/>
           </a:p>
@@ -5443,7 +5508,7 @@
         <p:spPr>
           <a:xfrm>
             <a:off x="612648" y="932688"/>
-            <a:ext cx="10789920" cy="329184"/>
+            <a:ext cx="10789920" cy="310896"/>
           </a:xfrm>
           <a:prstGeom prst="rect">
             <a:avLst/>
@@ -5463,11 +5528,8 @@
                 <a:solidFill>
                   <a:srgbClr val="8FA7C0"/>
                 </a:solidFill>
-                <a:latin typeface="Arial" pitchFamily="34" charset="0"/>
-                <a:ea typeface="Arial" pitchFamily="34" charset="-122"/>
-                <a:cs typeface="Arial" pitchFamily="34" charset="-120"/>
-              </a:rPr>
-              <a:t>One user action can create several real executions - every billable attempt remains visible.</a:t>
+              </a:rPr>
+              <a:t>The current grant state is not enough to prove what was approved earlier.</a:t>
             </a:r>
             <a:endParaRPr lang="en-US" sz="1150" dirty="0"/>
           </a:p>
@@ -5481,1009 +5543,12 @@
         </p:nvSpPr>
         <p:spPr>
           <a:xfrm>
-            <a:off x="658368" y="1298448"/>
-            <a:ext cx="3246120" cy="411480"/>
+            <a:off x="594360" y="1371600"/>
+            <a:ext cx="3657600" cy="4297680"/>
           </a:xfrm>
           <a:prstGeom prst="roundRect">
             <a:avLst>
-              <a:gd name="adj" fmla="val 15556"/>
-            </a:avLst>
-          </a:prstGeom>
-          <a:solidFill>
-            <a:srgbClr val="10243A"/>
-          </a:solidFill>
-          <a:ln w="15240">
-            <a:solidFill>
-              <a:srgbClr val="35D0E6"/>
-            </a:solidFill>
-            <a:prstDash val="solid"/>
-          </a:ln>
-        </p:spPr>
-      </p:sp>
-      <p:sp>
-        <p:nvSpPr>
-          <p:cNvPr id="5" name="Text 3"/>
-          <p:cNvSpPr/>
-          <p:nvPr/>
-        </p:nvSpPr>
-        <p:spPr>
-          <a:xfrm>
-            <a:off x="749808" y="1408176"/>
-            <a:ext cx="3063240" cy="228600"/>
-          </a:xfrm>
-          <a:prstGeom prst="rect">
-            <a:avLst/>
-          </a:prstGeom>
-          <a:noFill/>
-          <a:ln/>
-        </p:spPr>
-        <p:txBody>
-          <a:bodyPr wrap="square" lIns="254" tIns="254" rIns="254" bIns="254" rtlCol="0" anchor="ctr">
-            <a:normAutofit/>
-          </a:bodyPr>
-          <a:lstStyle/>
-          <a:p>
-            <a:pPr algn="ctr" indent="0" marL="0">
-              <a:buNone/>
-            </a:pPr>
-            <a:r>
-              <a:rPr lang="en-US" sz="1020" b="1" dirty="0">
-                <a:solidFill>
-                  <a:srgbClr val="F5F8FC"/>
-                </a:solidFill>
-              </a:rPr>
-              <a:t>Funding source</a:t>
-            </a:r>
-            <a:endParaRPr lang="en-US" sz="1020" dirty="0"/>
-          </a:p>
-        </p:txBody>
-      </p:sp>
-      <p:sp>
-        <p:nvSpPr>
-          <p:cNvPr id="6" name="Shape 4"/>
-          <p:cNvSpPr/>
-          <p:nvPr/>
-        </p:nvSpPr>
-        <p:spPr>
-          <a:xfrm>
-            <a:off x="2286000" y="1709928"/>
-            <a:ext cx="329184" cy="109728"/>
-          </a:xfrm>
-          <a:prstGeom prst="line">
-            <a:avLst/>
-          </a:prstGeom>
-          <a:noFill/>
-          <a:ln w="13970">
-            <a:solidFill>
-              <a:srgbClr val="8FA7C0"/>
-            </a:solidFill>
-            <a:prstDash val="solid"/>
-            <a:tailEnd type="triangle"/>
-          </a:ln>
-        </p:spPr>
-      </p:sp>
-      <p:sp>
-        <p:nvSpPr>
-          <p:cNvPr id="7" name="Shape 5"/>
-          <p:cNvSpPr/>
-          <p:nvPr/>
-        </p:nvSpPr>
-        <p:spPr>
-          <a:xfrm>
-            <a:off x="987552" y="1828800"/>
-            <a:ext cx="3246120" cy="411480"/>
-          </a:xfrm>
-          <a:prstGeom prst="roundRect">
-            <a:avLst>
-              <a:gd name="adj" fmla="val 15556"/>
-            </a:avLst>
-          </a:prstGeom>
-          <a:solidFill>
-            <a:srgbClr val="10243A"/>
-          </a:solidFill>
-          <a:ln w="15240">
-            <a:solidFill>
-              <a:srgbClr val="5D8CFF"/>
-            </a:solidFill>
-            <a:prstDash val="solid"/>
-          </a:ln>
-        </p:spPr>
-      </p:sp>
-      <p:sp>
-        <p:nvSpPr>
-          <p:cNvPr id="8" name="Text 6"/>
-          <p:cNvSpPr/>
-          <p:nvPr/>
-        </p:nvSpPr>
-        <p:spPr>
-          <a:xfrm>
-            <a:off x="1078992" y="1938528"/>
-            <a:ext cx="3063240" cy="228600"/>
-          </a:xfrm>
-          <a:prstGeom prst="rect">
-            <a:avLst/>
-          </a:prstGeom>
-          <a:noFill/>
-          <a:ln/>
-        </p:spPr>
-        <p:txBody>
-          <a:bodyPr wrap="square" lIns="254" tIns="254" rIns="254" bIns="254" rtlCol="0" anchor="ctr">
-            <a:normAutofit/>
-          </a:bodyPr>
-          <a:lstStyle/>
-          <a:p>
-            <a:pPr algn="ctr" indent="0" marL="0">
-              <a:buNone/>
-            </a:pPr>
-            <a:r>
-              <a:rPr lang="en-US" sz="1020" b="1" dirty="0">
-                <a:solidFill>
-                  <a:srgbClr val="F5F8FC"/>
-                </a:solidFill>
-              </a:rPr>
-              <a:t>Delegated grant</a:t>
-            </a:r>
-            <a:endParaRPr lang="en-US" sz="1020" dirty="0"/>
-          </a:p>
-        </p:txBody>
-      </p:sp>
-      <p:sp>
-        <p:nvSpPr>
-          <p:cNvPr id="9" name="Shape 7"/>
-          <p:cNvSpPr/>
-          <p:nvPr/>
-        </p:nvSpPr>
-        <p:spPr>
-          <a:xfrm>
-            <a:off x="2615184" y="2240280"/>
-            <a:ext cx="329184" cy="109728"/>
-          </a:xfrm>
-          <a:prstGeom prst="line">
-            <a:avLst/>
-          </a:prstGeom>
-          <a:noFill/>
-          <a:ln w="13970">
-            <a:solidFill>
-              <a:srgbClr val="8FA7C0"/>
-            </a:solidFill>
-            <a:prstDash val="solid"/>
-            <a:tailEnd type="triangle"/>
-          </a:ln>
-        </p:spPr>
-      </p:sp>
-      <p:sp>
-        <p:nvSpPr>
-          <p:cNvPr id="10" name="Shape 8"/>
-          <p:cNvSpPr/>
-          <p:nvPr/>
-        </p:nvSpPr>
-        <p:spPr>
-          <a:xfrm>
-            <a:off x="1316736" y="2359152"/>
-            <a:ext cx="3246120" cy="411480"/>
-          </a:xfrm>
-          <a:prstGeom prst="roundRect">
-            <a:avLst>
-              <a:gd name="adj" fmla="val 15556"/>
-            </a:avLst>
-          </a:prstGeom>
-          <a:solidFill>
-            <a:srgbClr val="10243A"/>
-          </a:solidFill>
-          <a:ln w="15240">
-            <a:solidFill>
-              <a:srgbClr val="35D0E6"/>
-            </a:solidFill>
-            <a:prstDash val="solid"/>
-          </a:ln>
-        </p:spPr>
-      </p:sp>
-      <p:sp>
-        <p:nvSpPr>
-          <p:cNvPr id="11" name="Text 9"/>
-          <p:cNvSpPr/>
-          <p:nvPr/>
-        </p:nvSpPr>
-        <p:spPr>
-          <a:xfrm>
-            <a:off x="1408176" y="2468880"/>
-            <a:ext cx="3063240" cy="228600"/>
-          </a:xfrm>
-          <a:prstGeom prst="rect">
-            <a:avLst/>
-          </a:prstGeom>
-          <a:noFill/>
-          <a:ln/>
-        </p:spPr>
-        <p:txBody>
-          <a:bodyPr wrap="square" lIns="254" tIns="254" rIns="254" bIns="254" rtlCol="0" anchor="ctr">
-            <a:normAutofit/>
-          </a:bodyPr>
-          <a:lstStyle/>
-          <a:p>
-            <a:pPr algn="ctr" indent="0" marL="0">
-              <a:buNone/>
-            </a:pPr>
-            <a:r>
-              <a:rPr lang="en-US" sz="1020" b="1" dirty="0">
-                <a:solidFill>
-                  <a:srgbClr val="F5F8FC"/>
-                </a:solidFill>
-              </a:rPr>
-              <a:t>Client</a:t>
-            </a:r>
-            <a:endParaRPr lang="en-US" sz="1020" dirty="0"/>
-          </a:p>
-        </p:txBody>
-      </p:sp>
-      <p:sp>
-        <p:nvSpPr>
-          <p:cNvPr id="12" name="Shape 10"/>
-          <p:cNvSpPr/>
-          <p:nvPr/>
-        </p:nvSpPr>
-        <p:spPr>
-          <a:xfrm>
-            <a:off x="2944368" y="2770632"/>
-            <a:ext cx="329184" cy="109728"/>
-          </a:xfrm>
-          <a:prstGeom prst="line">
-            <a:avLst/>
-          </a:prstGeom>
-          <a:noFill/>
-          <a:ln w="13970">
-            <a:solidFill>
-              <a:srgbClr val="8FA7C0"/>
-            </a:solidFill>
-            <a:prstDash val="solid"/>
-            <a:tailEnd type="triangle"/>
-          </a:ln>
-        </p:spPr>
-      </p:sp>
-      <p:sp>
-        <p:nvSpPr>
-          <p:cNvPr id="13" name="Shape 11"/>
-          <p:cNvSpPr/>
-          <p:nvPr/>
-        </p:nvSpPr>
-        <p:spPr>
-          <a:xfrm>
-            <a:off x="1645920" y="2889504"/>
-            <a:ext cx="3246120" cy="411480"/>
-          </a:xfrm>
-          <a:prstGeom prst="roundRect">
-            <a:avLst>
-              <a:gd name="adj" fmla="val 15556"/>
-            </a:avLst>
-          </a:prstGeom>
-          <a:solidFill>
-            <a:srgbClr val="10243A"/>
-          </a:solidFill>
-          <a:ln w="15240">
-            <a:solidFill>
-              <a:srgbClr val="5D8CFF"/>
-            </a:solidFill>
-            <a:prstDash val="solid"/>
-          </a:ln>
-        </p:spPr>
-      </p:sp>
-      <p:sp>
-        <p:nvSpPr>
-          <p:cNvPr id="14" name="Text 12"/>
-          <p:cNvSpPr/>
-          <p:nvPr/>
-        </p:nvSpPr>
-        <p:spPr>
-          <a:xfrm>
-            <a:off x="1737360" y="2999232"/>
-            <a:ext cx="3063240" cy="228600"/>
-          </a:xfrm>
-          <a:prstGeom prst="rect">
-            <a:avLst/>
-          </a:prstGeom>
-          <a:noFill/>
-          <a:ln/>
-        </p:spPr>
-        <p:txBody>
-          <a:bodyPr wrap="square" lIns="254" tIns="254" rIns="254" bIns="254" rtlCol="0" anchor="ctr">
-            <a:normAutofit/>
-          </a:bodyPr>
-          <a:lstStyle/>
-          <a:p>
-            <a:pPr algn="ctr" indent="0" marL="0">
-              <a:buNone/>
-            </a:pPr>
-            <a:r>
-              <a:rPr lang="en-US" sz="1020" b="1" dirty="0">
-                <a:solidFill>
-                  <a:srgbClr val="F5F8FC"/>
-                </a:solidFill>
-              </a:rPr>
-              <a:t>Beneficiary / workspace</a:t>
-            </a:r>
-            <a:endParaRPr lang="en-US" sz="1020" dirty="0"/>
-          </a:p>
-        </p:txBody>
-      </p:sp>
-      <p:sp>
-        <p:nvSpPr>
-          <p:cNvPr id="15" name="Shape 13"/>
-          <p:cNvSpPr/>
-          <p:nvPr/>
-        </p:nvSpPr>
-        <p:spPr>
-          <a:xfrm>
-            <a:off x="3273552" y="3300984"/>
-            <a:ext cx="329184" cy="109728"/>
-          </a:xfrm>
-          <a:prstGeom prst="line">
-            <a:avLst/>
-          </a:prstGeom>
-          <a:noFill/>
-          <a:ln w="13970">
-            <a:solidFill>
-              <a:srgbClr val="8FA7C0"/>
-            </a:solidFill>
-            <a:prstDash val="solid"/>
-            <a:tailEnd type="triangle"/>
-          </a:ln>
-        </p:spPr>
-      </p:sp>
-      <p:sp>
-        <p:nvSpPr>
-          <p:cNvPr id="16" name="Shape 14"/>
-          <p:cNvSpPr/>
-          <p:nvPr/>
-        </p:nvSpPr>
-        <p:spPr>
-          <a:xfrm>
-            <a:off x="1975104" y="3419856"/>
-            <a:ext cx="3246120" cy="411480"/>
-          </a:xfrm>
-          <a:prstGeom prst="roundRect">
-            <a:avLst>
-              <a:gd name="adj" fmla="val 15556"/>
-            </a:avLst>
-          </a:prstGeom>
-          <a:solidFill>
-            <a:srgbClr val="10243A"/>
-          </a:solidFill>
-          <a:ln w="15240">
-            <a:solidFill>
-              <a:srgbClr val="35D0E6"/>
-            </a:solidFill>
-            <a:prstDash val="solid"/>
-          </a:ln>
-        </p:spPr>
-      </p:sp>
-      <p:sp>
-        <p:nvSpPr>
-          <p:cNvPr id="17" name="Text 15"/>
-          <p:cNvSpPr/>
-          <p:nvPr/>
-        </p:nvSpPr>
-        <p:spPr>
-          <a:xfrm>
-            <a:off x="2066544" y="3529584"/>
-            <a:ext cx="3063240" cy="228600"/>
-          </a:xfrm>
-          <a:prstGeom prst="rect">
-            <a:avLst/>
-          </a:prstGeom>
-          <a:noFill/>
-          <a:ln/>
-        </p:spPr>
-        <p:txBody>
-          <a:bodyPr wrap="square" lIns="254" tIns="254" rIns="254" bIns="254" rtlCol="0" anchor="ctr">
-            <a:normAutofit/>
-          </a:bodyPr>
-          <a:lstStyle/>
-          <a:p>
-            <a:pPr algn="ctr" indent="0" marL="0">
-              <a:buNone/>
-            </a:pPr>
-            <a:r>
-              <a:rPr lang="en-US" sz="1020" b="1" dirty="0">
-                <a:solidFill>
-                  <a:srgbClr val="F5F8FC"/>
-                </a:solidFill>
-              </a:rPr>
-              <a:t>Logical request - req_88</a:t>
-            </a:r>
-            <a:endParaRPr lang="en-US" sz="1020" dirty="0"/>
-          </a:p>
-        </p:txBody>
-      </p:sp>
-      <p:sp>
-        <p:nvSpPr>
-          <p:cNvPr id="18" name="Shape 16"/>
-          <p:cNvSpPr/>
-          <p:nvPr/>
-        </p:nvSpPr>
-        <p:spPr>
-          <a:xfrm>
-            <a:off x="3602736" y="3831336"/>
-            <a:ext cx="329184" cy="109728"/>
-          </a:xfrm>
-          <a:prstGeom prst="line">
-            <a:avLst/>
-          </a:prstGeom>
-          <a:noFill/>
-          <a:ln w="13970">
-            <a:solidFill>
-              <a:srgbClr val="8FA7C0"/>
-            </a:solidFill>
-            <a:prstDash val="solid"/>
-            <a:tailEnd type="triangle"/>
-          </a:ln>
-        </p:spPr>
-      </p:sp>
-      <p:sp>
-        <p:nvSpPr>
-          <p:cNvPr id="19" name="Shape 17"/>
-          <p:cNvSpPr/>
-          <p:nvPr/>
-        </p:nvSpPr>
-        <p:spPr>
-          <a:xfrm>
-            <a:off x="2304288" y="3950208"/>
-            <a:ext cx="3246120" cy="411480"/>
-          </a:xfrm>
-          <a:prstGeom prst="roundRect">
-            <a:avLst>
-              <a:gd name="adj" fmla="val 15556"/>
-            </a:avLst>
-          </a:prstGeom>
-          <a:solidFill>
-            <a:srgbClr val="10243A"/>
-          </a:solidFill>
-          <a:ln w="15240">
-            <a:solidFill>
-              <a:srgbClr val="5D8CFF"/>
-            </a:solidFill>
-            <a:prstDash val="solid"/>
-          </a:ln>
-        </p:spPr>
-      </p:sp>
-      <p:sp>
-        <p:nvSpPr>
-          <p:cNvPr id="20" name="Text 18"/>
-          <p:cNvSpPr/>
-          <p:nvPr/>
-        </p:nvSpPr>
-        <p:spPr>
-          <a:xfrm>
-            <a:off x="2395728" y="4059936"/>
-            <a:ext cx="3063240" cy="228600"/>
-          </a:xfrm>
-          <a:prstGeom prst="rect">
-            <a:avLst/>
-          </a:prstGeom>
-          <a:noFill/>
-          <a:ln/>
-        </p:spPr>
-        <p:txBody>
-          <a:bodyPr wrap="square" lIns="254" tIns="254" rIns="254" bIns="254" rtlCol="0" anchor="ctr">
-            <a:normAutofit/>
-          </a:bodyPr>
-          <a:lstStyle/>
-          <a:p>
-            <a:pPr algn="ctr" indent="0" marL="0">
-              <a:buNone/>
-            </a:pPr>
-            <a:r>
-              <a:rPr lang="en-US" sz="1020" b="1" dirty="0">
-                <a:solidFill>
-                  <a:srgbClr val="F5F8FC"/>
-                </a:solidFill>
-              </a:rPr>
-              <a:t>Workflow / feature</a:t>
-            </a:r>
-            <a:endParaRPr lang="en-US" sz="1020" dirty="0"/>
-          </a:p>
-        </p:txBody>
-      </p:sp>
-      <p:sp>
-        <p:nvSpPr>
-          <p:cNvPr id="21" name="Shape 19"/>
-          <p:cNvSpPr/>
-          <p:nvPr/>
-        </p:nvSpPr>
-        <p:spPr>
-          <a:xfrm>
-            <a:off x="3931920" y="4361688"/>
-            <a:ext cx="329184" cy="109728"/>
-          </a:xfrm>
-          <a:prstGeom prst="line">
-            <a:avLst/>
-          </a:prstGeom>
-          <a:noFill/>
-          <a:ln w="13970">
-            <a:solidFill>
-              <a:srgbClr val="8FA7C0"/>
-            </a:solidFill>
-            <a:prstDash val="solid"/>
-            <a:tailEnd type="triangle"/>
-          </a:ln>
-        </p:spPr>
-      </p:sp>
-      <p:sp>
-        <p:nvSpPr>
-          <p:cNvPr id="22" name="Shape 20"/>
-          <p:cNvSpPr/>
-          <p:nvPr/>
-        </p:nvSpPr>
-        <p:spPr>
-          <a:xfrm>
-            <a:off x="2633472" y="4480560"/>
-            <a:ext cx="3246120" cy="411480"/>
-          </a:xfrm>
-          <a:prstGeom prst="roundRect">
-            <a:avLst>
-              <a:gd name="adj" fmla="val 15556"/>
-            </a:avLst>
-          </a:prstGeom>
-          <a:solidFill>
-            <a:srgbClr val="10243A"/>
-          </a:solidFill>
-          <a:ln w="15240">
-            <a:solidFill>
-              <a:srgbClr val="35D0E6"/>
-            </a:solidFill>
-            <a:prstDash val="solid"/>
-          </a:ln>
-        </p:spPr>
-      </p:sp>
-      <p:sp>
-        <p:nvSpPr>
-          <p:cNvPr id="23" name="Text 21"/>
-          <p:cNvSpPr/>
-          <p:nvPr/>
-        </p:nvSpPr>
-        <p:spPr>
-          <a:xfrm>
-            <a:off x="2724912" y="4590288"/>
-            <a:ext cx="3063240" cy="228600"/>
-          </a:xfrm>
-          <a:prstGeom prst="rect">
-            <a:avLst/>
-          </a:prstGeom>
-          <a:noFill/>
-          <a:ln/>
-        </p:spPr>
-        <p:txBody>
-          <a:bodyPr wrap="square" lIns="254" tIns="254" rIns="254" bIns="254" rtlCol="0" anchor="ctr">
-            <a:normAutofit/>
-          </a:bodyPr>
-          <a:lstStyle/>
-          <a:p>
-            <a:pPr algn="ctr" indent="0" marL="0">
-              <a:buNone/>
-            </a:pPr>
-            <a:r>
-              <a:rPr lang="en-US" sz="1020" b="1" dirty="0">
-                <a:solidFill>
-                  <a:srgbClr val="F5F8FC"/>
-                </a:solidFill>
-              </a:rPr>
-              <a:t>Agent run</a:t>
-            </a:r>
-            <a:endParaRPr lang="en-US" sz="1020" dirty="0"/>
-          </a:p>
-        </p:txBody>
-      </p:sp>
-      <p:sp>
-        <p:nvSpPr>
-          <p:cNvPr id="24" name="Shape 22"/>
-          <p:cNvSpPr/>
-          <p:nvPr/>
-        </p:nvSpPr>
-        <p:spPr>
-          <a:xfrm>
-            <a:off x="4261104" y="4892040"/>
-            <a:ext cx="329184" cy="109728"/>
-          </a:xfrm>
-          <a:prstGeom prst="line">
-            <a:avLst/>
-          </a:prstGeom>
-          <a:noFill/>
-          <a:ln w="13970">
-            <a:solidFill>
-              <a:srgbClr val="8FA7C0"/>
-            </a:solidFill>
-            <a:prstDash val="solid"/>
-            <a:tailEnd type="triangle"/>
-          </a:ln>
-        </p:spPr>
-      </p:sp>
-      <p:sp>
-        <p:nvSpPr>
-          <p:cNvPr id="25" name="Shape 23"/>
-          <p:cNvSpPr/>
-          <p:nvPr/>
-        </p:nvSpPr>
-        <p:spPr>
-          <a:xfrm>
-            <a:off x="2962656" y="5010912"/>
-            <a:ext cx="3246120" cy="411480"/>
-          </a:xfrm>
-          <a:prstGeom prst="roundRect">
-            <a:avLst>
-              <a:gd name="adj" fmla="val 15556"/>
-            </a:avLst>
-          </a:prstGeom>
-          <a:solidFill>
-            <a:srgbClr val="10243A"/>
-          </a:solidFill>
-          <a:ln w="15240">
-            <a:solidFill>
-              <a:srgbClr val="5D8CFF"/>
-            </a:solidFill>
-            <a:prstDash val="solid"/>
-          </a:ln>
-        </p:spPr>
-      </p:sp>
-      <p:sp>
-        <p:nvSpPr>
-          <p:cNvPr id="26" name="Text 24"/>
-          <p:cNvSpPr/>
-          <p:nvPr/>
-        </p:nvSpPr>
-        <p:spPr>
-          <a:xfrm>
-            <a:off x="3054096" y="5120640"/>
-            <a:ext cx="3063240" cy="228600"/>
-          </a:xfrm>
-          <a:prstGeom prst="rect">
-            <a:avLst/>
-          </a:prstGeom>
-          <a:noFill/>
-          <a:ln/>
-        </p:spPr>
-        <p:txBody>
-          <a:bodyPr wrap="square" lIns="254" tIns="254" rIns="254" bIns="254" rtlCol="0" anchor="ctr">
-            <a:normAutofit/>
-          </a:bodyPr>
-          <a:lstStyle/>
-          <a:p>
-            <a:pPr algn="ctr" indent="0" marL="0">
-              <a:buNone/>
-            </a:pPr>
-            <a:r>
-              <a:rPr lang="en-US" sz="1020" b="1" dirty="0">
-                <a:solidFill>
-                  <a:srgbClr val="F5F8FC"/>
-                </a:solidFill>
-              </a:rPr>
-              <a:t>Agent step</a:t>
-            </a:r>
-            <a:endParaRPr lang="en-US" sz="1020" dirty="0"/>
-          </a:p>
-        </p:txBody>
-      </p:sp>
-      <p:sp>
-        <p:nvSpPr>
-          <p:cNvPr id="27" name="Shape 25"/>
-          <p:cNvSpPr/>
-          <p:nvPr/>
-        </p:nvSpPr>
-        <p:spPr>
-          <a:xfrm>
-            <a:off x="6446520" y="1572768"/>
-            <a:ext cx="2057400" cy="621792"/>
-          </a:xfrm>
-          <a:prstGeom prst="roundRect">
-            <a:avLst>
-              <a:gd name="adj" fmla="val 10294"/>
-            </a:avLst>
-          </a:prstGeom>
-          <a:solidFill>
-            <a:srgbClr val="10243A"/>
-          </a:solidFill>
-          <a:ln w="15240">
-            <a:solidFill>
-              <a:srgbClr val="FF6B6B"/>
-            </a:solidFill>
-            <a:prstDash val="solid"/>
-          </a:ln>
-        </p:spPr>
-      </p:sp>
-      <p:sp>
-        <p:nvSpPr>
-          <p:cNvPr id="28" name="Text 26"/>
-          <p:cNvSpPr/>
-          <p:nvPr/>
-        </p:nvSpPr>
-        <p:spPr>
-          <a:xfrm>
-            <a:off x="6537960" y="1682496"/>
-            <a:ext cx="1874520" cy="438912"/>
-          </a:xfrm>
-          <a:prstGeom prst="rect">
-            <a:avLst/>
-          </a:prstGeom>
-          <a:noFill/>
-          <a:ln/>
-        </p:spPr>
-        <p:txBody>
-          <a:bodyPr wrap="square" lIns="254" tIns="254" rIns="254" bIns="254" rtlCol="0" anchor="ctr">
-            <a:normAutofit/>
-          </a:bodyPr>
-          <a:lstStyle/>
-          <a:p>
-            <a:pPr algn="ctr" indent="0" marL="0">
-              <a:buNone/>
-            </a:pPr>
-            <a:r>
-              <a:rPr lang="en-US" sz="1100" b="1" dirty="0">
-                <a:solidFill>
-                  <a:srgbClr val="F5F8FC"/>
-                </a:solidFill>
-              </a:rPr>
-              <a:t>Attempt 1</a:t>
-            </a:r>
-            <a:endParaRPr lang="en-US" sz="1100" dirty="0"/>
-          </a:p>
-          <a:p>
-            <a:pPr algn="ctr" indent="0" marL="0">
-              <a:buNone/>
-            </a:pPr>
-            <a:r>
-              <a:rPr lang="en-US" sz="1100" b="1" dirty="0">
-                <a:solidFill>
-                  <a:srgbClr val="F5F8FC"/>
-                </a:solidFill>
-              </a:rPr>
-              <a:t>Primary timeout</a:t>
-            </a:r>
-            <a:endParaRPr lang="en-US" sz="1100" dirty="0"/>
-          </a:p>
-        </p:txBody>
-      </p:sp>
-      <p:sp>
-        <p:nvSpPr>
-          <p:cNvPr id="29" name="Shape 27"/>
-          <p:cNvSpPr/>
-          <p:nvPr/>
-        </p:nvSpPr>
-        <p:spPr>
-          <a:xfrm>
-            <a:off x="9189720" y="1572768"/>
-            <a:ext cx="2057400" cy="621792"/>
-          </a:xfrm>
-          <a:prstGeom prst="roundRect">
-            <a:avLst>
-              <a:gd name="adj" fmla="val 10294"/>
-            </a:avLst>
-          </a:prstGeom>
-          <a:solidFill>
-            <a:srgbClr val="10243A"/>
-          </a:solidFill>
-          <a:ln w="15240">
-            <a:solidFill>
-              <a:srgbClr val="FFBE55"/>
-            </a:solidFill>
-            <a:prstDash val="solid"/>
-          </a:ln>
-        </p:spPr>
-      </p:sp>
-      <p:sp>
-        <p:nvSpPr>
-          <p:cNvPr id="30" name="Text 28"/>
-          <p:cNvSpPr/>
-          <p:nvPr/>
-        </p:nvSpPr>
-        <p:spPr>
-          <a:xfrm>
-            <a:off x="9281160" y="1682496"/>
-            <a:ext cx="1874520" cy="438912"/>
-          </a:xfrm>
-          <a:prstGeom prst="rect">
-            <a:avLst/>
-          </a:prstGeom>
-          <a:noFill/>
-          <a:ln/>
-        </p:spPr>
-        <p:txBody>
-          <a:bodyPr wrap="square" lIns="254" tIns="254" rIns="254" bIns="254" rtlCol="0" anchor="ctr">
-            <a:normAutofit/>
-          </a:bodyPr>
-          <a:lstStyle/>
-          <a:p>
-            <a:pPr algn="ctr" indent="0" marL="0">
-              <a:buNone/>
-            </a:pPr>
-            <a:r>
-              <a:rPr lang="en-US" sz="1100" b="1" dirty="0">
-                <a:solidFill>
-                  <a:srgbClr val="F5F8FC"/>
-                </a:solidFill>
-              </a:rPr>
-              <a:t>Attempt 2</a:t>
-            </a:r>
-            <a:endParaRPr lang="en-US" sz="1100" dirty="0"/>
-          </a:p>
-          <a:p>
-            <a:pPr algn="ctr" indent="0" marL="0">
-              <a:buNone/>
-            </a:pPr>
-            <a:r>
-              <a:rPr lang="en-US" sz="1100" b="1" dirty="0">
-                <a:solidFill>
-                  <a:srgbClr val="F5F8FC"/>
-                </a:solidFill>
-              </a:rPr>
-              <a:t>Retry partial failure</a:t>
-            </a:r>
-            <a:endParaRPr lang="en-US" sz="1100" dirty="0"/>
-          </a:p>
-        </p:txBody>
-      </p:sp>
-      <p:sp>
-        <p:nvSpPr>
-          <p:cNvPr id="31" name="Shape 29"/>
-          <p:cNvSpPr/>
-          <p:nvPr/>
-        </p:nvSpPr>
-        <p:spPr>
-          <a:xfrm>
-            <a:off x="7818120" y="2880360"/>
-            <a:ext cx="2057400" cy="621792"/>
-          </a:xfrm>
-          <a:prstGeom prst="roundRect">
-            <a:avLst>
-              <a:gd name="adj" fmla="val 10294"/>
-            </a:avLst>
-          </a:prstGeom>
-          <a:solidFill>
-            <a:srgbClr val="10243A"/>
-          </a:solidFill>
-          <a:ln w="15240">
-            <a:solidFill>
-              <a:srgbClr val="52D273"/>
-            </a:solidFill>
-            <a:prstDash val="solid"/>
-          </a:ln>
-        </p:spPr>
-      </p:sp>
-      <p:sp>
-        <p:nvSpPr>
-          <p:cNvPr id="32" name="Text 30"/>
-          <p:cNvSpPr/>
-          <p:nvPr/>
-        </p:nvSpPr>
-        <p:spPr>
-          <a:xfrm>
-            <a:off x="7909560" y="2990088"/>
-            <a:ext cx="1874520" cy="438912"/>
-          </a:xfrm>
-          <a:prstGeom prst="rect">
-            <a:avLst/>
-          </a:prstGeom>
-          <a:noFill/>
-          <a:ln/>
-        </p:spPr>
-        <p:txBody>
-          <a:bodyPr wrap="square" lIns="254" tIns="254" rIns="254" bIns="254" rtlCol="0" anchor="ctr">
-            <a:normAutofit/>
-          </a:bodyPr>
-          <a:lstStyle/>
-          <a:p>
-            <a:pPr algn="ctr" indent="0" marL="0">
-              <a:buNone/>
-            </a:pPr>
-            <a:r>
-              <a:rPr lang="en-US" sz="1100" b="1" dirty="0">
-                <a:solidFill>
-                  <a:srgbClr val="F5F8FC"/>
-                </a:solidFill>
-              </a:rPr>
-              <a:t>Attempt 3</a:t>
-            </a:r>
-            <a:endParaRPr lang="en-US" sz="1100" dirty="0"/>
-          </a:p>
-          <a:p>
-            <a:pPr algn="ctr" indent="0" marL="0">
-              <a:buNone/>
-            </a:pPr>
-            <a:r>
-              <a:rPr lang="en-US" sz="1100" b="1" dirty="0">
-                <a:solidFill>
-                  <a:srgbClr val="F5F8FC"/>
-                </a:solidFill>
-              </a:rPr>
-              <a:t>Fallback completed</a:t>
-            </a:r>
-            <a:endParaRPr lang="en-US" sz="1100" dirty="0"/>
-          </a:p>
-        </p:txBody>
-      </p:sp>
-      <p:sp>
-        <p:nvSpPr>
-          <p:cNvPr id="33" name="Shape 31"/>
-          <p:cNvSpPr/>
-          <p:nvPr/>
-        </p:nvSpPr>
-        <p:spPr>
-          <a:xfrm>
-            <a:off x="6208776" y="5221224"/>
-            <a:ext cx="237744" cy="-3346704"/>
-          </a:xfrm>
-          <a:prstGeom prst="line">
-            <a:avLst/>
-          </a:prstGeom>
-          <a:noFill/>
-          <a:ln w="20320">
-            <a:solidFill>
-              <a:srgbClr val="5D8CFF"/>
-            </a:solidFill>
-            <a:prstDash val="solid"/>
-            <a:tailEnd type="triangle"/>
-          </a:ln>
-        </p:spPr>
-      </p:sp>
-      <p:sp>
-        <p:nvSpPr>
-          <p:cNvPr id="34" name="Shape 32"/>
-          <p:cNvSpPr/>
-          <p:nvPr/>
-        </p:nvSpPr>
-        <p:spPr>
-          <a:xfrm>
-            <a:off x="6208776" y="5221224"/>
-            <a:ext cx="2980944" cy="-3346704"/>
-          </a:xfrm>
-          <a:prstGeom prst="line">
-            <a:avLst/>
-          </a:prstGeom>
-          <a:noFill/>
-          <a:ln w="20320">
-            <a:solidFill>
-              <a:srgbClr val="5D8CFF"/>
-            </a:solidFill>
-            <a:prstDash val="solid"/>
-            <a:tailEnd type="triangle"/>
-          </a:ln>
-        </p:spPr>
-      </p:sp>
-      <p:sp>
-        <p:nvSpPr>
-          <p:cNvPr id="35" name="Shape 33"/>
-          <p:cNvSpPr/>
-          <p:nvPr/>
-        </p:nvSpPr>
-        <p:spPr>
-          <a:xfrm>
-            <a:off x="6208776" y="5221224"/>
-            <a:ext cx="1609344" cy="-2039112"/>
-          </a:xfrm>
-          <a:prstGeom prst="line">
-            <a:avLst/>
-          </a:prstGeom>
-          <a:noFill/>
-          <a:ln w="20320">
-            <a:solidFill>
-              <a:srgbClr val="5D8CFF"/>
-            </a:solidFill>
-            <a:prstDash val="solid"/>
-            <a:tailEnd type="triangle"/>
-          </a:ln>
-        </p:spPr>
-      </p:sp>
-      <p:sp>
-        <p:nvSpPr>
-          <p:cNvPr id="36" name="Shape 34"/>
-          <p:cNvSpPr/>
-          <p:nvPr/>
-        </p:nvSpPr>
-        <p:spPr>
-          <a:xfrm>
-            <a:off x="6446520" y="4069080"/>
-            <a:ext cx="4800600" cy="1417320"/>
-          </a:xfrm>
-          <a:prstGeom prst="roundRect">
-            <a:avLst>
-              <a:gd name="adj" fmla="val 5161"/>
+              <a:gd name="adj" fmla="val 1500"/>
             </a:avLst>
           </a:prstGeom>
           <a:solidFill>
@@ -6499,14 +5564,14 @@
       </p:sp>
       <p:sp>
         <p:nvSpPr>
-          <p:cNvPr id="37" name="Shape 35"/>
-          <p:cNvSpPr/>
-          <p:nvPr/>
-        </p:nvSpPr>
-        <p:spPr>
-          <a:xfrm>
-            <a:off x="6446520" y="4069080"/>
-            <a:ext cx="64008" cy="1417320"/>
+          <p:cNvPr id="5" name="Shape 3"/>
+          <p:cNvSpPr/>
+          <p:nvPr/>
+        </p:nvSpPr>
+        <p:spPr>
+          <a:xfrm>
+            <a:off x="594360" y="1371600"/>
+            <a:ext cx="64008" cy="4297680"/>
           </a:xfrm>
           <a:prstGeom prst="rect">
             <a:avLst/>
@@ -6524,14 +5589,14 @@
       </p:sp>
       <p:sp>
         <p:nvSpPr>
-          <p:cNvPr id="38" name="Text 36"/>
-          <p:cNvSpPr/>
-          <p:nvPr/>
-        </p:nvSpPr>
-        <p:spPr>
-          <a:xfrm>
-            <a:off x="6647688" y="4215384"/>
-            <a:ext cx="4480560" cy="292608"/>
+          <p:cNvPr id="6" name="Text 4"/>
+          <p:cNvSpPr/>
+          <p:nvPr/>
+        </p:nvSpPr>
+        <p:spPr>
+          <a:xfrm>
+            <a:off x="795528" y="1517904"/>
+            <a:ext cx="3337560" cy="292608"/>
           </a:xfrm>
           <a:prstGeom prst="rect">
             <a:avLst/>
@@ -6552,7 +5617,7 @@
                   <a:srgbClr val="F5F8FC"/>
                 </a:solidFill>
               </a:rPr>
-              <a:t>Why this matters</a:t>
+              <a:t>BOUND TERMS</a:t>
             </a:r>
             <a:endParaRPr lang="en-US" sz="1300" dirty="0"/>
           </a:p>
@@ -6560,14 +5625,14 @@
       </p:sp>
       <p:sp>
         <p:nvSpPr>
-          <p:cNvPr id="39" name="Text 37"/>
-          <p:cNvSpPr/>
-          <p:nvPr/>
-        </p:nvSpPr>
-        <p:spPr>
-          <a:xfrm>
-            <a:off x="6647688" y="4572000"/>
-            <a:ext cx="4453128" cy="777240"/>
+          <p:cNvPr id="7" name="Text 5"/>
+          <p:cNvSpPr/>
+          <p:nvPr/>
+        </p:nvSpPr>
+        <p:spPr>
+          <a:xfrm>
+            <a:off x="795528" y="1883664"/>
+            <a:ext cx="3291840" cy="3639312"/>
           </a:xfrm>
           <a:prstGeom prst="rect">
             <a:avLst/>
@@ -6585,158 +5650,169 @@
               <a:buNone/>
             </a:pPr>
             <a:r>
-              <a:rPr lang="en-US" sz="1040" dirty="0">
+              <a:rPr lang="en-US" sz="1030" dirty="0">
                 <a:solidFill>
                   <a:srgbClr val="D8E3F0"/>
                 </a:solidFill>
               </a:rPr>
-              <a:t>The final successful answer must not conceal failed or superseded attempts. Cost, latency and compatibility become traceable to product behavior.</a:t>
-            </a:r>
-            <a:endParaRPr lang="en-US" sz="1040" dirty="0"/>
-          </a:p>
-        </p:txBody>
-      </p:sp>
-      <p:sp>
-        <p:nvSpPr>
-          <p:cNvPr id="40" name="Shape 38"/>
-          <p:cNvSpPr/>
-          <p:nvPr/>
-        </p:nvSpPr>
-        <p:spPr>
-          <a:xfrm>
-            <a:off x="6446520" y="5715000"/>
-            <a:ext cx="1508760" cy="329184"/>
+              <a:t>• Grant and Client</a:t>
+            </a:r>
+            <a:endParaRPr lang="en-US" sz="1030" dirty="0"/>
+          </a:p>
+          <a:p>
+            <a:pPr indent="0" marL="0">
+              <a:buNone/>
+            </a:pPr>
+            <a:r>
+              <a:rPr lang="en-US" sz="1030" dirty="0">
+                <a:solidFill>
+                  <a:srgbClr val="D8E3F0"/>
+                </a:solidFill>
+              </a:rPr>
+              <a:t>• Beneficiary</a:t>
+            </a:r>
+            <a:endParaRPr lang="en-US" sz="1030" dirty="0"/>
+          </a:p>
+          <a:p>
+            <a:pPr indent="0" marL="0">
+              <a:buNone/>
+            </a:pPr>
+            <a:r>
+              <a:rPr lang="en-US" sz="1030" dirty="0">
+                <a:solidFill>
+                  <a:srgbClr val="D8E3F0"/>
+                </a:solidFill>
+              </a:rPr>
+              <a:t>• Funding source and payer</a:t>
+            </a:r>
+            <a:endParaRPr lang="en-US" sz="1030" dirty="0"/>
+          </a:p>
+          <a:p>
+            <a:pPr indent="0" marL="0">
+              <a:buNone/>
+            </a:pPr>
+            <a:r>
+              <a:rPr lang="en-US" sz="1030" dirty="0">
+                <a:solidFill>
+                  <a:srgbClr val="D8E3F0"/>
+                </a:solidFill>
+              </a:rPr>
+              <a:t>• Spend ceiling and period</a:t>
+            </a:r>
+            <a:endParaRPr lang="en-US" sz="1030" dirty="0"/>
+          </a:p>
+          <a:p>
+            <a:pPr indent="0" marL="0">
+              <a:buNone/>
+            </a:pPr>
+            <a:r>
+              <a:rPr lang="en-US" sz="1030" dirty="0">
+                <a:solidFill>
+                  <a:srgbClr val="D8E3F0"/>
+                </a:solidFill>
+              </a:rPr>
+              <a:t>• Per-request ceiling</a:t>
+            </a:r>
+            <a:endParaRPr lang="en-US" sz="1030" dirty="0"/>
+          </a:p>
+          <a:p>
+            <a:pPr indent="0" marL="0">
+              <a:buNone/>
+            </a:pPr>
+            <a:r>
+              <a:rPr lang="en-US" sz="1030" dirty="0">
+                <a:solidFill>
+                  <a:srgbClr val="D8E3F0"/>
+                </a:solidFill>
+              </a:rPr>
+              <a:t>• Model and operation scope</a:t>
+            </a:r>
+            <a:endParaRPr lang="en-US" sz="1030" dirty="0"/>
+          </a:p>
+          <a:p>
+            <a:pPr indent="0" marL="0">
+              <a:buNone/>
+            </a:pPr>
+            <a:r>
+              <a:rPr lang="en-US" sz="1030" dirty="0">
+                <a:solidFill>
+                  <a:srgbClr val="D8E3F0"/>
+                </a:solidFill>
+              </a:rPr>
+              <a:t>• Enforceable workload scope</a:t>
+            </a:r>
+            <a:endParaRPr lang="en-US" sz="1030" dirty="0"/>
+          </a:p>
+          <a:p>
+            <a:pPr indent="0" marL="0">
+              <a:buNone/>
+            </a:pPr>
+            <a:r>
+              <a:rPr lang="en-US" sz="1030" dirty="0">
+                <a:solidFill>
+                  <a:srgbClr val="D8E3F0"/>
+                </a:solidFill>
+              </a:rPr>
+              <a:t>• Overage and exhaustion</a:t>
+            </a:r>
+            <a:endParaRPr lang="en-US" sz="1030" dirty="0"/>
+          </a:p>
+          <a:p>
+            <a:pPr indent="0" marL="0">
+              <a:buNone/>
+            </a:pPr>
+            <a:r>
+              <a:rPr lang="en-US" sz="1030" dirty="0">
+                <a:solidFill>
+                  <a:srgbClr val="D8E3F0"/>
+                </a:solidFill>
+              </a:rPr>
+              <a:t>• Effective and expiry times</a:t>
+            </a:r>
+            <a:endParaRPr lang="en-US" sz="1030" dirty="0"/>
+          </a:p>
+        </p:txBody>
+      </p:sp>
+      <p:sp>
+        <p:nvSpPr>
+          <p:cNvPr id="8" name="Shape 6"/>
+          <p:cNvSpPr/>
+          <p:nvPr/>
+        </p:nvSpPr>
+        <p:spPr>
+          <a:xfrm>
+            <a:off x="4526280" y="1371600"/>
+            <a:ext cx="3108960" cy="4297680"/>
           </a:xfrm>
           <a:prstGeom prst="roundRect">
             <a:avLst>
-              <a:gd name="adj" fmla="val 22222"/>
+              <a:gd name="adj" fmla="val 1765"/>
             </a:avLst>
           </a:prstGeom>
           <a:solidFill>
-            <a:srgbClr val="5D8CFF"/>
+            <a:srgbClr val="0D1B2D"/>
           </a:solidFill>
           <a:ln w="12700">
             <a:solidFill>
-              <a:srgbClr val="5D8CFF"/>
-            </a:solidFill>
-            <a:prstDash val="solid"/>
-          </a:ln>
-        </p:spPr>
-      </p:sp>
-      <p:sp>
-        <p:nvSpPr>
-          <p:cNvPr id="41" name="Text 39"/>
-          <p:cNvSpPr/>
-          <p:nvPr/>
-        </p:nvSpPr>
-        <p:spPr>
-          <a:xfrm>
-            <a:off x="6519672" y="5783580"/>
-            <a:ext cx="1362456" cy="164592"/>
-          </a:xfrm>
-          <a:prstGeom prst="rect">
-            <a:avLst/>
-          </a:prstGeom>
-          <a:noFill/>
-          <a:ln/>
-        </p:spPr>
-        <p:txBody>
-          <a:bodyPr wrap="square" lIns="0" tIns="0" rIns="0" bIns="0" rtlCol="0" anchor="ctr"/>
-          <a:lstStyle/>
-          <a:p>
-            <a:pPr algn="ctr" indent="0" marL="0">
-              <a:buNone/>
-            </a:pPr>
-            <a:r>
-              <a:rPr lang="en-US" sz="870" b="1" dirty="0">
-                <a:solidFill>
-                  <a:srgbClr val="FFFFFF"/>
-                </a:solidFill>
-              </a:rPr>
-              <a:t>One logical request</a:t>
-            </a:r>
-            <a:endParaRPr lang="en-US" sz="870" dirty="0"/>
-          </a:p>
-        </p:txBody>
-      </p:sp>
-      <p:sp>
-        <p:nvSpPr>
-          <p:cNvPr id="42" name="Shape 40"/>
-          <p:cNvSpPr/>
-          <p:nvPr/>
-        </p:nvSpPr>
-        <p:spPr>
-          <a:xfrm>
-            <a:off x="8138160" y="5715000"/>
-            <a:ext cx="1700784" cy="329184"/>
-          </a:xfrm>
-          <a:prstGeom prst="roundRect">
-            <a:avLst>
-              <a:gd name="adj" fmla="val 22222"/>
-            </a:avLst>
-          </a:prstGeom>
-          <a:solidFill>
-            <a:srgbClr val="FFBE55"/>
-          </a:solidFill>
-          <a:ln w="12700">
-            <a:solidFill>
-              <a:srgbClr val="FFBE55"/>
-            </a:solidFill>
-            <a:prstDash val="solid"/>
-          </a:ln>
-        </p:spPr>
-      </p:sp>
-      <p:sp>
-        <p:nvSpPr>
-          <p:cNvPr id="43" name="Text 41"/>
-          <p:cNvSpPr/>
-          <p:nvPr/>
-        </p:nvSpPr>
-        <p:spPr>
-          <a:xfrm>
-            <a:off x="8211312" y="5783580"/>
-            <a:ext cx="1554480" cy="164592"/>
-          </a:xfrm>
-          <a:prstGeom prst="rect">
-            <a:avLst/>
-          </a:prstGeom>
-          <a:noFill/>
-          <a:ln/>
-        </p:spPr>
-        <p:txBody>
-          <a:bodyPr wrap="square" lIns="0" tIns="0" rIns="0" bIns="0" rtlCol="0" anchor="ctr"/>
-          <a:lstStyle/>
-          <a:p>
-            <a:pPr algn="ctr" indent="0" marL="0">
-              <a:buNone/>
-            </a:pPr>
-            <a:r>
-              <a:rPr lang="en-US" sz="870" b="1" dirty="0">
-                <a:solidFill>
-                  <a:srgbClr val="FFFFFF"/>
-                </a:solidFill>
-              </a:rPr>
-              <a:t>Several attempts</a:t>
-            </a:r>
-            <a:endParaRPr lang="en-US" sz="870" dirty="0"/>
-          </a:p>
-        </p:txBody>
-      </p:sp>
-      <p:sp>
-        <p:nvSpPr>
-          <p:cNvPr id="44" name="Shape 42"/>
-          <p:cNvSpPr/>
-          <p:nvPr/>
-        </p:nvSpPr>
-        <p:spPr>
-          <a:xfrm>
-            <a:off x="10021824" y="5715000"/>
-            <a:ext cx="1225296" cy="329184"/>
-          </a:xfrm>
-          <a:prstGeom prst="roundRect">
-            <a:avLst>
-              <a:gd name="adj" fmla="val 22222"/>
-            </a:avLst>
+              <a:srgbClr val="244763"/>
+            </a:solidFill>
+            <a:prstDash val="solid"/>
+          </a:ln>
+        </p:spPr>
+      </p:sp>
+      <p:sp>
+        <p:nvSpPr>
+          <p:cNvPr id="9" name="Shape 7"/>
+          <p:cNvSpPr/>
+          <p:nvPr/>
+        </p:nvSpPr>
+        <p:spPr>
+          <a:xfrm>
+            <a:off x="4526280" y="1371600"/>
+            <a:ext cx="64008" cy="4297680"/>
+          </a:xfrm>
+          <a:prstGeom prst="rect">
+            <a:avLst/>
           </a:prstGeom>
           <a:solidFill>
             <a:srgbClr val="52D273"/>
@@ -6751,14 +5827,14 @@
       </p:sp>
       <p:sp>
         <p:nvSpPr>
-          <p:cNvPr id="45" name="Text 43"/>
-          <p:cNvSpPr/>
-          <p:nvPr/>
-        </p:nvSpPr>
-        <p:spPr>
-          <a:xfrm>
-            <a:off x="10094976" y="5783580"/>
-            <a:ext cx="1078992" cy="164592"/>
+          <p:cNvPr id="10" name="Text 8"/>
+          <p:cNvSpPr/>
+          <p:nvPr/>
+        </p:nvSpPr>
+        <p:spPr>
+          <a:xfrm>
+            <a:off x="4727448" y="1517904"/>
+            <a:ext cx="2788920" cy="292608"/>
           </a:xfrm>
           <a:prstGeom prst="rect">
             <a:avLst/>
@@ -6770,18 +5846,472 @@
           <a:bodyPr wrap="square" lIns="0" tIns="0" rIns="0" bIns="0" rtlCol="0" anchor="ctr"/>
           <a:lstStyle/>
           <a:p>
+            <a:pPr indent="0" marL="0">
+              <a:buNone/>
+            </a:pPr>
+            <a:r>
+              <a:rPr lang="en-US" sz="1300" b="1" dirty="0">
+                <a:solidFill>
+                  <a:srgbClr val="F5F8FC"/>
+                </a:solidFill>
+              </a:rPr>
+              <a:t>PRIVACY</a:t>
+            </a:r>
+            <a:endParaRPr lang="en-US" sz="1300" dirty="0"/>
+          </a:p>
+        </p:txBody>
+      </p:sp>
+      <p:sp>
+        <p:nvSpPr>
+          <p:cNvPr id="11" name="Text 9"/>
+          <p:cNvSpPr/>
+          <p:nvPr/>
+        </p:nvSpPr>
+        <p:spPr>
+          <a:xfrm>
+            <a:off x="4727448" y="1883664"/>
+            <a:ext cx="2743200" cy="3639312"/>
+          </a:xfrm>
+          <a:prstGeom prst="rect">
+            <a:avLst/>
+          </a:prstGeom>
+          <a:noFill/>
+          <a:ln/>
+        </p:spPr>
+        <p:txBody>
+          <a:bodyPr wrap="square" lIns="254" tIns="254" rIns="254" bIns="254" rtlCol="0" anchor="t">
+            <a:normAutofit/>
+          </a:bodyPr>
+          <a:lstStyle/>
+          <a:p>
+            <a:pPr indent="0" marL="0">
+              <a:buNone/>
+            </a:pPr>
+            <a:r>
+              <a:rPr lang="en-US" sz="1030" dirty="0">
+                <a:solidFill>
+                  <a:srgbClr val="D8E3F0"/>
+                </a:solidFill>
+              </a:rPr>
+              <a:t>• Sponsor reporting mode</a:t>
+            </a:r>
+            <a:endParaRPr lang="en-US" sz="1030" dirty="0"/>
+          </a:p>
+          <a:p>
+            <a:pPr indent="0" marL="0">
+              <a:buNone/>
+            </a:pPr>
+            <a:r>
+              <a:rPr lang="en-US" sz="1030" dirty="0">
+                <a:solidFill>
+                  <a:srgbClr val="D8E3F0"/>
+                </a:solidFill>
+              </a:rPr>
+              <a:t>• Funding does not grant content access</a:t>
+            </a:r>
+            <a:endParaRPr lang="en-US" sz="1030" dirty="0"/>
+          </a:p>
+          <a:p>
+            <a:pPr indent="0" marL="0">
+              <a:buNone/>
+            </a:pPr>
+            <a:r>
+              <a:rPr lang="en-US" sz="1030" dirty="0">
+                <a:solidFill>
+                  <a:srgbClr val="D8E3F0"/>
+                </a:solidFill>
+              </a:rPr>
+              <a:t>• Identity access is separate</a:t>
+            </a:r>
+            <a:endParaRPr lang="en-US" sz="1030" dirty="0"/>
+          </a:p>
+          <a:p>
+            <a:pPr indent="0" marL="0">
+              <a:buNone/>
+            </a:pPr>
+            <a:r>
+              <a:rPr lang="en-US" sz="1030" dirty="0">
+                <a:solidFill>
+                  <a:srgbClr val="D8E3F0"/>
+                </a:solidFill>
+              </a:rPr>
+              <a:t>• Revocation path</a:t>
+            </a:r>
+            <a:endParaRPr lang="en-US" sz="1030" dirty="0"/>
+          </a:p>
+          <a:p>
+            <a:pPr indent="0" marL="0">
+              <a:buNone/>
+            </a:pPr>
+            <a:r>
+              <a:rPr lang="en-US" sz="1030" dirty="0">
+                <a:solidFill>
+                  <a:srgbClr val="D8E3F0"/>
+                </a:solidFill>
+              </a:rPr>
+              <a:t>• Versioned policy</a:t>
+            </a:r>
+            <a:endParaRPr lang="en-US" sz="1030" dirty="0"/>
+          </a:p>
+          <a:p>
+            <a:pPr indent="0" marL="0">
+              <a:buNone/>
+            </a:pPr>
+            <a:r>
+              <a:rPr lang="en-US" sz="1030" dirty="0">
+                <a:solidFill>
+                  <a:srgbClr val="D8E3F0"/>
+                </a:solidFill>
+              </a:rPr>
+              <a:t>• Immutable receipt digest</a:t>
+            </a:r>
+            <a:endParaRPr lang="en-US" sz="1030" dirty="0"/>
+          </a:p>
+          <a:p>
+            <a:pPr indent="0" marL="0">
+              <a:buNone/>
+            </a:pPr>
+            <a:r>
+              <a:rPr lang="en-US" sz="1030" dirty="0">
+                <a:solidFill>
+                  <a:srgbClr val="D8E3F0"/>
+                </a:solidFill>
+              </a:rPr>
+              <a:t>• Optional Provider signature</a:t>
+            </a:r>
+            <a:endParaRPr lang="en-US" sz="1030" dirty="0"/>
+          </a:p>
+        </p:txBody>
+      </p:sp>
+      <p:sp>
+        <p:nvSpPr>
+          <p:cNvPr id="12" name="Shape 10"/>
+          <p:cNvSpPr/>
+          <p:nvPr/>
+        </p:nvSpPr>
+        <p:spPr>
+          <a:xfrm>
+            <a:off x="8229600" y="1554480"/>
+            <a:ext cx="2926080" cy="658368"/>
+          </a:xfrm>
+          <a:prstGeom prst="roundRect">
+            <a:avLst>
+              <a:gd name="adj" fmla="val 8333"/>
+            </a:avLst>
+          </a:prstGeom>
+          <a:solidFill>
+            <a:srgbClr val="10243A"/>
+          </a:solidFill>
+          <a:ln w="16510">
+            <a:solidFill>
+              <a:srgbClr val="5D8CFF"/>
+            </a:solidFill>
+            <a:prstDash val="solid"/>
+          </a:ln>
+        </p:spPr>
+      </p:sp>
+      <p:sp>
+        <p:nvSpPr>
+          <p:cNvPr id="13" name="Text 11"/>
+          <p:cNvSpPr/>
+          <p:nvPr/>
+        </p:nvSpPr>
+        <p:spPr>
+          <a:xfrm>
+            <a:off x="8321040" y="1627632"/>
+            <a:ext cx="2743200" cy="512064"/>
+          </a:xfrm>
+          <a:prstGeom prst="rect">
+            <a:avLst/>
+          </a:prstGeom>
+          <a:noFill/>
+          <a:ln/>
+        </p:spPr>
+        <p:txBody>
+          <a:bodyPr wrap="square" lIns="254" tIns="254" rIns="254" bIns="254" rtlCol="0" anchor="ctr">
+            <a:normAutofit/>
+          </a:bodyPr>
+          <a:lstStyle/>
+          <a:p>
             <a:pPr algn="ctr" indent="0" marL="0">
               <a:buNone/>
             </a:pPr>
             <a:r>
-              <a:rPr lang="en-US" sz="870" b="1" dirty="0">
-                <a:solidFill>
-                  <a:srgbClr val="FFFFFF"/>
-                </a:solidFill>
-              </a:rPr>
-              <a:t>One audit trail</a:t>
-            </a:r>
-            <a:endParaRPr lang="en-US" sz="870" dirty="0"/>
+              <a:rPr lang="en-US" sz="1300" b="1" dirty="0">
+                <a:solidFill>
+                  <a:srgbClr val="F5F8FC"/>
+                </a:solidFill>
+              </a:rPr>
+              <a:t>Provider displays terms</a:t>
+            </a:r>
+            <a:endParaRPr lang="en-US" sz="1300" dirty="0"/>
+          </a:p>
+        </p:txBody>
+      </p:sp>
+      <p:sp>
+        <p:nvSpPr>
+          <p:cNvPr id="14" name="Shape 12"/>
+          <p:cNvSpPr/>
+          <p:nvPr/>
+        </p:nvSpPr>
+        <p:spPr>
+          <a:xfrm>
+            <a:off x="9692640" y="2212848"/>
+            <a:ext cx="0" cy="393192"/>
+          </a:xfrm>
+          <a:prstGeom prst="line">
+            <a:avLst/>
+          </a:prstGeom>
+          <a:noFill/>
+          <a:ln w="25400">
+            <a:solidFill>
+              <a:srgbClr val="35D0E6"/>
+            </a:solidFill>
+            <a:prstDash val="solid"/>
+            <a:tailEnd type="triangle"/>
+          </a:ln>
+        </p:spPr>
+      </p:sp>
+      <p:sp>
+        <p:nvSpPr>
+          <p:cNvPr id="15" name="Shape 13"/>
+          <p:cNvSpPr/>
+          <p:nvPr/>
+        </p:nvSpPr>
+        <p:spPr>
+          <a:xfrm>
+            <a:off x="8229600" y="2633472"/>
+            <a:ext cx="2926080" cy="658368"/>
+          </a:xfrm>
+          <a:prstGeom prst="roundRect">
+            <a:avLst>
+              <a:gd name="adj" fmla="val 8333"/>
+            </a:avLst>
+          </a:prstGeom>
+          <a:solidFill>
+            <a:srgbClr val="10243A"/>
+          </a:solidFill>
+          <a:ln w="16510">
+            <a:solidFill>
+              <a:srgbClr val="35D0E6"/>
+            </a:solidFill>
+            <a:prstDash val="solid"/>
+          </a:ln>
+        </p:spPr>
+      </p:sp>
+      <p:sp>
+        <p:nvSpPr>
+          <p:cNvPr id="16" name="Text 14"/>
+          <p:cNvSpPr/>
+          <p:nvPr/>
+        </p:nvSpPr>
+        <p:spPr>
+          <a:xfrm>
+            <a:off x="8321040" y="2706624"/>
+            <a:ext cx="2743200" cy="512064"/>
+          </a:xfrm>
+          <a:prstGeom prst="rect">
+            <a:avLst/>
+          </a:prstGeom>
+          <a:noFill/>
+          <a:ln/>
+        </p:spPr>
+        <p:txBody>
+          <a:bodyPr wrap="square" lIns="254" tIns="254" rIns="254" bIns="254" rtlCol="0" anchor="ctr">
+            <a:normAutofit/>
+          </a:bodyPr>
+          <a:lstStyle/>
+          <a:p>
+            <a:pPr algn="ctr" indent="0" marL="0">
+              <a:buNone/>
+            </a:pPr>
+            <a:r>
+              <a:rPr lang="en-US" sz="1300" b="1" dirty="0">
+                <a:solidFill>
+                  <a:srgbClr val="F5F8FC"/>
+                </a:solidFill>
+              </a:rPr>
+              <a:t>User approves or reduces</a:t>
+            </a:r>
+            <a:endParaRPr lang="en-US" sz="1300" dirty="0"/>
+          </a:p>
+        </p:txBody>
+      </p:sp>
+      <p:sp>
+        <p:nvSpPr>
+          <p:cNvPr id="17" name="Shape 15"/>
+          <p:cNvSpPr/>
+          <p:nvPr/>
+        </p:nvSpPr>
+        <p:spPr>
+          <a:xfrm>
+            <a:off x="9692640" y="3291840"/>
+            <a:ext cx="0" cy="393192"/>
+          </a:xfrm>
+          <a:prstGeom prst="line">
+            <a:avLst/>
+          </a:prstGeom>
+          <a:noFill/>
+          <a:ln w="25400">
+            <a:solidFill>
+              <a:srgbClr val="35D0E6"/>
+            </a:solidFill>
+            <a:prstDash val="solid"/>
+            <a:tailEnd type="triangle"/>
+          </a:ln>
+        </p:spPr>
+      </p:sp>
+      <p:sp>
+        <p:nvSpPr>
+          <p:cNvPr id="18" name="Shape 16"/>
+          <p:cNvSpPr/>
+          <p:nvPr/>
+        </p:nvSpPr>
+        <p:spPr>
+          <a:xfrm>
+            <a:off x="8229600" y="3712464"/>
+            <a:ext cx="2926080" cy="658368"/>
+          </a:xfrm>
+          <a:prstGeom prst="roundRect">
+            <a:avLst>
+              <a:gd name="adj" fmla="val 8333"/>
+            </a:avLst>
+          </a:prstGeom>
+          <a:solidFill>
+            <a:srgbClr val="10243A"/>
+          </a:solidFill>
+          <a:ln w="16510">
+            <a:solidFill>
+              <a:srgbClr val="52D273"/>
+            </a:solidFill>
+            <a:prstDash val="solid"/>
+          </a:ln>
+        </p:spPr>
+      </p:sp>
+      <p:sp>
+        <p:nvSpPr>
+          <p:cNvPr id="19" name="Text 17"/>
+          <p:cNvSpPr/>
+          <p:nvPr/>
+        </p:nvSpPr>
+        <p:spPr>
+          <a:xfrm>
+            <a:off x="8321040" y="3785616"/>
+            <a:ext cx="2743200" cy="512064"/>
+          </a:xfrm>
+          <a:prstGeom prst="rect">
+            <a:avLst/>
+          </a:prstGeom>
+          <a:noFill/>
+          <a:ln/>
+        </p:spPr>
+        <p:txBody>
+          <a:bodyPr wrap="square" lIns="254" tIns="254" rIns="254" bIns="254" rtlCol="0" anchor="ctr">
+            <a:normAutofit/>
+          </a:bodyPr>
+          <a:lstStyle/>
+          <a:p>
+            <a:pPr algn="ctr" indent="0" marL="0">
+              <a:buNone/>
+            </a:pPr>
+            <a:r>
+              <a:rPr lang="en-US" sz="1300" b="1" dirty="0">
+                <a:solidFill>
+                  <a:srgbClr val="F5F8FC"/>
+                </a:solidFill>
+              </a:rPr>
+              <a:t>Receipt is issued</a:t>
+            </a:r>
+            <a:endParaRPr lang="en-US" sz="1300" dirty="0"/>
+          </a:p>
+        </p:txBody>
+      </p:sp>
+      <p:sp>
+        <p:nvSpPr>
+          <p:cNvPr id="20" name="Shape 18"/>
+          <p:cNvSpPr/>
+          <p:nvPr/>
+        </p:nvSpPr>
+        <p:spPr>
+          <a:xfrm>
+            <a:off x="9692640" y="4370832"/>
+            <a:ext cx="0" cy="393192"/>
+          </a:xfrm>
+          <a:prstGeom prst="line">
+            <a:avLst/>
+          </a:prstGeom>
+          <a:noFill/>
+          <a:ln w="25400">
+            <a:solidFill>
+              <a:srgbClr val="35D0E6"/>
+            </a:solidFill>
+            <a:prstDash val="solid"/>
+            <a:tailEnd type="triangle"/>
+          </a:ln>
+        </p:spPr>
+      </p:sp>
+      <p:sp>
+        <p:nvSpPr>
+          <p:cNvPr id="21" name="Shape 19"/>
+          <p:cNvSpPr/>
+          <p:nvPr/>
+        </p:nvSpPr>
+        <p:spPr>
+          <a:xfrm>
+            <a:off x="8229600" y="4791456"/>
+            <a:ext cx="2926080" cy="658368"/>
+          </a:xfrm>
+          <a:prstGeom prst="roundRect">
+            <a:avLst>
+              <a:gd name="adj" fmla="val 8333"/>
+            </a:avLst>
+          </a:prstGeom>
+          <a:solidFill>
+            <a:srgbClr val="10243A"/>
+          </a:solidFill>
+          <a:ln w="16510">
+            <a:solidFill>
+              <a:srgbClr val="FFBE55"/>
+            </a:solidFill>
+            <a:prstDash val="solid"/>
+          </a:ln>
+        </p:spPr>
+      </p:sp>
+      <p:sp>
+        <p:nvSpPr>
+          <p:cNvPr id="22" name="Text 20"/>
+          <p:cNvSpPr/>
+          <p:nvPr/>
+        </p:nvSpPr>
+        <p:spPr>
+          <a:xfrm>
+            <a:off x="8321040" y="4864608"/>
+            <a:ext cx="2743200" cy="512064"/>
+          </a:xfrm>
+          <a:prstGeom prst="rect">
+            <a:avLst/>
+          </a:prstGeom>
+          <a:noFill/>
+          <a:ln/>
+        </p:spPr>
+        <p:txBody>
+          <a:bodyPr wrap="square" lIns="254" tIns="254" rIns="254" bIns="254" rtlCol="0" anchor="ctr">
+            <a:normAutofit/>
+          </a:bodyPr>
+          <a:lstStyle/>
+          <a:p>
+            <a:pPr algn="ctr" indent="0" marL="0">
+              <a:buNone/>
+            </a:pPr>
+            <a:r>
+              <a:rPr lang="en-US" sz="1300" b="1" dirty="0">
+                <a:solidFill>
+                  <a:srgbClr val="F5F8FC"/>
+                </a:solidFill>
+              </a:rPr>
+              <a:t>Grant binds receipt</a:t>
+            </a:r>
+            <a:endParaRPr lang="en-US" sz="1300" dirty="0"/>
           </a:p>
         </p:txBody>
       </p:sp>
@@ -6887,11 +6417,8 @@
                 <a:solidFill>
                   <a:srgbClr val="F5F8FC"/>
                 </a:solidFill>
-                <a:latin typeface="Arial" pitchFamily="34" charset="0"/>
-                <a:ea typeface="Arial" pitchFamily="34" charset="-122"/>
-                <a:cs typeface="Arial" pitchFamily="34" charset="-120"/>
-              </a:rPr>
-              <a:t>Reservation and settlement</a:t>
+              </a:rPr>
+              <a:t>One reservation, many child events, one settlement</a:t>
             </a:r>
             <a:endParaRPr lang="en-US" sz="2500" dirty="0"/>
           </a:p>
@@ -6906,7 +6433,7 @@
         <p:spPr>
           <a:xfrm>
             <a:off x="612648" y="932688"/>
-            <a:ext cx="10789920" cy="329184"/>
+            <a:ext cx="10789920" cy="310896"/>
           </a:xfrm>
           <a:prstGeom prst="rect">
             <a:avLst/>
@@ -6926,11 +6453,8 @@
                 <a:solidFill>
                   <a:srgbClr val="8FA7C0"/>
                 </a:solidFill>
-                <a:latin typeface="Arial" pitchFamily="34" charset="0"/>
-                <a:ea typeface="Arial" pitchFamily="34" charset="-122"/>
-                <a:cs typeface="Arial" pitchFamily="34" charset="-120"/>
-              </a:rPr>
-              <a:t>Variable-cost execution is bounded before work begins and reconciled after usage is known.</a:t>
+              </a:rPr>
+              <a:t>Failed attempts remain visible without creating duplicate charges.</a:t>
             </a:r>
             <a:endParaRPr lang="en-US" sz="1150" dirty="0"/>
           </a:p>
@@ -6944,20 +6468,20 @@
         </p:nvSpPr>
         <p:spPr>
           <a:xfrm>
-            <a:off x="502920" y="1417320"/>
-            <a:ext cx="1508760" cy="621792"/>
+            <a:off x="4343400" y="1234440"/>
+            <a:ext cx="3474720" cy="658368"/>
           </a:xfrm>
           <a:prstGeom prst="roundRect">
             <a:avLst>
-              <a:gd name="adj" fmla="val 10294"/>
+              <a:gd name="adj" fmla="val 8333"/>
             </a:avLst>
           </a:prstGeom>
           <a:solidFill>
             <a:srgbClr val="10243A"/>
           </a:solidFill>
-          <a:ln w="15240">
-            <a:solidFill>
-              <a:srgbClr val="5D8CFF"/>
+          <a:ln w="16510">
+            <a:solidFill>
+              <a:srgbClr val="FFBE55"/>
             </a:solidFill>
             <a:prstDash val="solid"/>
           </a:ln>
@@ -6971,8 +6495,8 @@
         </p:nvSpPr>
         <p:spPr>
           <a:xfrm>
-            <a:off x="594360" y="1527048"/>
-            <a:ext cx="1325880" cy="438912"/>
+            <a:off x="4434840" y="1307592"/>
+            <a:ext cx="3291840" cy="512064"/>
           </a:xfrm>
           <a:prstGeom prst="rect">
             <a:avLst/>
@@ -6990,14 +6514,14 @@
               <a:buNone/>
             </a:pPr>
             <a:r>
-              <a:rPr lang="en-US" sz="1200" b="1" dirty="0">
+              <a:rPr lang="en-US" sz="1600" b="1" dirty="0">
                 <a:solidFill>
                   <a:srgbClr val="F5F8FC"/>
                 </a:solidFill>
               </a:rPr>
-              <a:t>Authorize</a:t>
-            </a:r>
-            <a:endParaRPr lang="en-US" sz="1200" dirty="0"/>
+              <a:t>Run-level Reservation</a:t>
+            </a:r>
+            <a:endParaRPr lang="en-US" sz="1600" dirty="0"/>
           </a:p>
         </p:txBody>
       </p:sp>
@@ -7009,59 +6533,35 @@
         </p:nvSpPr>
         <p:spPr>
           <a:xfrm>
-            <a:off x="2011680" y="1728216"/>
-            <a:ext cx="347472" cy="0"/>
-          </a:xfrm>
-          <a:prstGeom prst="line">
-            <a:avLst/>
-          </a:prstGeom>
-          <a:noFill/>
-          <a:ln w="19050">
-            <a:solidFill>
-              <a:srgbClr val="8FA7C0"/>
-            </a:solidFill>
-            <a:prstDash val="solid"/>
-            <a:tailEnd type="triangle"/>
-          </a:ln>
-        </p:spPr>
-      </p:sp>
-      <p:sp>
-        <p:nvSpPr>
-          <p:cNvPr id="7" name="Shape 5"/>
-          <p:cNvSpPr/>
-          <p:nvPr/>
-        </p:nvSpPr>
-        <p:spPr>
-          <a:xfrm>
-            <a:off x="2404872" y="1417320"/>
-            <a:ext cx="1508760" cy="621792"/>
+            <a:off x="685800" y="2743200"/>
+            <a:ext cx="2240280" cy="777240"/>
           </a:xfrm>
           <a:prstGeom prst="roundRect">
             <a:avLst>
-              <a:gd name="adj" fmla="val 10294"/>
+              <a:gd name="adj" fmla="val 7059"/>
             </a:avLst>
           </a:prstGeom>
           <a:solidFill>
             <a:srgbClr val="10243A"/>
           </a:solidFill>
-          <a:ln w="15240">
-            <a:solidFill>
-              <a:srgbClr val="35D0E6"/>
-            </a:solidFill>
-            <a:prstDash val="solid"/>
-          </a:ln>
-        </p:spPr>
-      </p:sp>
-      <p:sp>
-        <p:nvSpPr>
-          <p:cNvPr id="8" name="Text 6"/>
-          <p:cNvSpPr/>
-          <p:nvPr/>
-        </p:nvSpPr>
-        <p:spPr>
-          <a:xfrm>
-            <a:off x="2496312" y="1527048"/>
-            <a:ext cx="1325880" cy="438912"/>
+          <a:ln w="16510">
+            <a:solidFill>
+              <a:srgbClr val="FF6B6B"/>
+            </a:solidFill>
+            <a:prstDash val="solid"/>
+          </a:ln>
+        </p:spPr>
+      </p:sp>
+      <p:sp>
+        <p:nvSpPr>
+          <p:cNvPr id="7" name="Text 5"/>
+          <p:cNvSpPr/>
+          <p:nvPr/>
+        </p:nvSpPr>
+        <p:spPr>
+          <a:xfrm>
+            <a:off x="777240" y="2816352"/>
+            <a:ext cx="2057400" cy="630936"/>
           </a:xfrm>
           <a:prstGeom prst="rect">
             <a:avLst/>
@@ -7079,16 +6579,54 @@
               <a:buNone/>
             </a:pPr>
             <a:r>
-              <a:rPr lang="en-US" sz="1200" b="1" dirty="0">
+              <a:rPr lang="en-US" sz="1100" b="1" dirty="0">
                 <a:solidFill>
                   <a:srgbClr val="F5F8FC"/>
                 </a:solidFill>
               </a:rPr>
-              <a:t>Estimate</a:t>
-            </a:r>
-            <a:endParaRPr lang="en-US" sz="1200" dirty="0"/>
-          </a:p>
-        </p:txBody>
+              <a:t>Agent step 1</a:t>
+            </a:r>
+            <a:endParaRPr lang="en-US" sz="1100" dirty="0"/>
+          </a:p>
+          <a:p>
+            <a:pPr algn="ctr" indent="0" marL="0">
+              <a:buNone/>
+            </a:pPr>
+            <a:r>
+              <a:rPr lang="en-US" sz="1100" b="1" dirty="0">
+                <a:solidFill>
+                  <a:srgbClr val="F5F8FC"/>
+                </a:solidFill>
+              </a:rPr>
+              <a:t>Primary attempt</a:t>
+            </a:r>
+            <a:endParaRPr lang="en-US" sz="1100" dirty="0"/>
+          </a:p>
+        </p:txBody>
+      </p:sp>
+      <p:sp>
+        <p:nvSpPr>
+          <p:cNvPr id="8" name="Shape 6"/>
+          <p:cNvSpPr/>
+          <p:nvPr/>
+        </p:nvSpPr>
+        <p:spPr>
+          <a:xfrm>
+            <a:off x="6080760" y="1892808"/>
+            <a:ext cx="-4279392" cy="813816"/>
+          </a:xfrm>
+          <a:prstGeom prst="line">
+            <a:avLst/>
+          </a:prstGeom>
+          <a:noFill/>
+          <a:ln w="19050">
+            <a:solidFill>
+              <a:srgbClr val="FF6B6B"/>
+            </a:solidFill>
+            <a:prstDash val="solid"/>
+            <a:tailEnd type="triangle"/>
+          </a:ln>
+        </p:spPr>
       </p:sp>
       <p:sp>
         <p:nvSpPr>
@@ -7098,42 +6636,18 @@
         </p:nvSpPr>
         <p:spPr>
           <a:xfrm>
-            <a:off x="3913632" y="1728216"/>
-            <a:ext cx="347472" cy="0"/>
-          </a:xfrm>
-          <a:prstGeom prst="line">
-            <a:avLst/>
-          </a:prstGeom>
-          <a:noFill/>
-          <a:ln w="19050">
-            <a:solidFill>
-              <a:srgbClr val="8FA7C0"/>
-            </a:solidFill>
-            <a:prstDash val="solid"/>
-            <a:tailEnd type="triangle"/>
-          </a:ln>
-        </p:spPr>
-      </p:sp>
-      <p:sp>
-        <p:nvSpPr>
-          <p:cNvPr id="10" name="Shape 8"/>
-          <p:cNvSpPr/>
-          <p:nvPr/>
-        </p:nvSpPr>
-        <p:spPr>
-          <a:xfrm>
-            <a:off x="4306824" y="1417320"/>
-            <a:ext cx="1508760" cy="621792"/>
+            <a:off x="3520440" y="2743200"/>
+            <a:ext cx="2240280" cy="777240"/>
           </a:xfrm>
           <a:prstGeom prst="roundRect">
             <a:avLst>
-              <a:gd name="adj" fmla="val 10294"/>
+              <a:gd name="adj" fmla="val 7059"/>
             </a:avLst>
           </a:prstGeom>
           <a:solidFill>
             <a:srgbClr val="10243A"/>
           </a:solidFill>
-          <a:ln w="15240">
+          <a:ln w="16510">
             <a:solidFill>
               <a:srgbClr val="FFBE55"/>
             </a:solidFill>
@@ -7143,14 +6657,14 @@
       </p:sp>
       <p:sp>
         <p:nvSpPr>
-          <p:cNvPr id="11" name="Text 9"/>
-          <p:cNvSpPr/>
-          <p:nvPr/>
-        </p:nvSpPr>
-        <p:spPr>
-          <a:xfrm>
-            <a:off x="4398264" y="1527048"/>
-            <a:ext cx="1325880" cy="438912"/>
+          <p:cNvPr id="10" name="Text 8"/>
+          <p:cNvSpPr/>
+          <p:nvPr/>
+        </p:nvSpPr>
+        <p:spPr>
+          <a:xfrm>
+            <a:off x="3611880" y="2816352"/>
+            <a:ext cx="2057400" cy="630936"/>
           </a:xfrm>
           <a:prstGeom prst="rect">
             <a:avLst/>
@@ -7168,16 +6682,54 @@
               <a:buNone/>
             </a:pPr>
             <a:r>
-              <a:rPr lang="en-US" sz="1200" b="1" dirty="0">
+              <a:rPr lang="en-US" sz="1100" b="1" dirty="0">
                 <a:solidFill>
                   <a:srgbClr val="F5F8FC"/>
                 </a:solidFill>
               </a:rPr>
-              <a:t>Reserve</a:t>
-            </a:r>
-            <a:endParaRPr lang="en-US" sz="1200" dirty="0"/>
-          </a:p>
-        </p:txBody>
+              <a:t>Agent step 1</a:t>
+            </a:r>
+            <a:endParaRPr lang="en-US" sz="1100" dirty="0"/>
+          </a:p>
+          <a:p>
+            <a:pPr algn="ctr" indent="0" marL="0">
+              <a:buNone/>
+            </a:pPr>
+            <a:r>
+              <a:rPr lang="en-US" sz="1100" b="1" dirty="0">
+                <a:solidFill>
+                  <a:srgbClr val="F5F8FC"/>
+                </a:solidFill>
+              </a:rPr>
+              <a:t>Retry</a:t>
+            </a:r>
+            <a:endParaRPr lang="en-US" sz="1100" dirty="0"/>
+          </a:p>
+        </p:txBody>
+      </p:sp>
+      <p:sp>
+        <p:nvSpPr>
+          <p:cNvPr id="11" name="Shape 9"/>
+          <p:cNvSpPr/>
+          <p:nvPr/>
+        </p:nvSpPr>
+        <p:spPr>
+          <a:xfrm>
+            <a:off x="6080760" y="1892808"/>
+            <a:ext cx="-1444752" cy="813816"/>
+          </a:xfrm>
+          <a:prstGeom prst="line">
+            <a:avLst/>
+          </a:prstGeom>
+          <a:noFill/>
+          <a:ln w="19050">
+            <a:solidFill>
+              <a:srgbClr val="FFBE55"/>
+            </a:solidFill>
+            <a:prstDash val="solid"/>
+            <a:tailEnd type="triangle"/>
+          </a:ln>
+        </p:spPr>
       </p:sp>
       <p:sp>
         <p:nvSpPr>
@@ -7187,42 +6739,18 @@
         </p:nvSpPr>
         <p:spPr>
           <a:xfrm>
-            <a:off x="5815584" y="1728216"/>
-            <a:ext cx="347472" cy="0"/>
-          </a:xfrm>
-          <a:prstGeom prst="line">
-            <a:avLst/>
-          </a:prstGeom>
-          <a:noFill/>
-          <a:ln w="19050">
-            <a:solidFill>
-              <a:srgbClr val="8FA7C0"/>
-            </a:solidFill>
-            <a:prstDash val="solid"/>
-            <a:tailEnd type="triangle"/>
-          </a:ln>
-        </p:spPr>
-      </p:sp>
-      <p:sp>
-        <p:nvSpPr>
-          <p:cNvPr id="13" name="Shape 11"/>
-          <p:cNvSpPr/>
-          <p:nvPr/>
-        </p:nvSpPr>
-        <p:spPr>
-          <a:xfrm>
-            <a:off x="6208776" y="1417320"/>
-            <a:ext cx="1508760" cy="621792"/>
+            <a:off x="6355080" y="2743200"/>
+            <a:ext cx="2240280" cy="777240"/>
           </a:xfrm>
           <a:prstGeom prst="roundRect">
             <a:avLst>
-              <a:gd name="adj" fmla="val 10294"/>
+              <a:gd name="adj" fmla="val 7059"/>
             </a:avLst>
           </a:prstGeom>
           <a:solidFill>
             <a:srgbClr val="10243A"/>
           </a:solidFill>
-          <a:ln w="15240">
+          <a:ln w="16510">
             <a:solidFill>
               <a:srgbClr val="52D273"/>
             </a:solidFill>
@@ -7232,14 +6760,14 @@
       </p:sp>
       <p:sp>
         <p:nvSpPr>
-          <p:cNvPr id="14" name="Text 12"/>
-          <p:cNvSpPr/>
-          <p:nvPr/>
-        </p:nvSpPr>
-        <p:spPr>
-          <a:xfrm>
-            <a:off x="6300216" y="1527048"/>
-            <a:ext cx="1325880" cy="438912"/>
+          <p:cNvPr id="13" name="Text 11"/>
+          <p:cNvSpPr/>
+          <p:nvPr/>
+        </p:nvSpPr>
+        <p:spPr>
+          <a:xfrm>
+            <a:off x="6446520" y="2816352"/>
+            <a:ext cx="2057400" cy="630936"/>
           </a:xfrm>
           <a:prstGeom prst="rect">
             <a:avLst/>
@@ -7257,16 +6785,54 @@
               <a:buNone/>
             </a:pPr>
             <a:r>
-              <a:rPr lang="en-US" sz="1200" b="1" dirty="0">
+              <a:rPr lang="en-US" sz="1100" b="1" dirty="0">
                 <a:solidFill>
                   <a:srgbClr val="F5F8FC"/>
                 </a:solidFill>
               </a:rPr>
-              <a:t>Execute</a:t>
-            </a:r>
-            <a:endParaRPr lang="en-US" sz="1200" dirty="0"/>
-          </a:p>
-        </p:txBody>
+              <a:t>Agent step 2</a:t>
+            </a:r>
+            <a:endParaRPr lang="en-US" sz="1100" dirty="0"/>
+          </a:p>
+          <a:p>
+            <a:pPr algn="ctr" indent="0" marL="0">
+              <a:buNone/>
+            </a:pPr>
+            <a:r>
+              <a:rPr lang="en-US" sz="1100" b="1" dirty="0">
+                <a:solidFill>
+                  <a:srgbClr val="F5F8FC"/>
+                </a:solidFill>
+              </a:rPr>
+              <a:t>Fallback</a:t>
+            </a:r>
+            <a:endParaRPr lang="en-US" sz="1100" dirty="0"/>
+          </a:p>
+        </p:txBody>
+      </p:sp>
+      <p:sp>
+        <p:nvSpPr>
+          <p:cNvPr id="14" name="Shape 12"/>
+          <p:cNvSpPr/>
+          <p:nvPr/>
+        </p:nvSpPr>
+        <p:spPr>
+          <a:xfrm>
+            <a:off x="6080760" y="1892808"/>
+            <a:ext cx="1389888" cy="813816"/>
+          </a:xfrm>
+          <a:prstGeom prst="line">
+            <a:avLst/>
+          </a:prstGeom>
+          <a:noFill/>
+          <a:ln w="19050">
+            <a:solidFill>
+              <a:srgbClr val="52D273"/>
+            </a:solidFill>
+            <a:prstDash val="solid"/>
+            <a:tailEnd type="triangle"/>
+          </a:ln>
+        </p:spPr>
       </p:sp>
       <p:sp>
         <p:nvSpPr>
@@ -7276,42 +6842,18 @@
         </p:nvSpPr>
         <p:spPr>
           <a:xfrm>
-            <a:off x="7717536" y="1728216"/>
-            <a:ext cx="347472" cy="0"/>
-          </a:xfrm>
-          <a:prstGeom prst="line">
-            <a:avLst/>
-          </a:prstGeom>
-          <a:noFill/>
-          <a:ln w="19050">
-            <a:solidFill>
-              <a:srgbClr val="8FA7C0"/>
-            </a:solidFill>
-            <a:prstDash val="solid"/>
-            <a:tailEnd type="triangle"/>
-          </a:ln>
-        </p:spPr>
-      </p:sp>
-      <p:sp>
-        <p:nvSpPr>
-          <p:cNvPr id="16" name="Shape 14"/>
-          <p:cNvSpPr/>
-          <p:nvPr/>
-        </p:nvSpPr>
-        <p:spPr>
-          <a:xfrm>
-            <a:off x="8110728" y="1417320"/>
-            <a:ext cx="1508760" cy="621792"/>
+            <a:off x="9189720" y="2743200"/>
+            <a:ext cx="2240280" cy="777240"/>
           </a:xfrm>
           <a:prstGeom prst="roundRect">
             <a:avLst>
-              <a:gd name="adj" fmla="val 10294"/>
+              <a:gd name="adj" fmla="val 7059"/>
             </a:avLst>
           </a:prstGeom>
           <a:solidFill>
             <a:srgbClr val="10243A"/>
           </a:solidFill>
-          <a:ln w="15240">
+          <a:ln w="16510">
             <a:solidFill>
               <a:srgbClr val="5D8CFF"/>
             </a:solidFill>
@@ -7321,14 +6863,14 @@
       </p:sp>
       <p:sp>
         <p:nvSpPr>
-          <p:cNvPr id="17" name="Text 15"/>
-          <p:cNvSpPr/>
-          <p:nvPr/>
-        </p:nvSpPr>
-        <p:spPr>
-          <a:xfrm>
-            <a:off x="8202168" y="1527048"/>
-            <a:ext cx="1325880" cy="438912"/>
+          <p:cNvPr id="16" name="Text 14"/>
+          <p:cNvSpPr/>
+          <p:nvPr/>
+        </p:nvSpPr>
+        <p:spPr>
+          <a:xfrm>
+            <a:off x="9281160" y="2816352"/>
+            <a:ext cx="2057400" cy="630936"/>
           </a:xfrm>
           <a:prstGeom prst="rect">
             <a:avLst/>
@@ -7346,16 +6888,54 @@
               <a:buNone/>
             </a:pPr>
             <a:r>
-              <a:rPr lang="en-US" sz="1200" b="1" dirty="0">
+              <a:rPr lang="en-US" sz="1100" b="1" dirty="0">
                 <a:solidFill>
                   <a:srgbClr val="F5F8FC"/>
                 </a:solidFill>
               </a:rPr>
-              <a:t>Settle</a:t>
-            </a:r>
-            <a:endParaRPr lang="en-US" sz="1200" dirty="0"/>
-          </a:p>
-        </p:txBody>
+              <a:t>Tool / safety</a:t>
+            </a:r>
+            <a:endParaRPr lang="en-US" sz="1100" dirty="0"/>
+          </a:p>
+          <a:p>
+            <a:pPr algn="ctr" indent="0" marL="0">
+              <a:buNone/>
+            </a:pPr>
+            <a:r>
+              <a:rPr lang="en-US" sz="1100" b="1" dirty="0">
+                <a:solidFill>
+                  <a:srgbClr val="F5F8FC"/>
+                </a:solidFill>
+              </a:rPr>
+              <a:t>child call</a:t>
+            </a:r>
+            <a:endParaRPr lang="en-US" sz="1100" dirty="0"/>
+          </a:p>
+        </p:txBody>
+      </p:sp>
+      <p:sp>
+        <p:nvSpPr>
+          <p:cNvPr id="17" name="Shape 15"/>
+          <p:cNvSpPr/>
+          <p:nvPr/>
+        </p:nvSpPr>
+        <p:spPr>
+          <a:xfrm>
+            <a:off x="6080760" y="1892808"/>
+            <a:ext cx="4224528" cy="813816"/>
+          </a:xfrm>
+          <a:prstGeom prst="line">
+            <a:avLst/>
+          </a:prstGeom>
+          <a:noFill/>
+          <a:ln w="19050">
+            <a:solidFill>
+              <a:srgbClr val="5D8CFF"/>
+            </a:solidFill>
+            <a:prstDash val="solid"/>
+            <a:tailEnd type="triangle"/>
+          </a:ln>
+        </p:spPr>
       </p:sp>
       <p:sp>
         <p:nvSpPr>
@@ -7365,59 +6945,35 @@
         </p:nvSpPr>
         <p:spPr>
           <a:xfrm>
-            <a:off x="9619488" y="1728216"/>
-            <a:ext cx="347472" cy="0"/>
-          </a:xfrm>
-          <a:prstGeom prst="line">
-            <a:avLst/>
-          </a:prstGeom>
-          <a:noFill/>
-          <a:ln w="19050">
-            <a:solidFill>
-              <a:srgbClr val="8FA7C0"/>
-            </a:solidFill>
-            <a:prstDash val="solid"/>
-            <a:tailEnd type="triangle"/>
-          </a:ln>
-        </p:spPr>
-      </p:sp>
-      <p:sp>
-        <p:nvSpPr>
-          <p:cNvPr id="19" name="Shape 17"/>
-          <p:cNvSpPr/>
-          <p:nvPr/>
-        </p:nvSpPr>
-        <p:spPr>
-          <a:xfrm>
-            <a:off x="10012680" y="1417320"/>
-            <a:ext cx="1508760" cy="621792"/>
+            <a:off x="1005840" y="3977640"/>
+            <a:ext cx="1600200" cy="566928"/>
           </a:xfrm>
           <a:prstGeom prst="roundRect">
             <a:avLst>
-              <a:gd name="adj" fmla="val 10294"/>
+              <a:gd name="adj" fmla="val 9677"/>
             </a:avLst>
           </a:prstGeom>
           <a:solidFill>
             <a:srgbClr val="10243A"/>
           </a:solidFill>
-          <a:ln w="15240">
-            <a:solidFill>
-              <a:srgbClr val="35D0E6"/>
-            </a:solidFill>
-            <a:prstDash val="solid"/>
-          </a:ln>
-        </p:spPr>
-      </p:sp>
-      <p:sp>
-        <p:nvSpPr>
-          <p:cNvPr id="20" name="Text 18"/>
-          <p:cNvSpPr/>
-          <p:nvPr/>
-        </p:nvSpPr>
-        <p:spPr>
-          <a:xfrm>
-            <a:off x="10104120" y="1527048"/>
-            <a:ext cx="1325880" cy="438912"/>
+          <a:ln w="16510">
+            <a:solidFill>
+              <a:srgbClr val="FF6B6B"/>
+            </a:solidFill>
+            <a:prstDash val="solid"/>
+          </a:ln>
+        </p:spPr>
+      </p:sp>
+      <p:sp>
+        <p:nvSpPr>
+          <p:cNvPr id="19" name="Text 17"/>
+          <p:cNvSpPr/>
+          <p:nvPr/>
+        </p:nvSpPr>
+        <p:spPr>
+          <a:xfrm>
+            <a:off x="1097280" y="4050792"/>
+            <a:ext cx="1417320" cy="420624"/>
           </a:xfrm>
           <a:prstGeom prst="rect">
             <a:avLst/>
@@ -7435,62 +6991,37 @@
               <a:buNone/>
             </a:pPr>
             <a:r>
-              <a:rPr lang="en-US" sz="1200" b="1" dirty="0">
+              <a:rPr lang="en-US" sz="1000" b="1" dirty="0">
                 <a:solidFill>
                   <a:srgbClr val="F5F8FC"/>
                 </a:solidFill>
               </a:rPr>
-              <a:t>Release</a:t>
-            </a:r>
-            <a:endParaRPr lang="en-US" sz="1200" dirty="0"/>
-          </a:p>
-        </p:txBody>
-      </p:sp>
-      <p:sp>
-        <p:nvSpPr>
-          <p:cNvPr id="21" name="Shape 19"/>
-          <p:cNvSpPr/>
-          <p:nvPr/>
-        </p:nvSpPr>
-        <p:spPr>
-          <a:xfrm>
-            <a:off x="685800" y="2514600"/>
-            <a:ext cx="3429000" cy="2395728"/>
+              <a:t>Usage Event</a:t>
+            </a:r>
+            <a:endParaRPr lang="en-US" sz="1000" dirty="0"/>
+          </a:p>
+        </p:txBody>
+      </p:sp>
+      <p:sp>
+        <p:nvSpPr>
+          <p:cNvPr id="20" name="Shape 18"/>
+          <p:cNvSpPr/>
+          <p:nvPr/>
+        </p:nvSpPr>
+        <p:spPr>
+          <a:xfrm>
+            <a:off x="3840480" y="3977640"/>
+            <a:ext cx="1600200" cy="566928"/>
           </a:xfrm>
           <a:prstGeom prst="roundRect">
             <a:avLst>
-              <a:gd name="adj" fmla="val 3053"/>
+              <a:gd name="adj" fmla="val 9677"/>
             </a:avLst>
           </a:prstGeom>
           <a:solidFill>
-            <a:srgbClr val="0D1B2D"/>
+            <a:srgbClr val="10243A"/>
           </a:solidFill>
-          <a:ln w="12700">
-            <a:solidFill>
-              <a:srgbClr val="244763"/>
-            </a:solidFill>
-            <a:prstDash val="solid"/>
-          </a:ln>
-        </p:spPr>
-      </p:sp>
-      <p:sp>
-        <p:nvSpPr>
-          <p:cNvPr id="22" name="Shape 20"/>
-          <p:cNvSpPr/>
-          <p:nvPr/>
-        </p:nvSpPr>
-        <p:spPr>
-          <a:xfrm>
-            <a:off x="685800" y="2514600"/>
-            <a:ext cx="64008" cy="2395728"/>
-          </a:xfrm>
-          <a:prstGeom prst="rect">
-            <a:avLst/>
-          </a:prstGeom>
-          <a:solidFill>
-            <a:srgbClr val="FFBE55"/>
-          </a:solidFill>
-          <a:ln w="12700">
+          <a:ln w="16510">
             <a:solidFill>
               <a:srgbClr val="FFBE55"/>
             </a:solidFill>
@@ -7500,14 +7031,14 @@
       </p:sp>
       <p:sp>
         <p:nvSpPr>
-          <p:cNvPr id="23" name="Text 21"/>
-          <p:cNvSpPr/>
-          <p:nvPr/>
-        </p:nvSpPr>
-        <p:spPr>
-          <a:xfrm>
-            <a:off x="886968" y="2660904"/>
-            <a:ext cx="3108960" cy="292608"/>
+          <p:cNvPr id="21" name="Text 19"/>
+          <p:cNvSpPr/>
+          <p:nvPr/>
+        </p:nvSpPr>
+        <p:spPr>
+          <a:xfrm>
+            <a:off x="3931920" y="4050792"/>
+            <a:ext cx="1417320" cy="420624"/>
           </a:xfrm>
           <a:prstGeom prst="rect">
             <a:avLst/>
@@ -7516,124 +7047,63 @@
           <a:ln/>
         </p:spPr>
         <p:txBody>
-          <a:bodyPr wrap="square" lIns="0" tIns="0" rIns="0" bIns="0" rtlCol="0" anchor="ctr"/>
-          <a:lstStyle/>
-          <a:p>
-            <a:pPr indent="0" marL="0">
-              <a:buNone/>
-            </a:pPr>
-            <a:r>
-              <a:rPr lang="en-US" sz="1300" b="1" dirty="0">
-                <a:solidFill>
-                  <a:srgbClr val="F5F8FC"/>
-                </a:solidFill>
-              </a:rPr>
-              <a:t>Reservation</a:t>
-            </a:r>
-            <a:endParaRPr lang="en-US" sz="1300" dirty="0"/>
-          </a:p>
-        </p:txBody>
-      </p:sp>
-      <p:sp>
-        <p:nvSpPr>
-          <p:cNvPr id="24" name="Text 22"/>
-          <p:cNvSpPr/>
-          <p:nvPr/>
-        </p:nvSpPr>
-        <p:spPr>
-          <a:xfrm>
-            <a:off x="886968" y="3017520"/>
-            <a:ext cx="3081528" cy="1755648"/>
-          </a:xfrm>
-          <a:prstGeom prst="rect">
-            <a:avLst/>
-          </a:prstGeom>
-          <a:noFill/>
-          <a:ln/>
-        </p:spPr>
-        <p:txBody>
-          <a:bodyPr wrap="square" lIns="254" tIns="254" rIns="254" bIns="254" rtlCol="0" anchor="t">
+          <a:bodyPr wrap="square" lIns="254" tIns="254" rIns="254" bIns="254" rtlCol="0" anchor="ctr">
             <a:normAutofit/>
           </a:bodyPr>
           <a:lstStyle/>
           <a:p>
-            <a:pPr indent="0" marL="0">
-              <a:buNone/>
-            </a:pPr>
-            <a:r>
-              <a:rPr lang="en-US" sz="1040" dirty="0">
-                <a:solidFill>
-                  <a:srgbClr val="D8E3F0"/>
-                </a:solidFill>
-              </a:rPr>
-              <a:t>A temporary atomic hold bound to one grant, Client, logical request, unit type and funding bucket. It prevents concurrent overspend.</a:t>
-            </a:r>
-            <a:endParaRPr lang="en-US" sz="1040" dirty="0"/>
-          </a:p>
-        </p:txBody>
-      </p:sp>
-      <p:sp>
-        <p:nvSpPr>
-          <p:cNvPr id="25" name="Shape 23"/>
-          <p:cNvSpPr/>
-          <p:nvPr/>
-        </p:nvSpPr>
-        <p:spPr>
-          <a:xfrm>
-            <a:off x="4407408" y="2514600"/>
-            <a:ext cx="3429000" cy="2395728"/>
+            <a:pPr algn="ctr" indent="0" marL="0">
+              <a:buNone/>
+            </a:pPr>
+            <a:r>
+              <a:rPr lang="en-US" sz="1000" b="1" dirty="0">
+                <a:solidFill>
+                  <a:srgbClr val="F5F8FC"/>
+                </a:solidFill>
+              </a:rPr>
+              <a:t>Usage Event</a:t>
+            </a:r>
+            <a:endParaRPr lang="en-US" sz="1000" dirty="0"/>
+          </a:p>
+        </p:txBody>
+      </p:sp>
+      <p:sp>
+        <p:nvSpPr>
+          <p:cNvPr id="22" name="Shape 20"/>
+          <p:cNvSpPr/>
+          <p:nvPr/>
+        </p:nvSpPr>
+        <p:spPr>
+          <a:xfrm>
+            <a:off x="6675120" y="3977640"/>
+            <a:ext cx="1600200" cy="566928"/>
           </a:xfrm>
           <a:prstGeom prst="roundRect">
             <a:avLst>
-              <a:gd name="adj" fmla="val 3053"/>
+              <a:gd name="adj" fmla="val 9677"/>
             </a:avLst>
           </a:prstGeom>
           <a:solidFill>
-            <a:srgbClr val="0D1B2D"/>
+            <a:srgbClr val="10243A"/>
           </a:solidFill>
-          <a:ln w="12700">
-            <a:solidFill>
-              <a:srgbClr val="244763"/>
-            </a:solidFill>
-            <a:prstDash val="solid"/>
-          </a:ln>
-        </p:spPr>
-      </p:sp>
-      <p:sp>
-        <p:nvSpPr>
-          <p:cNvPr id="26" name="Shape 24"/>
-          <p:cNvSpPr/>
-          <p:nvPr/>
-        </p:nvSpPr>
-        <p:spPr>
-          <a:xfrm>
-            <a:off x="4407408" y="2514600"/>
-            <a:ext cx="64008" cy="2395728"/>
-          </a:xfrm>
-          <a:prstGeom prst="rect">
-            <a:avLst/>
-          </a:prstGeom>
-          <a:solidFill>
-            <a:srgbClr val="5D8CFF"/>
-          </a:solidFill>
-          <a:ln w="12700">
-            <a:solidFill>
-              <a:srgbClr val="5D8CFF"/>
-            </a:solidFill>
-            <a:prstDash val="solid"/>
-          </a:ln>
-        </p:spPr>
-      </p:sp>
-      <p:sp>
-        <p:nvSpPr>
-          <p:cNvPr id="27" name="Text 25"/>
-          <p:cNvSpPr/>
-          <p:nvPr/>
-        </p:nvSpPr>
-        <p:spPr>
-          <a:xfrm>
-            <a:off x="4608576" y="2660904"/>
-            <a:ext cx="3108960" cy="292608"/>
+          <a:ln w="16510">
+            <a:solidFill>
+              <a:srgbClr val="52D273"/>
+            </a:solidFill>
+            <a:prstDash val="solid"/>
+          </a:ln>
+        </p:spPr>
+      </p:sp>
+      <p:sp>
+        <p:nvSpPr>
+          <p:cNvPr id="23" name="Text 21"/>
+          <p:cNvSpPr/>
+          <p:nvPr/>
+        </p:nvSpPr>
+        <p:spPr>
+          <a:xfrm>
+            <a:off x="6766560" y="4050792"/>
+            <a:ext cx="1417320" cy="420624"/>
           </a:xfrm>
           <a:prstGeom prst="rect">
             <a:avLst/>
@@ -7642,124 +7112,63 @@
           <a:ln/>
         </p:spPr>
         <p:txBody>
-          <a:bodyPr wrap="square" lIns="0" tIns="0" rIns="0" bIns="0" rtlCol="0" anchor="ctr"/>
-          <a:lstStyle/>
-          <a:p>
-            <a:pPr indent="0" marL="0">
-              <a:buNone/>
-            </a:pPr>
-            <a:r>
-              <a:rPr lang="en-US" sz="1300" b="1" dirty="0">
-                <a:solidFill>
-                  <a:srgbClr val="F5F8FC"/>
-                </a:solidFill>
-              </a:rPr>
-              <a:t>Settlement</a:t>
-            </a:r>
-            <a:endParaRPr lang="en-US" sz="1300" dirty="0"/>
-          </a:p>
-        </p:txBody>
-      </p:sp>
-      <p:sp>
-        <p:nvSpPr>
-          <p:cNvPr id="28" name="Text 26"/>
-          <p:cNvSpPr/>
-          <p:nvPr/>
-        </p:nvSpPr>
-        <p:spPr>
-          <a:xfrm>
-            <a:off x="4608576" y="3017520"/>
-            <a:ext cx="3081528" cy="1755648"/>
-          </a:xfrm>
-          <a:prstGeom prst="rect">
-            <a:avLst/>
-          </a:prstGeom>
-          <a:noFill/>
-          <a:ln/>
-        </p:spPr>
-        <p:txBody>
-          <a:bodyPr wrap="square" lIns="254" tIns="254" rIns="254" bIns="254" rtlCol="0" anchor="t">
+          <a:bodyPr wrap="square" lIns="254" tIns="254" rIns="254" bIns="254" rtlCol="0" anchor="ctr">
             <a:normAutofit/>
           </a:bodyPr>
           <a:lstStyle/>
           <a:p>
-            <a:pPr indent="0" marL="0">
-              <a:buNone/>
-            </a:pPr>
-            <a:r>
-              <a:rPr lang="en-US" sz="1040" dirty="0">
-                <a:solidFill>
-                  <a:srgbClr val="D8E3F0"/>
-                </a:solidFill>
-              </a:rPr>
-              <a:t>The final idempotent debit uses Provider-measured usage and references every billable Usage Event.</a:t>
-            </a:r>
-            <a:endParaRPr lang="en-US" sz="1040" dirty="0"/>
-          </a:p>
-        </p:txBody>
-      </p:sp>
-      <p:sp>
-        <p:nvSpPr>
-          <p:cNvPr id="29" name="Shape 27"/>
-          <p:cNvSpPr/>
-          <p:nvPr/>
-        </p:nvSpPr>
-        <p:spPr>
-          <a:xfrm>
-            <a:off x="8129016" y="2514600"/>
-            <a:ext cx="3429000" cy="2395728"/>
+            <a:pPr algn="ctr" indent="0" marL="0">
+              <a:buNone/>
+            </a:pPr>
+            <a:r>
+              <a:rPr lang="en-US" sz="1000" b="1" dirty="0">
+                <a:solidFill>
+                  <a:srgbClr val="F5F8FC"/>
+                </a:solidFill>
+              </a:rPr>
+              <a:t>Usage Event</a:t>
+            </a:r>
+            <a:endParaRPr lang="en-US" sz="1000" dirty="0"/>
+          </a:p>
+        </p:txBody>
+      </p:sp>
+      <p:sp>
+        <p:nvSpPr>
+          <p:cNvPr id="24" name="Shape 22"/>
+          <p:cNvSpPr/>
+          <p:nvPr/>
+        </p:nvSpPr>
+        <p:spPr>
+          <a:xfrm>
+            <a:off x="9509760" y="3977640"/>
+            <a:ext cx="1600200" cy="566928"/>
           </a:xfrm>
           <a:prstGeom prst="roundRect">
             <a:avLst>
-              <a:gd name="adj" fmla="val 3053"/>
+              <a:gd name="adj" fmla="val 9677"/>
             </a:avLst>
           </a:prstGeom>
           <a:solidFill>
-            <a:srgbClr val="0D1B2D"/>
+            <a:srgbClr val="10243A"/>
           </a:solidFill>
-          <a:ln w="12700">
-            <a:solidFill>
-              <a:srgbClr val="244763"/>
-            </a:solidFill>
-            <a:prstDash val="solid"/>
-          </a:ln>
-        </p:spPr>
-      </p:sp>
-      <p:sp>
-        <p:nvSpPr>
-          <p:cNvPr id="30" name="Shape 28"/>
-          <p:cNvSpPr/>
-          <p:nvPr/>
-        </p:nvSpPr>
-        <p:spPr>
-          <a:xfrm>
-            <a:off x="8129016" y="2514600"/>
-            <a:ext cx="64008" cy="2395728"/>
-          </a:xfrm>
-          <a:prstGeom prst="rect">
-            <a:avLst/>
-          </a:prstGeom>
-          <a:solidFill>
-            <a:srgbClr val="52D273"/>
-          </a:solidFill>
-          <a:ln w="12700">
-            <a:solidFill>
-              <a:srgbClr val="52D273"/>
-            </a:solidFill>
-            <a:prstDash val="solid"/>
-          </a:ln>
-        </p:spPr>
-      </p:sp>
-      <p:sp>
-        <p:nvSpPr>
-          <p:cNvPr id="31" name="Text 29"/>
-          <p:cNvSpPr/>
-          <p:nvPr/>
-        </p:nvSpPr>
-        <p:spPr>
-          <a:xfrm>
-            <a:off x="8330184" y="2660904"/>
-            <a:ext cx="3108960" cy="292608"/>
+          <a:ln w="16510">
+            <a:solidFill>
+              <a:srgbClr val="5D8CFF"/>
+            </a:solidFill>
+            <a:prstDash val="solid"/>
+          </a:ln>
+        </p:spPr>
+      </p:sp>
+      <p:sp>
+        <p:nvSpPr>
+          <p:cNvPr id="25" name="Text 23"/>
+          <p:cNvSpPr/>
+          <p:nvPr/>
+        </p:nvSpPr>
+        <p:spPr>
+          <a:xfrm>
+            <a:off x="9601200" y="4050792"/>
+            <a:ext cx="1417320" cy="420624"/>
           </a:xfrm>
           <a:prstGeom prst="rect">
             <a:avLst/>
@@ -7768,72 +7177,63 @@
           <a:ln/>
         </p:spPr>
         <p:txBody>
-          <a:bodyPr wrap="square" lIns="0" tIns="0" rIns="0" bIns="0" rtlCol="0" anchor="ctr"/>
-          <a:lstStyle/>
-          <a:p>
-            <a:pPr indent="0" marL="0">
-              <a:buNone/>
-            </a:pPr>
-            <a:r>
-              <a:rPr lang="en-US" sz="1300" b="1" dirty="0">
-                <a:solidFill>
-                  <a:srgbClr val="F5F8FC"/>
-                </a:solidFill>
-              </a:rPr>
-              <a:t>Finalization</a:t>
-            </a:r>
-            <a:endParaRPr lang="en-US" sz="1300" dirty="0"/>
-          </a:p>
-        </p:txBody>
-      </p:sp>
-      <p:sp>
-        <p:nvSpPr>
-          <p:cNvPr id="32" name="Text 30"/>
-          <p:cNvSpPr/>
-          <p:nvPr/>
-        </p:nvSpPr>
-        <p:spPr>
-          <a:xfrm>
-            <a:off x="8330184" y="3017520"/>
-            <a:ext cx="3081528" cy="1755648"/>
-          </a:xfrm>
-          <a:prstGeom prst="rect">
-            <a:avLst/>
-          </a:prstGeom>
-          <a:noFill/>
-          <a:ln/>
-        </p:spPr>
-        <p:txBody>
-          <a:bodyPr wrap="square" lIns="254" tIns="254" rIns="254" bIns="254" rtlCol="0" anchor="t">
+          <a:bodyPr wrap="square" lIns="254" tIns="254" rIns="254" bIns="254" rtlCol="0" anchor="ctr">
             <a:normAutofit/>
           </a:bodyPr>
           <a:lstStyle/>
           <a:p>
-            <a:pPr indent="0" marL="0">
-              <a:buNone/>
-            </a:pPr>
-            <a:r>
-              <a:rPr lang="en-US" sz="1040" dirty="0">
-                <a:solidFill>
-                  <a:srgbClr val="D8E3F0"/>
-                </a:solidFill>
-              </a:rPr>
-              <a:t>One reservation has one terminal finalization. Unused quantity is released inside settlement or through full release when no settlement occurs.</a:t>
-            </a:r>
-            <a:endParaRPr lang="en-US" sz="1040" dirty="0"/>
-          </a:p>
-        </p:txBody>
-      </p:sp>
-      <p:sp>
-        <p:nvSpPr>
-          <p:cNvPr id="33" name="Text 31"/>
-          <p:cNvSpPr/>
-          <p:nvPr/>
-        </p:nvSpPr>
-        <p:spPr>
-          <a:xfrm>
-            <a:off x="713232" y="5230368"/>
-            <a:ext cx="2194560" cy="292608"/>
+            <a:pPr algn="ctr" indent="0" marL="0">
+              <a:buNone/>
+            </a:pPr>
+            <a:r>
+              <a:rPr lang="en-US" sz="1000" b="1" dirty="0">
+                <a:solidFill>
+                  <a:srgbClr val="F5F8FC"/>
+                </a:solidFill>
+              </a:rPr>
+              <a:t>Usage Event</a:t>
+            </a:r>
+            <a:endParaRPr lang="en-US" sz="1000" dirty="0"/>
+          </a:p>
+        </p:txBody>
+      </p:sp>
+      <p:sp>
+        <p:nvSpPr>
+          <p:cNvPr id="26" name="Shape 24"/>
+          <p:cNvSpPr/>
+          <p:nvPr/>
+        </p:nvSpPr>
+        <p:spPr>
+          <a:xfrm>
+            <a:off x="4343400" y="5257800"/>
+            <a:ext cx="3474720" cy="658368"/>
+          </a:xfrm>
+          <a:prstGeom prst="roundRect">
+            <a:avLst>
+              <a:gd name="adj" fmla="val 8333"/>
+            </a:avLst>
+          </a:prstGeom>
+          <a:solidFill>
+            <a:srgbClr val="10243A"/>
+          </a:solidFill>
+          <a:ln w="16510">
+            <a:solidFill>
+              <a:srgbClr val="35D0E6"/>
+            </a:solidFill>
+            <a:prstDash val="solid"/>
+          </a:ln>
+        </p:spPr>
+      </p:sp>
+      <p:sp>
+        <p:nvSpPr>
+          <p:cNvPr id="27" name="Text 25"/>
+          <p:cNvSpPr/>
+          <p:nvPr/>
+        </p:nvSpPr>
+        <p:spPr>
+          <a:xfrm>
+            <a:off x="4434840" y="5330952"/>
+            <a:ext cx="3291840" cy="512064"/>
           </a:xfrm>
           <a:prstGeom prst="rect">
             <a:avLst/>
@@ -7842,59 +7242,155 @@
           <a:ln/>
         </p:spPr>
         <p:txBody>
-          <a:bodyPr wrap="square" lIns="0" tIns="0" rIns="0" bIns="0" rtlCol="0" anchor="ctr"/>
-          <a:lstStyle/>
-          <a:p>
-            <a:pPr indent="0" marL="0">
-              <a:buNone/>
-            </a:pPr>
-            <a:r>
-              <a:rPr lang="en-US" sz="1400" b="1" dirty="0">
-                <a:solidFill>
-                  <a:srgbClr val="F5F8FC"/>
-                </a:solidFill>
-              </a:rPr>
-              <a:t>Accounting invariants</a:t>
-            </a:r>
-            <a:endParaRPr lang="en-US" sz="1400" dirty="0"/>
-          </a:p>
-        </p:txBody>
-      </p:sp>
-      <p:sp>
-        <p:nvSpPr>
-          <p:cNvPr id="34" name="Text 32"/>
-          <p:cNvSpPr/>
-          <p:nvPr/>
-        </p:nvSpPr>
-        <p:spPr>
-          <a:xfrm>
-            <a:off x="713232" y="5596128"/>
-            <a:ext cx="10698480" cy="438912"/>
-          </a:xfrm>
-          <a:prstGeom prst="rect">
-            <a:avLst/>
-          </a:prstGeom>
-          <a:noFill/>
-          <a:ln/>
-        </p:spPr>
-        <p:txBody>
-          <a:bodyPr wrap="square" lIns="0" tIns="0" rIns="0" bIns="0" rtlCol="0" anchor="ctr">
+          <a:bodyPr wrap="square" lIns="254" tIns="254" rIns="254" bIns="254" rtlCol="0" anchor="ctr">
             <a:normAutofit/>
           </a:bodyPr>
           <a:lstStyle/>
           <a:p>
-            <a:pPr indent="0" marL="0">
-              <a:buNone/>
-            </a:pPr>
-            <a:r>
-              <a:rPr lang="en-US" sz="1050" dirty="0">
-                <a:solidFill>
-                  <a:srgbClr val="D8E3F0"/>
-                </a:solidFill>
-              </a:rPr>
-              <a:t>• one settlement ID accepted once   • settled + released &lt;= reserved   • corrections use new adjustment events   • historical price snapshot retained</a:t>
-            </a:r>
-            <a:endParaRPr lang="en-US" sz="1050" dirty="0"/>
+            <a:pPr algn="ctr" indent="0" marL="0">
+              <a:buNone/>
+            </a:pPr>
+            <a:r>
+              <a:rPr lang="en-US" sz="1500" b="1" dirty="0">
+                <a:solidFill>
+                  <a:srgbClr val="F5F8FC"/>
+                </a:solidFill>
+              </a:rPr>
+              <a:t>One Idempotent Settlement</a:t>
+            </a:r>
+            <a:endParaRPr lang="en-US" sz="1500" dirty="0"/>
+          </a:p>
+        </p:txBody>
+      </p:sp>
+      <p:sp>
+        <p:nvSpPr>
+          <p:cNvPr id="28" name="Shape 26"/>
+          <p:cNvSpPr/>
+          <p:nvPr/>
+        </p:nvSpPr>
+        <p:spPr>
+          <a:xfrm>
+            <a:off x="1801368" y="4553712"/>
+            <a:ext cx="4279392" cy="676656"/>
+          </a:xfrm>
+          <a:prstGeom prst="line">
+            <a:avLst/>
+          </a:prstGeom>
+          <a:noFill/>
+          <a:ln w="15240">
+            <a:solidFill>
+              <a:srgbClr val="8FA7C0"/>
+            </a:solidFill>
+            <a:prstDash val="solid"/>
+            <a:tailEnd type="triangle"/>
+          </a:ln>
+        </p:spPr>
+      </p:sp>
+      <p:sp>
+        <p:nvSpPr>
+          <p:cNvPr id="29" name="Shape 27"/>
+          <p:cNvSpPr/>
+          <p:nvPr/>
+        </p:nvSpPr>
+        <p:spPr>
+          <a:xfrm>
+            <a:off x="4636008" y="4553712"/>
+            <a:ext cx="1444752" cy="676656"/>
+          </a:xfrm>
+          <a:prstGeom prst="line">
+            <a:avLst/>
+          </a:prstGeom>
+          <a:noFill/>
+          <a:ln w="15240">
+            <a:solidFill>
+              <a:srgbClr val="8FA7C0"/>
+            </a:solidFill>
+            <a:prstDash val="solid"/>
+            <a:tailEnd type="triangle"/>
+          </a:ln>
+        </p:spPr>
+      </p:sp>
+      <p:sp>
+        <p:nvSpPr>
+          <p:cNvPr id="30" name="Shape 28"/>
+          <p:cNvSpPr/>
+          <p:nvPr/>
+        </p:nvSpPr>
+        <p:spPr>
+          <a:xfrm>
+            <a:off x="7470648" y="4553712"/>
+            <a:ext cx="-1389888" cy="676656"/>
+          </a:xfrm>
+          <a:prstGeom prst="line">
+            <a:avLst/>
+          </a:prstGeom>
+          <a:noFill/>
+          <a:ln w="15240">
+            <a:solidFill>
+              <a:srgbClr val="8FA7C0"/>
+            </a:solidFill>
+            <a:prstDash val="solid"/>
+            <a:tailEnd type="triangle"/>
+          </a:ln>
+        </p:spPr>
+      </p:sp>
+      <p:sp>
+        <p:nvSpPr>
+          <p:cNvPr id="31" name="Shape 29"/>
+          <p:cNvSpPr/>
+          <p:nvPr/>
+        </p:nvSpPr>
+        <p:spPr>
+          <a:xfrm>
+            <a:off x="10305288" y="4553712"/>
+            <a:ext cx="-4224528" cy="676656"/>
+          </a:xfrm>
+          <a:prstGeom prst="line">
+            <a:avLst/>
+          </a:prstGeom>
+          <a:noFill/>
+          <a:ln w="15240">
+            <a:solidFill>
+              <a:srgbClr val="8FA7C0"/>
+            </a:solidFill>
+            <a:prstDash val="solid"/>
+            <a:tailEnd type="triangle"/>
+          </a:ln>
+        </p:spPr>
+      </p:sp>
+      <p:sp>
+        <p:nvSpPr>
+          <p:cNvPr id="32" name="Text 30"/>
+          <p:cNvSpPr/>
+          <p:nvPr/>
+        </p:nvSpPr>
+        <p:spPr>
+          <a:xfrm>
+            <a:off x="914400" y="6053328"/>
+            <a:ext cx="10332720" cy="274320"/>
+          </a:xfrm>
+          <a:prstGeom prst="rect">
+            <a:avLst/>
+          </a:prstGeom>
+          <a:noFill/>
+          <a:ln/>
+        </p:spPr>
+        <p:txBody>
+          <a:bodyPr wrap="square" lIns="0" tIns="0" rIns="0" bIns="0" rtlCol="0" anchor="ctr"/>
+          <a:lstStyle/>
+          <a:p>
+            <a:pPr algn="ctr" indent="0" marL="0">
+              <a:buNone/>
+            </a:pPr>
+            <a:r>
+              <a:rPr lang="en-US" sz="1150" b="1" dirty="0">
+                <a:solidFill>
+                  <a:srgbClr val="35D0E6"/>
+                </a:solidFill>
+              </a:rPr>
+              <a:t>Attribution is retained for both the Beneficiary and the registered Client that generated the workload.</a:t>
+            </a:r>
+            <a:endParaRPr lang="en-US" sz="1150" dirty="0"/>
           </a:p>
         </p:txBody>
       </p:sp>
@@ -8000,11 +7496,8 @@
                 <a:solidFill>
                   <a:srgbClr val="F5F8FC"/>
                 </a:solidFill>
-                <a:latin typeface="Arial" pitchFamily="34" charset="0"/>
-                <a:ea typeface="Arial" pitchFamily="34" charset="-122"/>
-                <a:cs typeface="Arial" pitchFamily="34" charset="-120"/>
-              </a:rPr>
-              <a:t>Privacy and security boundaries</a:t>
+              </a:rPr>
+              <a:t>Late Provider usage is reconciled - never rewritten</a:t>
             </a:r>
             <a:endParaRPr lang="en-US" sz="2500" dirty="0"/>
           </a:p>
@@ -8019,7 +7512,7 @@
         <p:spPr>
           <a:xfrm>
             <a:off x="612648" y="932688"/>
-            <a:ext cx="10789920" cy="329184"/>
+            <a:ext cx="10789920" cy="310896"/>
           </a:xfrm>
           <a:prstGeom prst="rect">
             <a:avLst/>
@@ -8039,11 +7532,8 @@
                 <a:solidFill>
                   <a:srgbClr val="8FA7C0"/>
                 </a:solidFill>
-                <a:latin typeface="Arial" pitchFamily="34" charset="0"/>
-                <a:ea typeface="Arial" pitchFamily="34" charset="-122"/>
-                <a:cs typeface="Arial" pitchFamily="34" charset="-120"/>
-              </a:rPr>
-              <a:t>Economic sponsorship, operational observability and user content are separate permissions.</a:t>
+              </a:rPr>
+              <a:t>Every variance is reproducible and idempotent.</a:t>
             </a:r>
             <a:endParaRPr lang="en-US" sz="1150" dirty="0"/>
           </a:p>
@@ -8057,20 +7547,20 @@
         </p:nvSpPr>
         <p:spPr>
           <a:xfrm>
-            <a:off x="658368" y="1417320"/>
-            <a:ext cx="2057400" cy="658368"/>
+            <a:off x="594360" y="1828800"/>
+            <a:ext cx="2194560" cy="749808"/>
           </a:xfrm>
           <a:prstGeom prst="roundRect">
             <a:avLst>
-              <a:gd name="adj" fmla="val 9722"/>
+              <a:gd name="adj" fmla="val 7317"/>
             </a:avLst>
           </a:prstGeom>
           <a:solidFill>
             <a:srgbClr val="10243A"/>
           </a:solidFill>
-          <a:ln w="15240">
-            <a:solidFill>
-              <a:srgbClr val="5D8CFF"/>
+          <a:ln w="16510">
+            <a:solidFill>
+              <a:srgbClr val="FFBE55"/>
             </a:solidFill>
             <a:prstDash val="solid"/>
           </a:ln>
@@ -8084,8 +7574,8 @@
         </p:nvSpPr>
         <p:spPr>
           <a:xfrm>
-            <a:off x="749808" y="1527048"/>
-            <a:ext cx="1874520" cy="475488"/>
+            <a:off x="685800" y="1901952"/>
+            <a:ext cx="2011680" cy="603504"/>
           </a:xfrm>
           <a:prstGeom prst="rect">
             <a:avLst/>
@@ -8103,14 +7593,28 @@
               <a:buNone/>
             </a:pPr>
             <a:r>
-              <a:rPr lang="en-US" sz="1400" b="1" dirty="0">
+              <a:rPr lang="en-US" sz="1300" b="1" dirty="0">
                 <a:solidFill>
                   <a:srgbClr val="F5F8FC"/>
                 </a:solidFill>
               </a:rPr>
-              <a:t>Resource User</a:t>
-            </a:r>
-            <a:endParaRPr lang="en-US" sz="1400" dirty="0"/>
+              <a:t>Gateway event</a:t>
+            </a:r>
+            <a:endParaRPr lang="en-US" sz="1300" dirty="0"/>
+          </a:p>
+          <a:p>
+            <a:pPr algn="ctr" indent="0" marL="0">
+              <a:buNone/>
+            </a:pPr>
+            <a:r>
+              <a:rPr lang="en-US" sz="1300" b="1" dirty="0">
+                <a:solidFill>
+                  <a:srgbClr val="F5F8FC"/>
+                </a:solidFill>
+              </a:rPr>
+              <a:t>2.5 units</a:t>
+            </a:r>
+            <a:endParaRPr lang="en-US" sz="1300" dirty="0"/>
           </a:p>
         </p:txBody>
       </p:sp>
@@ -8122,35 +7626,59 @@
         </p:nvSpPr>
         <p:spPr>
           <a:xfrm>
-            <a:off x="5074920" y="1417320"/>
-            <a:ext cx="2057400" cy="658368"/>
+            <a:off x="2788920" y="2203704"/>
+            <a:ext cx="914400" cy="0"/>
+          </a:xfrm>
+          <a:prstGeom prst="line">
+            <a:avLst/>
+          </a:prstGeom>
+          <a:noFill/>
+          <a:ln w="25400">
+            <a:solidFill>
+              <a:srgbClr val="8FA7C0"/>
+            </a:solidFill>
+            <a:prstDash val="solid"/>
+            <a:tailEnd type="triangle"/>
+          </a:ln>
+        </p:spPr>
+      </p:sp>
+      <p:sp>
+        <p:nvSpPr>
+          <p:cNvPr id="7" name="Shape 5"/>
+          <p:cNvSpPr/>
+          <p:nvPr/>
+        </p:nvSpPr>
+        <p:spPr>
+          <a:xfrm>
+            <a:off x="3749040" y="1828800"/>
+            <a:ext cx="2194560" cy="749808"/>
           </a:xfrm>
           <a:prstGeom prst="roundRect">
             <a:avLst>
-              <a:gd name="adj" fmla="val 9722"/>
+              <a:gd name="adj" fmla="val 7317"/>
             </a:avLst>
           </a:prstGeom>
           <a:solidFill>
             <a:srgbClr val="10243A"/>
           </a:solidFill>
-          <a:ln w="15240">
-            <a:solidFill>
-              <a:srgbClr val="35D0E6"/>
-            </a:solidFill>
-            <a:prstDash val="solid"/>
-          </a:ln>
-        </p:spPr>
-      </p:sp>
-      <p:sp>
-        <p:nvSpPr>
-          <p:cNvPr id="7" name="Text 5"/>
-          <p:cNvSpPr/>
-          <p:nvPr/>
-        </p:nvSpPr>
-        <p:spPr>
-          <a:xfrm>
-            <a:off x="5166360" y="1527048"/>
-            <a:ext cx="1874520" cy="475488"/>
+          <a:ln w="16510">
+            <a:solidFill>
+              <a:srgbClr val="52D273"/>
+            </a:solidFill>
+            <a:prstDash val="solid"/>
+          </a:ln>
+        </p:spPr>
+      </p:sp>
+      <p:sp>
+        <p:nvSpPr>
+          <p:cNvPr id="8" name="Text 6"/>
+          <p:cNvSpPr/>
+          <p:nvPr/>
+        </p:nvSpPr>
+        <p:spPr>
+          <a:xfrm>
+            <a:off x="3840480" y="1901952"/>
+            <a:ext cx="2011680" cy="603504"/>
           </a:xfrm>
           <a:prstGeom prst="rect">
             <a:avLst/>
@@ -8168,54 +7696,92 @@
               <a:buNone/>
             </a:pPr>
             <a:r>
-              <a:rPr lang="en-US" sz="1400" b="1" dirty="0">
+              <a:rPr lang="en-US" sz="1300" b="1" dirty="0">
                 <a:solidFill>
                   <a:srgbClr val="F5F8FC"/>
                 </a:solidFill>
               </a:rPr>
-              <a:t>AI Provider</a:t>
-            </a:r>
-            <a:endParaRPr lang="en-US" sz="1400" dirty="0"/>
-          </a:p>
-        </p:txBody>
-      </p:sp>
-      <p:sp>
-        <p:nvSpPr>
-          <p:cNvPr id="8" name="Shape 6"/>
-          <p:cNvSpPr/>
-          <p:nvPr/>
-        </p:nvSpPr>
-        <p:spPr>
-          <a:xfrm>
-            <a:off x="9464040" y="1417320"/>
-            <a:ext cx="2057400" cy="658368"/>
+              <a:t>Provider final</a:t>
+            </a:r>
+            <a:endParaRPr lang="en-US" sz="1300" dirty="0"/>
+          </a:p>
+          <a:p>
+            <a:pPr algn="ctr" indent="0" marL="0">
+              <a:buNone/>
+            </a:pPr>
+            <a:r>
+              <a:rPr lang="en-US" sz="1300" b="1" dirty="0">
+                <a:solidFill>
+                  <a:srgbClr val="F5F8FC"/>
+                </a:solidFill>
+              </a:rPr>
+              <a:t>3.0 units</a:t>
+            </a:r>
+            <a:endParaRPr lang="en-US" sz="1300" dirty="0"/>
+          </a:p>
+        </p:txBody>
+      </p:sp>
+      <p:sp>
+        <p:nvSpPr>
+          <p:cNvPr id="9" name="Shape 7"/>
+          <p:cNvSpPr/>
+          <p:nvPr/>
+        </p:nvSpPr>
+        <p:spPr>
+          <a:xfrm>
+            <a:off x="5943600" y="2203704"/>
+            <a:ext cx="914400" cy="0"/>
+          </a:xfrm>
+          <a:prstGeom prst="line">
+            <a:avLst/>
+          </a:prstGeom>
+          <a:noFill/>
+          <a:ln w="25400">
+            <a:solidFill>
+              <a:srgbClr val="8FA7C0"/>
+            </a:solidFill>
+            <a:prstDash val="solid"/>
+            <a:tailEnd type="triangle"/>
+          </a:ln>
+        </p:spPr>
+      </p:sp>
+      <p:sp>
+        <p:nvSpPr>
+          <p:cNvPr id="10" name="Shape 8"/>
+          <p:cNvSpPr/>
+          <p:nvPr/>
+        </p:nvSpPr>
+        <p:spPr>
+          <a:xfrm>
+            <a:off x="6903720" y="1828800"/>
+            <a:ext cx="2194560" cy="749808"/>
           </a:xfrm>
           <a:prstGeom prst="roundRect">
             <a:avLst>
-              <a:gd name="adj" fmla="val 9722"/>
+              <a:gd name="adj" fmla="val 7317"/>
             </a:avLst>
           </a:prstGeom>
           <a:solidFill>
             <a:srgbClr val="10243A"/>
           </a:solidFill>
-          <a:ln w="15240">
-            <a:solidFill>
-              <a:srgbClr val="52D273"/>
-            </a:solidFill>
-            <a:prstDash val="solid"/>
-          </a:ln>
-        </p:spPr>
-      </p:sp>
-      <p:sp>
-        <p:nvSpPr>
-          <p:cNvPr id="9" name="Text 7"/>
-          <p:cNvSpPr/>
-          <p:nvPr/>
-        </p:nvSpPr>
-        <p:spPr>
-          <a:xfrm>
-            <a:off x="9555480" y="1527048"/>
-            <a:ext cx="1874520" cy="475488"/>
+          <a:ln w="16510">
+            <a:solidFill>
+              <a:srgbClr val="35D0E6"/>
+            </a:solidFill>
+            <a:prstDash val="solid"/>
+          </a:ln>
+        </p:spPr>
+      </p:sp>
+      <p:sp>
+        <p:nvSpPr>
+          <p:cNvPr id="11" name="Text 9"/>
+          <p:cNvSpPr/>
+          <p:nvPr/>
+        </p:nvSpPr>
+        <p:spPr>
+          <a:xfrm>
+            <a:off x="6995160" y="1901952"/>
+            <a:ext cx="2011680" cy="603504"/>
           </a:xfrm>
           <a:prstGeom prst="rect">
             <a:avLst/>
@@ -8233,54 +7799,92 @@
               <a:buNone/>
             </a:pPr>
             <a:r>
-              <a:rPr lang="en-US" sz="1400" b="1" dirty="0">
+              <a:rPr lang="en-US" sz="1300" b="1" dirty="0">
                 <a:solidFill>
                   <a:srgbClr val="F5F8FC"/>
                 </a:solidFill>
               </a:rPr>
-              <a:t>Sponsor</a:t>
-            </a:r>
-            <a:endParaRPr lang="en-US" sz="1400" dirty="0"/>
-          </a:p>
-        </p:txBody>
-      </p:sp>
-      <p:sp>
-        <p:nvSpPr>
-          <p:cNvPr id="10" name="Shape 8"/>
-          <p:cNvSpPr/>
-          <p:nvPr/>
-        </p:nvSpPr>
-        <p:spPr>
-          <a:xfrm>
-            <a:off x="658368" y="4343400"/>
-            <a:ext cx="2057400" cy="658368"/>
+              <a:t>Reconciliation</a:t>
+            </a:r>
+            <a:endParaRPr lang="en-US" sz="1300" dirty="0"/>
+          </a:p>
+          <a:p>
+            <a:pPr algn="ctr" indent="0" marL="0">
+              <a:buNone/>
+            </a:pPr>
+            <a:r>
+              <a:rPr lang="en-US" sz="1300" b="1" dirty="0">
+                <a:solidFill>
+                  <a:srgbClr val="F5F8FC"/>
+                </a:solidFill>
+              </a:rPr>
+              <a:t>+0.5 units</a:t>
+            </a:r>
+            <a:endParaRPr lang="en-US" sz="1300" dirty="0"/>
+          </a:p>
+        </p:txBody>
+      </p:sp>
+      <p:sp>
+        <p:nvSpPr>
+          <p:cNvPr id="12" name="Shape 10"/>
+          <p:cNvSpPr/>
+          <p:nvPr/>
+        </p:nvSpPr>
+        <p:spPr>
+          <a:xfrm>
+            <a:off x="9098280" y="2203704"/>
+            <a:ext cx="914400" cy="0"/>
+          </a:xfrm>
+          <a:prstGeom prst="line">
+            <a:avLst/>
+          </a:prstGeom>
+          <a:noFill/>
+          <a:ln w="25400">
+            <a:solidFill>
+              <a:srgbClr val="8FA7C0"/>
+            </a:solidFill>
+            <a:prstDash val="solid"/>
+            <a:tailEnd type="triangle"/>
+          </a:ln>
+        </p:spPr>
+      </p:sp>
+      <p:sp>
+        <p:nvSpPr>
+          <p:cNvPr id="13" name="Shape 11"/>
+          <p:cNvSpPr/>
+          <p:nvPr/>
+        </p:nvSpPr>
+        <p:spPr>
+          <a:xfrm>
+            <a:off x="10058400" y="1828800"/>
+            <a:ext cx="1554480" cy="749808"/>
           </a:xfrm>
           <a:prstGeom prst="roundRect">
             <a:avLst>
-              <a:gd name="adj" fmla="val 9722"/>
+              <a:gd name="adj" fmla="val 7317"/>
             </a:avLst>
           </a:prstGeom>
           <a:solidFill>
             <a:srgbClr val="10243A"/>
           </a:solidFill>
-          <a:ln w="15240">
-            <a:solidFill>
-              <a:srgbClr val="FFBE55"/>
-            </a:solidFill>
-            <a:prstDash val="solid"/>
-          </a:ln>
-        </p:spPr>
-      </p:sp>
-      <p:sp>
-        <p:nvSpPr>
-          <p:cNvPr id="11" name="Text 9"/>
-          <p:cNvSpPr/>
-          <p:nvPr/>
-        </p:nvSpPr>
-        <p:spPr>
-          <a:xfrm>
-            <a:off x="749808" y="4453128"/>
-            <a:ext cx="1874520" cy="475488"/>
+          <a:ln w="16510">
+            <a:solidFill>
+              <a:srgbClr val="5D8CFF"/>
+            </a:solidFill>
+            <a:prstDash val="solid"/>
+          </a:ln>
+        </p:spPr>
+      </p:sp>
+      <p:sp>
+        <p:nvSpPr>
+          <p:cNvPr id="14" name="Text 12"/>
+          <p:cNvSpPr/>
+          <p:nvPr/>
+        </p:nvSpPr>
+        <p:spPr>
+          <a:xfrm>
+            <a:off x="10149840" y="1901952"/>
+            <a:ext cx="1371600" cy="603504"/>
           </a:xfrm>
           <a:prstGeom prst="rect">
             <a:avLst/>
@@ -8298,88 +7902,16 @@
               <a:buNone/>
             </a:pPr>
             <a:r>
-              <a:rPr lang="en-US" sz="1400" b="1" dirty="0">
+              <a:rPr lang="en-US" sz="1300" b="1" dirty="0">
                 <a:solidFill>
                   <a:srgbClr val="F5F8FC"/>
                 </a:solidFill>
               </a:rPr>
-              <a:t>Consumer App</a:t>
-            </a:r>
-            <a:endParaRPr lang="en-US" sz="1400" dirty="0"/>
-          </a:p>
-        </p:txBody>
-      </p:sp>
-      <p:sp>
-        <p:nvSpPr>
-          <p:cNvPr id="12" name="Shape 10"/>
-          <p:cNvSpPr/>
-          <p:nvPr/>
-        </p:nvSpPr>
-        <p:spPr>
-          <a:xfrm>
-            <a:off x="2724912" y="1737360"/>
-            <a:ext cx="2322576" cy="0"/>
-          </a:xfrm>
-          <a:prstGeom prst="line">
-            <a:avLst/>
-          </a:prstGeom>
-          <a:noFill/>
-          <a:ln w="25400">
-            <a:solidFill>
-              <a:srgbClr val="5D8CFF"/>
-            </a:solidFill>
-            <a:prstDash val="solid"/>
-            <a:tailEnd type="triangle"/>
-          </a:ln>
-        </p:spPr>
-      </p:sp>
-      <p:sp>
-        <p:nvSpPr>
-          <p:cNvPr id="13" name="Shape 11"/>
-          <p:cNvSpPr/>
-          <p:nvPr/>
-        </p:nvSpPr>
-        <p:spPr>
-          <a:xfrm>
-            <a:off x="7150608" y="1737360"/>
-            <a:ext cx="2286000" cy="0"/>
-          </a:xfrm>
-          <a:prstGeom prst="line">
-            <a:avLst/>
-          </a:prstGeom>
-          <a:noFill/>
-          <a:ln w="25400">
-            <a:solidFill>
-              <a:srgbClr val="52D273"/>
-            </a:solidFill>
-            <a:prstDash val="solid"/>
-            <a:tailEnd type="triangle"/>
-          </a:ln>
-        </p:spPr>
-      </p:sp>
-      <p:sp>
-        <p:nvSpPr>
-          <p:cNvPr id="14" name="Shape 12"/>
-          <p:cNvSpPr/>
-          <p:nvPr/>
-        </p:nvSpPr>
-        <p:spPr>
-          <a:xfrm>
-            <a:off x="1828800" y="4315968"/>
-            <a:ext cx="3246120" cy="-2258568"/>
-          </a:xfrm>
-          <a:prstGeom prst="line">
-            <a:avLst/>
-          </a:prstGeom>
-          <a:noFill/>
-          <a:ln w="25400">
-            <a:solidFill>
-              <a:srgbClr val="FFBE55"/>
-            </a:solidFill>
-            <a:prstDash val="solid"/>
-            <a:tailEnd type="triangle"/>
-          </a:ln>
-        </p:spPr>
+              <a:t>Adjustment</a:t>
+            </a:r>
+            <a:endParaRPr lang="en-US" sz="1300" dirty="0"/>
+          </a:p>
+        </p:txBody>
       </p:sp>
       <p:sp>
         <p:nvSpPr>
@@ -8389,108 +7921,12 @@
         </p:nvSpPr>
         <p:spPr>
           <a:xfrm>
-            <a:off x="5074920" y="2075688"/>
-            <a:ext cx="-2377440" cy="2249424"/>
-          </a:xfrm>
-          <a:prstGeom prst="line">
-            <a:avLst/>
-          </a:prstGeom>
-          <a:noFill/>
-          <a:ln w="25400">
-            <a:solidFill>
-              <a:srgbClr val="35D0E6"/>
-            </a:solidFill>
-            <a:prstDash val="solid"/>
-            <a:tailEnd type="triangle"/>
-          </a:ln>
-        </p:spPr>
-      </p:sp>
-      <p:sp>
-        <p:nvSpPr>
-          <p:cNvPr id="16" name="Text 14"/>
-          <p:cNvSpPr/>
-          <p:nvPr/>
-        </p:nvSpPr>
-        <p:spPr>
-          <a:xfrm>
-            <a:off x="3063240" y="1417320"/>
-            <a:ext cx="1645920" cy="201168"/>
-          </a:xfrm>
-          <a:prstGeom prst="rect">
-            <a:avLst/>
-          </a:prstGeom>
-          <a:noFill/>
-          <a:ln/>
-        </p:spPr>
-        <p:txBody>
-          <a:bodyPr wrap="square" lIns="0" tIns="0" rIns="0" bIns="0" rtlCol="0" anchor="ctr"/>
-          <a:lstStyle/>
-          <a:p>
-            <a:pPr algn="ctr" indent="0" marL="0">
-              <a:buNone/>
-            </a:pPr>
-            <a:r>
-              <a:rPr lang="en-US" sz="900" dirty="0">
-                <a:solidFill>
-                  <a:srgbClr val="8FA7C0"/>
-                </a:solidFill>
-              </a:rPr>
-              <a:t>bounded authorization</a:t>
-            </a:r>
-            <a:endParaRPr lang="en-US" sz="900" dirty="0"/>
-          </a:p>
-        </p:txBody>
-      </p:sp>
-      <p:sp>
-        <p:nvSpPr>
-          <p:cNvPr id="17" name="Text 15"/>
-          <p:cNvSpPr/>
-          <p:nvPr/>
-        </p:nvSpPr>
-        <p:spPr>
-          <a:xfrm>
-            <a:off x="7360920" y="1417320"/>
-            <a:ext cx="1920240" cy="201168"/>
-          </a:xfrm>
-          <a:prstGeom prst="rect">
-            <a:avLst/>
-          </a:prstGeom>
-          <a:noFill/>
-          <a:ln/>
-        </p:spPr>
-        <p:txBody>
-          <a:bodyPr wrap="square" lIns="0" tIns="0" rIns="0" bIns="0" rtlCol="0" anchor="ctr"/>
-          <a:lstStyle/>
-          <a:p>
-            <a:pPr algn="ctr" indent="0" marL="0">
-              <a:buNone/>
-            </a:pPr>
-            <a:r>
-              <a:rPr lang="en-US" sz="900" dirty="0">
-                <a:solidFill>
-                  <a:srgbClr val="8FA7C0"/>
-                </a:solidFill>
-              </a:rPr>
-              <a:t>aggregate reporting only</a:t>
-            </a:r>
-            <a:endParaRPr lang="en-US" sz="900" dirty="0"/>
-          </a:p>
-        </p:txBody>
-      </p:sp>
-      <p:sp>
-        <p:nvSpPr>
-          <p:cNvPr id="18" name="Shape 16"/>
-          <p:cNvSpPr/>
-          <p:nvPr/>
-        </p:nvSpPr>
-        <p:spPr>
-          <a:xfrm>
-            <a:off x="4617720" y="2788920"/>
-            <a:ext cx="3017520" cy="2148840"/>
+            <a:off x="731520" y="3246120"/>
+            <a:ext cx="3337560" cy="1920240"/>
           </a:xfrm>
           <a:prstGeom prst="roundRect">
             <a:avLst>
-              <a:gd name="adj" fmla="val 3404"/>
+              <a:gd name="adj" fmla="val 2857"/>
             </a:avLst>
           </a:prstGeom>
           <a:solidFill>
@@ -8506,14 +7942,14 @@
       </p:sp>
       <p:sp>
         <p:nvSpPr>
-          <p:cNvPr id="19" name="Shape 17"/>
-          <p:cNvSpPr/>
-          <p:nvPr/>
-        </p:nvSpPr>
-        <p:spPr>
-          <a:xfrm>
-            <a:off x="4617720" y="2788920"/>
-            <a:ext cx="64008" cy="2148840"/>
+          <p:cNvPr id="16" name="Shape 14"/>
+          <p:cNvSpPr/>
+          <p:nvPr/>
+        </p:nvSpPr>
+        <p:spPr>
+          <a:xfrm>
+            <a:off x="731520" y="3246120"/>
+            <a:ext cx="64008" cy="1920240"/>
           </a:xfrm>
           <a:prstGeom prst="rect">
             <a:avLst/>
@@ -8531,14 +7967,14 @@
       </p:sp>
       <p:sp>
         <p:nvSpPr>
-          <p:cNvPr id="20" name="Text 18"/>
-          <p:cNvSpPr/>
-          <p:nvPr/>
-        </p:nvSpPr>
-        <p:spPr>
-          <a:xfrm>
-            <a:off x="4818888" y="2935224"/>
-            <a:ext cx="2697480" cy="292608"/>
+          <p:cNvPr id="17" name="Text 15"/>
+          <p:cNvSpPr/>
+          <p:nvPr/>
+        </p:nvSpPr>
+        <p:spPr>
+          <a:xfrm>
+            <a:off x="932688" y="3392424"/>
+            <a:ext cx="3017520" cy="292608"/>
           </a:xfrm>
           <a:prstGeom prst="rect">
             <a:avLst/>
@@ -8559,7 +7995,7 @@
                   <a:srgbClr val="F5F8FC"/>
                 </a:solidFill>
               </a:rPr>
-              <a:t>Provider safeguards</a:t>
+              <a:t>Invariant</a:t>
             </a:r>
             <a:endParaRPr lang="en-US" sz="1300" dirty="0"/>
           </a:p>
@@ -8567,14 +8003,14 @@
       </p:sp>
       <p:sp>
         <p:nvSpPr>
-          <p:cNvPr id="21" name="Text 19"/>
-          <p:cNvSpPr/>
-          <p:nvPr/>
-        </p:nvSpPr>
-        <p:spPr>
-          <a:xfrm>
-            <a:off x="4818888" y="3291840"/>
-            <a:ext cx="2670048" cy="1508760"/>
+          <p:cNvPr id="18" name="Text 16"/>
+          <p:cNvSpPr/>
+          <p:nvPr/>
+        </p:nvSpPr>
+        <p:spPr>
+          <a:xfrm>
+            <a:off x="932688" y="3758184"/>
+            <a:ext cx="2971800" cy="1261872"/>
           </a:xfrm>
           <a:prstGeom prst="rect">
             <a:avLst/>
@@ -8592,101 +8028,65 @@
               <a:buNone/>
             </a:pPr>
             <a:r>
-              <a:rPr lang="en-US" sz="1040" dirty="0">
+              <a:rPr lang="en-US" sz="1030" dirty="0">
                 <a:solidFill>
                   <a:srgbClr val="D8E3F0"/>
                 </a:solidFill>
               </a:rPr>
-              <a:t>• PKCE and exact redirects</a:t>
-            </a:r>
-            <a:endParaRPr lang="en-US" sz="1040" dirty="0"/>
-          </a:p>
-          <a:p>
-            <a:pPr indent="0" marL="0">
-              <a:buNone/>
-            </a:pPr>
-            <a:r>
-              <a:rPr lang="en-US" sz="1040" dirty="0">
+              <a:t>adjustment quantity =</a:t>
+            </a:r>
+            <a:endParaRPr lang="en-US" sz="1030" dirty="0"/>
+          </a:p>
+          <a:p>
+            <a:pPr indent="0" marL="0">
+              <a:buNone/>
+            </a:pPr>
+            <a:r>
+              <a:rPr lang="en-US" sz="1030" dirty="0">
                 <a:solidFill>
                   <a:srgbClr val="D8E3F0"/>
                 </a:solidFill>
               </a:rPr>
-              <a:t>• short-lived tokens</a:t>
-            </a:r>
-            <a:endParaRPr lang="en-US" sz="1040" dirty="0"/>
-          </a:p>
-          <a:p>
-            <a:pPr indent="0" marL="0">
-              <a:buNone/>
-            </a:pPr>
-            <a:r>
-              <a:rPr lang="en-US" sz="1040" dirty="0">
+              <a:t>Provider final - original</a:t>
+            </a:r>
+            <a:endParaRPr lang="en-US" sz="1030" dirty="0"/>
+          </a:p>
+          <a:p>
+            <a:pPr indent="0" marL="0">
+              <a:buNone/>
+            </a:pPr>
+            <a:endParaRPr lang="en-US" sz="1030" dirty="0"/>
+          </a:p>
+          <a:p>
+            <a:pPr indent="0" marL="0">
+              <a:buNone/>
+            </a:pPr>
+            <a:r>
+              <a:rPr lang="en-US" sz="1030" dirty="0">
                 <a:solidFill>
                   <a:srgbClr val="D8E3F0"/>
                 </a:solidFill>
               </a:rPr>
-              <a:t>• atomic limits and idempotency</a:t>
-            </a:r>
-            <a:endParaRPr lang="en-US" sz="1040" dirty="0"/>
-          </a:p>
-          <a:p>
-            <a:pPr indent="0" marL="0">
-              <a:buNone/>
-            </a:pPr>
-            <a:r>
-              <a:rPr lang="en-US" sz="1040" dirty="0">
-                <a:solidFill>
-                  <a:srgbClr val="D8E3F0"/>
-                </a:solidFill>
-              </a:rPr>
-              <a:t>• immediate revocation</a:t>
-            </a:r>
-            <a:endParaRPr lang="en-US" sz="1040" dirty="0"/>
-          </a:p>
-          <a:p>
-            <a:pPr indent="0" marL="0">
-              <a:buNone/>
-            </a:pPr>
-            <a:r>
-              <a:rPr lang="en-US" sz="1040" dirty="0">
-                <a:solidFill>
-                  <a:srgbClr val="D8E3F0"/>
-                </a:solidFill>
-              </a:rPr>
-              <a:t>• replay-protected event delivery</a:t>
-            </a:r>
-            <a:endParaRPr lang="en-US" sz="1040" dirty="0"/>
-          </a:p>
-          <a:p>
-            <a:pPr indent="0" marL="0">
-              <a:buNone/>
-            </a:pPr>
-            <a:r>
-              <a:rPr lang="en-US" sz="1040" dirty="0">
-                <a:solidFill>
-                  <a:srgbClr val="D8E3F0"/>
-                </a:solidFill>
-              </a:rPr>
-              <a:t>• quota-laundering detection</a:t>
-            </a:r>
-            <a:endParaRPr lang="en-US" sz="1040" dirty="0"/>
-          </a:p>
-        </p:txBody>
-      </p:sp>
-      <p:sp>
-        <p:nvSpPr>
-          <p:cNvPr id="22" name="Shape 20"/>
-          <p:cNvSpPr/>
-          <p:nvPr/>
-        </p:nvSpPr>
-        <p:spPr>
-          <a:xfrm>
-            <a:off x="8339328" y="2788920"/>
-            <a:ext cx="3200400" cy="2148840"/>
+              <a:t>Zero variance means no economic change.</a:t>
+            </a:r>
+            <a:endParaRPr lang="en-US" sz="1030" dirty="0"/>
+          </a:p>
+        </p:txBody>
+      </p:sp>
+      <p:sp>
+        <p:nvSpPr>
+          <p:cNvPr id="19" name="Shape 17"/>
+          <p:cNvSpPr/>
+          <p:nvPr/>
+        </p:nvSpPr>
+        <p:spPr>
+          <a:xfrm>
+            <a:off x="4434840" y="3246120"/>
+            <a:ext cx="3337560" cy="1920240"/>
           </a:xfrm>
           <a:prstGeom prst="roundRect">
             <a:avLst>
-              <a:gd name="adj" fmla="val 3404"/>
+              <a:gd name="adj" fmla="val 2857"/>
             </a:avLst>
           </a:prstGeom>
           <a:solidFill>
@@ -8702,14 +8102,140 @@
       </p:sp>
       <p:sp>
         <p:nvSpPr>
+          <p:cNvPr id="20" name="Shape 18"/>
+          <p:cNvSpPr/>
+          <p:nvPr/>
+        </p:nvSpPr>
+        <p:spPr>
+          <a:xfrm>
+            <a:off x="4434840" y="3246120"/>
+            <a:ext cx="64008" cy="1920240"/>
+          </a:xfrm>
+          <a:prstGeom prst="rect">
+            <a:avLst/>
+          </a:prstGeom>
+          <a:solidFill>
+            <a:srgbClr val="52D273"/>
+          </a:solidFill>
+          <a:ln w="12700">
+            <a:solidFill>
+              <a:srgbClr val="52D273"/>
+            </a:solidFill>
+            <a:prstDash val="solid"/>
+          </a:ln>
+        </p:spPr>
+      </p:sp>
+      <p:sp>
+        <p:nvSpPr>
+          <p:cNvPr id="21" name="Text 19"/>
+          <p:cNvSpPr/>
+          <p:nvPr/>
+        </p:nvSpPr>
+        <p:spPr>
+          <a:xfrm>
+            <a:off x="4636008" y="3392424"/>
+            <a:ext cx="3017520" cy="292608"/>
+          </a:xfrm>
+          <a:prstGeom prst="rect">
+            <a:avLst/>
+          </a:prstGeom>
+          <a:noFill/>
+          <a:ln/>
+        </p:spPr>
+        <p:txBody>
+          <a:bodyPr wrap="square" lIns="0" tIns="0" rIns="0" bIns="0" rtlCol="0" anchor="ctr"/>
+          <a:lstStyle/>
+          <a:p>
+            <a:pPr indent="0" marL="0">
+              <a:buNone/>
+            </a:pPr>
+            <a:r>
+              <a:rPr lang="en-US" sz="1300" b="1" dirty="0">
+                <a:solidFill>
+                  <a:srgbClr val="F5F8FC"/>
+                </a:solidFill>
+              </a:rPr>
+              <a:t>Preserved bindings</a:t>
+            </a:r>
+            <a:endParaRPr lang="en-US" sz="1300" dirty="0"/>
+          </a:p>
+        </p:txBody>
+      </p:sp>
+      <p:sp>
+        <p:nvSpPr>
+          <p:cNvPr id="22" name="Text 20"/>
+          <p:cNvSpPr/>
+          <p:nvPr/>
+        </p:nvSpPr>
+        <p:spPr>
+          <a:xfrm>
+            <a:off x="4636008" y="3758184"/>
+            <a:ext cx="2971800" cy="1261872"/>
+          </a:xfrm>
+          <a:prstGeom prst="rect">
+            <a:avLst/>
+          </a:prstGeom>
+          <a:noFill/>
+          <a:ln/>
+        </p:spPr>
+        <p:txBody>
+          <a:bodyPr wrap="square" lIns="254" tIns="254" rIns="254" bIns="254" rtlCol="0" anchor="t">
+            <a:normAutofit/>
+          </a:bodyPr>
+          <a:lstStyle/>
+          <a:p>
+            <a:pPr indent="0" marL="0">
+              <a:buNone/>
+            </a:pPr>
+            <a:r>
+              <a:rPr lang="en-US" sz="1030" dirty="0">
+                <a:solidFill>
+                  <a:srgbClr val="D8E3F0"/>
+                </a:solidFill>
+              </a:rPr>
+              <a:t>Grant, Client, request, unit type, funding bucket, Provider request ID, and original event reference.</a:t>
+            </a:r>
+            <a:endParaRPr lang="en-US" sz="1030" dirty="0"/>
+          </a:p>
+        </p:txBody>
+      </p:sp>
+      <p:sp>
+        <p:nvSpPr>
           <p:cNvPr id="23" name="Shape 21"/>
           <p:cNvSpPr/>
           <p:nvPr/>
         </p:nvSpPr>
         <p:spPr>
           <a:xfrm>
-            <a:off x="8339328" y="2788920"/>
-            <a:ext cx="64008" cy="2148840"/>
+            <a:off x="8138160" y="3246120"/>
+            <a:ext cx="3337560" cy="1920240"/>
+          </a:xfrm>
+          <a:prstGeom prst="roundRect">
+            <a:avLst>
+              <a:gd name="adj" fmla="val 2857"/>
+            </a:avLst>
+          </a:prstGeom>
+          <a:solidFill>
+            <a:srgbClr val="0D1B2D"/>
+          </a:solidFill>
+          <a:ln w="12700">
+            <a:solidFill>
+              <a:srgbClr val="244763"/>
+            </a:solidFill>
+            <a:prstDash val="solid"/>
+          </a:ln>
+        </p:spPr>
+      </p:sp>
+      <p:sp>
+        <p:nvSpPr>
+          <p:cNvPr id="24" name="Shape 22"/>
+          <p:cNvSpPr/>
+          <p:nvPr/>
+        </p:nvSpPr>
+        <p:spPr>
+          <a:xfrm>
+            <a:off x="8138160" y="3246120"/>
+            <a:ext cx="64008" cy="1920240"/>
           </a:xfrm>
           <a:prstGeom prst="rect">
             <a:avLst/>
@@ -8727,14 +8253,14 @@
       </p:sp>
       <p:sp>
         <p:nvSpPr>
-          <p:cNvPr id="24" name="Text 22"/>
-          <p:cNvSpPr/>
-          <p:nvPr/>
-        </p:nvSpPr>
-        <p:spPr>
-          <a:xfrm>
-            <a:off x="8540496" y="2935224"/>
-            <a:ext cx="2880360" cy="292608"/>
+          <p:cNvPr id="25" name="Text 23"/>
+          <p:cNvSpPr/>
+          <p:nvPr/>
+        </p:nvSpPr>
+        <p:spPr>
+          <a:xfrm>
+            <a:off x="8339328" y="3392424"/>
+            <a:ext cx="3017520" cy="292608"/>
           </a:xfrm>
           <a:prstGeom prst="rect">
             <a:avLst/>
@@ -8755,7 +8281,7 @@
                   <a:srgbClr val="F5F8FC"/>
                 </a:solidFill>
               </a:rPr>
-              <a:t>Sponsor cannot receive by default</a:t>
+              <a:t>Forbidden behavior</a:t>
             </a:r>
             <a:endParaRPr lang="en-US" sz="1300" dirty="0"/>
           </a:p>
@@ -8763,14 +8289,14 @@
       </p:sp>
       <p:sp>
         <p:nvSpPr>
-          <p:cNvPr id="25" name="Text 23"/>
-          <p:cNvSpPr/>
-          <p:nvPr/>
-        </p:nvSpPr>
-        <p:spPr>
-          <a:xfrm>
-            <a:off x="8540496" y="3291840"/>
-            <a:ext cx="2852928" cy="1508760"/>
+          <p:cNvPr id="26" name="Text 24"/>
+          <p:cNvSpPr/>
+          <p:nvPr/>
+        </p:nvSpPr>
+        <p:spPr>
+          <a:xfrm>
+            <a:off x="8339328" y="3758184"/>
+            <a:ext cx="2971800" cy="1261872"/>
           </a:xfrm>
           <a:prstGeom prst="rect">
             <a:avLst/>
@@ -8788,50 +8314,56 @@
               <a:buNone/>
             </a:pPr>
             <a:r>
-              <a:rPr lang="en-US" sz="1040" dirty="0">
+              <a:rPr lang="en-US" sz="1030" dirty="0">
                 <a:solidFill>
                   <a:srgbClr val="D8E3F0"/>
                 </a:solidFill>
               </a:rPr>
-              <a:t>Prompts, outputs, files, conversations, raw identity, workspace names, Client internal labels or confidential pool balances.</a:t>
-            </a:r>
-            <a:endParaRPr lang="en-US" sz="1040" dirty="0"/>
-          </a:p>
-        </p:txBody>
-      </p:sp>
-      <p:sp>
-        <p:nvSpPr>
-          <p:cNvPr id="26" name="Text 24"/>
-          <p:cNvSpPr/>
-          <p:nvPr/>
-        </p:nvSpPr>
-        <p:spPr>
-          <a:xfrm>
-            <a:off x="3840480" y="5623560"/>
-            <a:ext cx="4572000" cy="347472"/>
-          </a:xfrm>
-          <a:prstGeom prst="rect">
-            <a:avLst/>
-          </a:prstGeom>
-          <a:noFill/>
-          <a:ln/>
-        </p:spPr>
-        <p:txBody>
-          <a:bodyPr wrap="square" lIns="0" tIns="0" rIns="0" bIns="0" rtlCol="0" anchor="ctr"/>
-          <a:lstStyle/>
-          <a:p>
-            <a:pPr algn="ctr" indent="0" marL="0">
-              <a:buNone/>
-            </a:pPr>
-            <a:r>
-              <a:rPr lang="en-US" sz="1600" b="1" dirty="0">
-                <a:solidFill>
-                  <a:srgbClr val="52D273"/>
-                </a:solidFill>
-              </a:rPr>
-              <a:t>Funding does not create a data-access right.</a:t>
-            </a:r>
-            <a:endParaRPr lang="en-US" sz="1600" dirty="0"/>
+              <a:t>No historical rewrite.</a:t>
+            </a:r>
+            <a:endParaRPr lang="en-US" sz="1030" dirty="0"/>
+          </a:p>
+          <a:p>
+            <a:pPr indent="0" marL="0">
+              <a:buNone/>
+            </a:pPr>
+            <a:r>
+              <a:rPr lang="en-US" sz="1030" dirty="0">
+                <a:solidFill>
+                  <a:srgbClr val="D8E3F0"/>
+                </a:solidFill>
+              </a:rPr>
+              <a:t>No second settlement.</a:t>
+            </a:r>
+            <a:endParaRPr lang="en-US" sz="1030" dirty="0"/>
+          </a:p>
+          <a:p>
+            <a:pPr indent="0" marL="0">
+              <a:buNone/>
+            </a:pPr>
+            <a:r>
+              <a:rPr lang="en-US" sz="1030" dirty="0">
+                <a:solidFill>
+                  <a:srgbClr val="D8E3F0"/>
+                </a:solidFill>
+              </a:rPr>
+              <a:t>No silent payer switch.</a:t>
+            </a:r>
+            <a:endParaRPr lang="en-US" sz="1030" dirty="0"/>
+          </a:p>
+          <a:p>
+            <a:pPr indent="0" marL="0">
+              <a:buNone/>
+            </a:pPr>
+            <a:r>
+              <a:rPr lang="en-US" sz="1030" dirty="0">
+                <a:solidFill>
+                  <a:srgbClr val="D8E3F0"/>
+                </a:solidFill>
+              </a:rPr>
+              <a:t>No unmatched charge without investigation.</a:t>
+            </a:r>
+            <a:endParaRPr lang="en-US" sz="1030" dirty="0"/>
           </a:p>
         </p:txBody>
       </p:sp>
@@ -8937,11 +8469,8 @@
                 <a:solidFill>
                   <a:srgbClr val="F5F8FC"/>
                 </a:solidFill>
-                <a:latin typeface="Arial" pitchFamily="34" charset="0"/>
-                <a:ea typeface="Arial" pitchFamily="34" charset="-122"/>
-                <a:cs typeface="Arial" pitchFamily="34" charset="-120"/>
-              </a:rPr>
-              <a:t>Current status and next proof point</a:t>
+              </a:rPr>
+              <a:t>v0.6 deliverables and practical next step</a:t>
             </a:r>
             <a:endParaRPr lang="en-US" sz="2500" dirty="0"/>
           </a:p>
@@ -8956,7 +8485,7 @@
         <p:spPr>
           <a:xfrm>
             <a:off x="612648" y="932688"/>
-            <a:ext cx="10789920" cy="329184"/>
+            <a:ext cx="10789920" cy="310896"/>
           </a:xfrm>
           <a:prstGeom prst="rect">
             <a:avLst/>
@@ -8976,11 +8505,8 @@
                 <a:solidFill>
                   <a:srgbClr val="8FA7C0"/>
                 </a:solidFill>
-                <a:latin typeface="Arial" pitchFamily="34" charset="0"/>
-                <a:ea typeface="Arial" pitchFamily="34" charset="-122"/>
-                <a:cs typeface="Arial" pitchFamily="34" charset="-120"/>
-              </a:rPr>
-              <a:t>v0.5 is a synchronized draft proposal - not yet a Provider-adopted standard.</a:t>
+              </a:rPr>
+              <a:t>The specification is ready for a mock provider-native reference application.</a:t>
             </a:r>
             <a:endParaRPr lang="en-US" sz="1150" dirty="0"/>
           </a:p>
@@ -8994,12 +8520,12 @@
         </p:nvSpPr>
         <p:spPr>
           <a:xfrm>
-            <a:off x="621792" y="1325880"/>
-            <a:ext cx="3401568" cy="3611880"/>
+            <a:off x="594360" y="1325880"/>
+            <a:ext cx="3520440" cy="4206240"/>
           </a:xfrm>
           <a:prstGeom prst="roundRect">
             <a:avLst>
-              <a:gd name="adj" fmla="val 2151"/>
+              <a:gd name="adj" fmla="val 1558"/>
             </a:avLst>
           </a:prstGeom>
           <a:solidFill>
@@ -9021,8 +8547,8 @@
         </p:nvSpPr>
         <p:spPr>
           <a:xfrm>
-            <a:off x="621792" y="1325880"/>
-            <a:ext cx="64008" cy="3611880"/>
+            <a:off x="594360" y="1325880"/>
+            <a:ext cx="64008" cy="4206240"/>
           </a:xfrm>
           <a:prstGeom prst="rect">
             <a:avLst/>
@@ -9046,8 +8572,8 @@
         </p:nvSpPr>
         <p:spPr>
           <a:xfrm>
-            <a:off x="822960" y="1472184"/>
-            <a:ext cx="3081528" cy="292608"/>
+            <a:off x="795528" y="1472184"/>
+            <a:ext cx="3200400" cy="292608"/>
           </a:xfrm>
           <a:prstGeom prst="rect">
             <a:avLst/>
@@ -9068,7 +8594,7 @@
                   <a:srgbClr val="F5F8FC"/>
                 </a:solidFill>
               </a:rPr>
-              <a:t>COMPLETED IN v0.5</a:t>
+              <a:t>DELIVERED IN v0.6</a:t>
             </a:r>
             <a:endParaRPr lang="en-US" sz="1300" dirty="0"/>
           </a:p>
@@ -9082,8 +8608,8 @@
         </p:nvSpPr>
         <p:spPr>
           <a:xfrm>
-            <a:off x="822960" y="1828800"/>
-            <a:ext cx="3054096" cy="2971800"/>
+            <a:off x="795528" y="1837944"/>
+            <a:ext cx="3154680" cy="3547872"/>
           </a:xfrm>
           <a:prstGeom prst="rect">
             <a:avLst/>
@@ -9101,112 +8627,112 @@
               <a:buNone/>
             </a:pPr>
             <a:r>
-              <a:rPr lang="en-US" sz="1040" dirty="0">
+              <a:rPr lang="en-US" sz="1030" dirty="0">
                 <a:solidFill>
                   <a:srgbClr val="D8E3F0"/>
                 </a:solidFill>
               </a:rPr>
-              <a:t>✓ canonical specification</a:t>
-            </a:r>
-            <a:endParaRPr lang="en-US" sz="1040" dirty="0"/>
-          </a:p>
-          <a:p>
-            <a:pPr indent="0" marL="0">
-              <a:buNone/>
-            </a:pPr>
-            <a:r>
-              <a:rPr lang="en-US" sz="1040" dirty="0">
+              <a:t>• Usage Event schema guide</a:t>
+            </a:r>
+            <a:endParaRPr lang="en-US" sz="1030" dirty="0"/>
+          </a:p>
+          <a:p>
+            <a:pPr indent="0" marL="0">
+              <a:buNone/>
+            </a:pPr>
+            <a:r>
+              <a:rPr lang="en-US" sz="1030" dirty="0">
                 <a:solidFill>
                   <a:srgbClr val="D8E3F0"/>
                 </a:solidFill>
               </a:rPr>
-              <a:t>✓ usage and ledger event profiles</a:t>
-            </a:r>
-            <a:endParaRPr lang="en-US" sz="1040" dirty="0"/>
-          </a:p>
-          <a:p>
-            <a:pPr indent="0" marL="0">
-              <a:buNone/>
-            </a:pPr>
-            <a:r>
-              <a:rPr lang="en-US" sz="1040" dirty="0">
+              <a:t>• Consent Receipt profile</a:t>
+            </a:r>
+            <a:endParaRPr lang="en-US" sz="1030" dirty="0"/>
+          </a:p>
+          <a:p>
+            <a:pPr indent="0" marL="0">
+              <a:buNone/>
+            </a:pPr>
+            <a:r>
+              <a:rPr lang="en-US" sz="1030" dirty="0">
                 <a:solidFill>
                   <a:srgbClr val="D8E3F0"/>
                 </a:solidFill>
               </a:rPr>
-              <a:t>✓ reservation and settlement</a:t>
-            </a:r>
-            <a:endParaRPr lang="en-US" sz="1040" dirty="0"/>
-          </a:p>
-          <a:p>
-            <a:pPr indent="0" marL="0">
-              <a:buNone/>
-            </a:pPr>
-            <a:r>
-              <a:rPr lang="en-US" sz="1040" dirty="0">
+              <a:t>• Evidence and reconciliation profile</a:t>
+            </a:r>
+            <a:endParaRPr lang="en-US" sz="1030" dirty="0"/>
+          </a:p>
+          <a:p>
+            <a:pPr indent="0" marL="0">
+              <a:buNone/>
+            </a:pPr>
+            <a:r>
+              <a:rPr lang="en-US" sz="1030" dirty="0">
                 <a:solidFill>
                   <a:srgbClr val="D8E3F0"/>
                 </a:solidFill>
               </a:rPr>
-              <a:t>✓ JSON Schemas and examples</a:t>
-            </a:r>
-            <a:endParaRPr lang="en-US" sz="1040" dirty="0"/>
-          </a:p>
-          <a:p>
-            <a:pPr indent="0" marL="0">
-              <a:buNone/>
-            </a:pPr>
-            <a:r>
-              <a:rPr lang="en-US" sz="1040" dirty="0">
+              <a:t>• Three JSON Schemas</a:t>
+            </a:r>
+            <a:endParaRPr lang="en-US" sz="1030" dirty="0"/>
+          </a:p>
+          <a:p>
+            <a:pPr indent="0" marL="0">
+              <a:buNone/>
+            </a:pPr>
+            <a:r>
+              <a:rPr lang="en-US" sz="1030" dirty="0">
                 <a:solidFill>
                   <a:srgbClr val="D8E3F0"/>
                 </a:solidFill>
               </a:rPr>
-              <a:t>✓ automated validation</a:t>
-            </a:r>
-            <a:endParaRPr lang="en-US" sz="1040" dirty="0"/>
-          </a:p>
-          <a:p>
-            <a:pPr indent="0" marL="0">
-              <a:buNone/>
-            </a:pPr>
-            <a:r>
-              <a:rPr lang="en-US" sz="1040" dirty="0">
+              <a:t>• Four positive examples</a:t>
+            </a:r>
+            <a:endParaRPr lang="en-US" sz="1030" dirty="0"/>
+          </a:p>
+          <a:p>
+            <a:pPr indent="0" marL="0">
+              <a:buNone/>
+            </a:pPr>
+            <a:r>
+              <a:rPr lang="en-US" sz="1030" dirty="0">
                 <a:solidFill>
                   <a:srgbClr val="D8E3F0"/>
                 </a:solidFill>
               </a:rPr>
-              <a:t>✓ discovery and implementation profiles</a:t>
-            </a:r>
-            <a:endParaRPr lang="en-US" sz="1040" dirty="0"/>
-          </a:p>
-          <a:p>
-            <a:pPr indent="0" marL="0">
-              <a:buNone/>
-            </a:pPr>
-            <a:r>
-              <a:rPr lang="en-US" sz="1040" dirty="0">
+              <a:t>• Six negative fixtures</a:t>
+            </a:r>
+            <a:endParaRPr lang="en-US" sz="1030" dirty="0"/>
+          </a:p>
+          <a:p>
+            <a:pPr indent="0" marL="0">
+              <a:buNone/>
+            </a:pPr>
+            <a:r>
+              <a:rPr lang="en-US" sz="1030" dirty="0">
                 <a:solidFill>
                   <a:srgbClr val="D8E3F0"/>
                 </a:solidFill>
               </a:rPr>
-              <a:t>✓ expanded threat model</a:t>
-            </a:r>
-            <a:endParaRPr lang="en-US" sz="1040" dirty="0"/>
-          </a:p>
-          <a:p>
-            <a:pPr indent="0" marL="0">
-              <a:buNone/>
-            </a:pPr>
-            <a:r>
-              <a:rPr lang="en-US" sz="1040" dirty="0">
+              <a:t>• Replay, ordering, signature, binding, and adjustment validation</a:t>
+            </a:r>
+            <a:endParaRPr lang="en-US" sz="1030" dirty="0"/>
+          </a:p>
+          <a:p>
+            <a:pPr indent="0" marL="0">
+              <a:buNone/>
+            </a:pPr>
+            <a:r>
+              <a:rPr lang="en-US" sz="1030" dirty="0">
                 <a:solidFill>
                   <a:srgbClr val="D8E3F0"/>
                 </a:solidFill>
               </a:rPr>
-              <a:t>✓ synchronized diagrams and change control</a:t>
-            </a:r>
-            <a:endParaRPr lang="en-US" sz="1040" dirty="0"/>
+              <a:t>• Updated discovery, threat model, profiles, diagrams, and change control</a:t>
+            </a:r>
+            <a:endParaRPr lang="en-US" sz="1030" dirty="0"/>
           </a:p>
         </p:txBody>
       </p:sp>
@@ -9219,11 +8745,11 @@
         <p:spPr>
           <a:xfrm>
             <a:off x="4343400" y="1325880"/>
-            <a:ext cx="3401568" cy="3611880"/>
+            <a:ext cx="3520440" cy="4206240"/>
           </a:xfrm>
           <a:prstGeom prst="roundRect">
             <a:avLst>
-              <a:gd name="adj" fmla="val 2151"/>
+              <a:gd name="adj" fmla="val 1558"/>
             </a:avLst>
           </a:prstGeom>
           <a:solidFill>
@@ -9246,7 +8772,7 @@
         <p:spPr>
           <a:xfrm>
             <a:off x="4343400" y="1325880"/>
-            <a:ext cx="64008" cy="3611880"/>
+            <a:ext cx="64008" cy="4206240"/>
           </a:xfrm>
           <a:prstGeom prst="rect">
             <a:avLst/>
@@ -9271,7 +8797,7 @@
         <p:spPr>
           <a:xfrm>
             <a:off x="4544568" y="1472184"/>
-            <a:ext cx="3081528" cy="292608"/>
+            <a:ext cx="3200400" cy="292608"/>
           </a:xfrm>
           <a:prstGeom prst="rect">
             <a:avLst/>
@@ -9292,7 +8818,7 @@
                   <a:srgbClr val="F5F8FC"/>
                 </a:solidFill>
               </a:rPr>
-              <a:t>NEXT - v0.6</a:t>
+              <a:t>ABDS STUDIO v0.7</a:t>
             </a:r>
             <a:endParaRPr lang="en-US" sz="1300" dirty="0"/>
           </a:p>
@@ -9306,8 +8832,8 @@
         </p:nvSpPr>
         <p:spPr>
           <a:xfrm>
-            <a:off x="4544568" y="1828800"/>
-            <a:ext cx="3054096" cy="2971800"/>
+            <a:off x="4544568" y="1837944"/>
+            <a:ext cx="3154680" cy="3547872"/>
           </a:xfrm>
           <a:prstGeom prst="rect">
             <a:avLst/>
@@ -9325,98 +8851,140 @@
               <a:buNone/>
             </a:pPr>
             <a:r>
-              <a:rPr lang="en-US" sz="1040" dirty="0">
+              <a:rPr lang="en-US" sz="1030" dirty="0">
                 <a:solidFill>
                   <a:srgbClr val="D8E3F0"/>
                 </a:solidFill>
               </a:rPr>
-              <a:t>• ABDS Studio simulator</a:t>
-            </a:r>
-            <a:endParaRPr lang="en-US" sz="1040" dirty="0"/>
-          </a:p>
-          <a:p>
-            <a:pPr indent="0" marL="0">
-              <a:buNone/>
-            </a:pPr>
-            <a:r>
-              <a:rPr lang="en-US" sz="1040" dirty="0">
+              <a:t>• Mock Provider authorization</a:t>
+            </a:r>
+            <a:endParaRPr lang="en-US" sz="1030" dirty="0"/>
+          </a:p>
+          <a:p>
+            <a:pPr indent="0" marL="0">
+              <a:buNone/>
+            </a:pPr>
+            <a:r>
+              <a:rPr lang="en-US" sz="1030" dirty="0">
                 <a:solidFill>
                   <a:srgbClr val="D8E3F0"/>
                 </a:solidFill>
               </a:rPr>
-              <a:t>• mock Authorization and Resource Servers</a:t>
-            </a:r>
-            <a:endParaRPr lang="en-US" sz="1040" dirty="0"/>
-          </a:p>
-          <a:p>
-            <a:pPr indent="0" marL="0">
-              <a:buNone/>
-            </a:pPr>
-            <a:r>
-              <a:rPr lang="en-US" sz="1040" dirty="0">
+              <a:t>• Sponsor and user consoles</a:t>
+            </a:r>
+            <a:endParaRPr lang="en-US" sz="1030" dirty="0"/>
+          </a:p>
+          <a:p>
+            <a:pPr indent="0" marL="0">
+              <a:buNone/>
+            </a:pPr>
+            <a:r>
+              <a:rPr lang="en-US" sz="1030" dirty="0">
                 <a:solidFill>
                   <a:srgbClr val="D8E3F0"/>
                 </a:solidFill>
               </a:rPr>
-              <a:t>• grant and ledger service</a:t>
-            </a:r>
-            <a:endParaRPr lang="en-US" sz="1040" dirty="0"/>
-          </a:p>
-          <a:p>
-            <a:pPr indent="0" marL="0">
-              <a:buNone/>
-            </a:pPr>
-            <a:r>
-              <a:rPr lang="en-US" sz="1040" dirty="0">
+              <a:t>• Consent Receipt issuance</a:t>
+            </a:r>
+            <a:endParaRPr lang="en-US" sz="1030" dirty="0"/>
+          </a:p>
+          <a:p>
+            <a:pPr indent="0" marL="0">
+              <a:buNone/>
+            </a:pPr>
+            <a:r>
+              <a:rPr lang="en-US" sz="1030" dirty="0">
                 <a:solidFill>
                   <a:srgbClr val="D8E3F0"/>
                 </a:solidFill>
               </a:rPr>
-              <a:t>• positive and negative test vectors</a:t>
-            </a:r>
-            <a:endParaRPr lang="en-US" sz="1040" dirty="0"/>
-          </a:p>
-          <a:p>
-            <a:pPr indent="0" marL="0">
-              <a:buNone/>
-            </a:pPr>
-            <a:r>
-              <a:rPr lang="en-US" sz="1040" dirty="0">
+              <a:t>• Run-level reservation</a:t>
+            </a:r>
+            <a:endParaRPr lang="en-US" sz="1030" dirty="0"/>
+          </a:p>
+          <a:p>
+            <a:pPr indent="0" marL="0">
+              <a:buNone/>
+            </a:pPr>
+            <a:r>
+              <a:rPr lang="en-US" sz="1030" dirty="0">
                 <a:solidFill>
                   <a:srgbClr val="D8E3F0"/>
                 </a:solidFill>
               </a:rPr>
-              <a:t>• retry, fallback and idempotency tests</a:t>
-            </a:r>
-            <a:endParaRPr lang="en-US" sz="1040" dirty="0"/>
-          </a:p>
-          <a:p>
-            <a:pPr indent="0" marL="0">
-              <a:buNone/>
-            </a:pPr>
-            <a:r>
-              <a:rPr lang="en-US" sz="1040" dirty="0">
+              <a:t>• Physical attempt timeline</a:t>
+            </a:r>
+            <a:endParaRPr lang="en-US" sz="1030" dirty="0"/>
+          </a:p>
+          <a:p>
+            <a:pPr indent="0" marL="0">
+              <a:buNone/>
+            </a:pPr>
+            <a:r>
+              <a:rPr lang="en-US" sz="1030" dirty="0">
                 <a:solidFill>
                   <a:srgbClr val="D8E3F0"/>
                 </a:solidFill>
               </a:rPr>
-              <a:t>• Sponsor privacy tests</a:t>
-            </a:r>
-            <a:endParaRPr lang="en-US" sz="1040" dirty="0"/>
-          </a:p>
-          <a:p>
-            <a:pPr indent="0" marL="0">
-              <a:buNone/>
-            </a:pPr>
-            <a:r>
-              <a:rPr lang="en-US" sz="1040" dirty="0">
+              <a:t>• Provider-signed evidence</a:t>
+            </a:r>
+            <a:endParaRPr lang="en-US" sz="1030" dirty="0"/>
+          </a:p>
+          <a:p>
+            <a:pPr indent="0" marL="0">
+              <a:buNone/>
+            </a:pPr>
+            <a:r>
+              <a:rPr lang="en-US" sz="1030" dirty="0">
                 <a:solidFill>
                   <a:srgbClr val="D8E3F0"/>
                 </a:solidFill>
               </a:rPr>
-              <a:t>• machine-readable conformance report</a:t>
-            </a:r>
-            <a:endParaRPr lang="en-US" sz="1040" dirty="0"/>
+              <a:t>• Gateway reconciliation</a:t>
+            </a:r>
+            <a:endParaRPr lang="en-US" sz="1030" dirty="0"/>
+          </a:p>
+          <a:p>
+            <a:pPr indent="0" marL="0">
+              <a:buNone/>
+            </a:pPr>
+            <a:r>
+              <a:rPr lang="en-US" sz="1030" dirty="0">
+                <a:solidFill>
+                  <a:srgbClr val="D8E3F0"/>
+                </a:solidFill>
+              </a:rPr>
+              <a:t>• Settlement and adjustment</a:t>
+            </a:r>
+            <a:endParaRPr lang="en-US" sz="1030" dirty="0"/>
+          </a:p>
+          <a:p>
+            <a:pPr indent="0" marL="0">
+              <a:buNone/>
+            </a:pPr>
+            <a:r>
+              <a:rPr lang="en-US" sz="1030" dirty="0">
+                <a:solidFill>
+                  <a:srgbClr val="D8E3F0"/>
+                </a:solidFill>
+              </a:rPr>
+              <a:t>• Revocation and exhaustion</a:t>
+            </a:r>
+            <a:endParaRPr lang="en-US" sz="1030" dirty="0"/>
+          </a:p>
+          <a:p>
+            <a:pPr indent="0" marL="0">
+              <a:buNone/>
+            </a:pPr>
+            <a:r>
+              <a:rPr lang="en-US" sz="1030" dirty="0">
+                <a:solidFill>
+                  <a:srgbClr val="D8E3F0"/>
+                </a:solidFill>
+              </a:rPr>
+              <a:t>• NatureGuard reference scenario</a:t>
+            </a:r>
+            <a:endParaRPr lang="en-US" sz="1030" dirty="0"/>
           </a:p>
         </p:txBody>
       </p:sp>
@@ -9428,12 +8996,12 @@
         </p:nvSpPr>
         <p:spPr>
           <a:xfrm>
-            <a:off x="8065008" y="1325880"/>
-            <a:ext cx="3401568" cy="3611880"/>
+            <a:off x="8092440" y="1325880"/>
+            <a:ext cx="3520440" cy="4206240"/>
           </a:xfrm>
           <a:prstGeom prst="roundRect">
             <a:avLst>
-              <a:gd name="adj" fmla="val 2151"/>
+              <a:gd name="adj" fmla="val 1558"/>
             </a:avLst>
           </a:prstGeom>
           <a:solidFill>
@@ -9455,8 +9023,8 @@
         </p:nvSpPr>
         <p:spPr>
           <a:xfrm>
-            <a:off x="8065008" y="1325880"/>
-            <a:ext cx="64008" cy="3611880"/>
+            <a:off x="8092440" y="1325880"/>
+            <a:ext cx="64008" cy="4206240"/>
           </a:xfrm>
           <a:prstGeom prst="rect">
             <a:avLst/>
@@ -9480,8 +9048,8 @@
         </p:nvSpPr>
         <p:spPr>
           <a:xfrm>
-            <a:off x="8266176" y="1472184"/>
-            <a:ext cx="3081528" cy="292608"/>
+            <a:off x="8293608" y="1472184"/>
+            <a:ext cx="3200400" cy="292608"/>
           </a:xfrm>
           <a:prstGeom prst="rect">
             <a:avLst/>
@@ -9516,8 +9084,8 @@
         </p:nvSpPr>
         <p:spPr>
           <a:xfrm>
-            <a:off x="8266176" y="1828800"/>
-            <a:ext cx="3054096" cy="2971800"/>
+            <a:off x="8293608" y="1837944"/>
+            <a:ext cx="3154680" cy="3547872"/>
           </a:xfrm>
           <a:prstGeom prst="rect">
             <a:avLst/>
@@ -9535,136 +9103,132 @@
               <a:buNone/>
             </a:pPr>
             <a:r>
-              <a:rPr lang="en-US" sz="1040" dirty="0">
+              <a:rPr lang="en-US" sz="1030" dirty="0">
                 <a:solidFill>
                   <a:srgbClr val="D8E3F0"/>
                 </a:solidFill>
               </a:rPr>
-              <a:t>• AI Provider platform engineers</a:t>
-            </a:r>
-            <a:endParaRPr lang="en-US" sz="1040" dirty="0"/>
-          </a:p>
-          <a:p>
-            <a:pPr indent="0" marL="0">
-              <a:buNone/>
-            </a:pPr>
-            <a:r>
-              <a:rPr lang="en-US" sz="1040" dirty="0">
+              <a:t>• Production signature profile</a:t>
+            </a:r>
+            <a:endParaRPr lang="en-US" sz="1030" dirty="0"/>
+          </a:p>
+          <a:p>
+            <a:pPr indent="0" marL="0">
+              <a:buNone/>
+            </a:pPr>
+            <a:r>
+              <a:rPr lang="en-US" sz="1030" dirty="0">
                 <a:solidFill>
                   <a:srgbClr val="D8E3F0"/>
                 </a:solidFill>
               </a:rPr>
-              <a:t>• OAuth and identity experts</a:t>
-            </a:r>
-            <a:endParaRPr lang="en-US" sz="1040" dirty="0"/>
-          </a:p>
-          <a:p>
-            <a:pPr indent="0" marL="0">
-              <a:buNone/>
-            </a:pPr>
-            <a:r>
-              <a:rPr lang="en-US" sz="1040" dirty="0">
+              <a:t>• Batch evidence and inclusion proofs</a:t>
+            </a:r>
+            <a:endParaRPr lang="en-US" sz="1030" dirty="0"/>
+          </a:p>
+          <a:p>
+            <a:pPr indent="0" marL="0">
+              <a:buNone/>
+            </a:pPr>
+            <a:r>
+              <a:rPr lang="en-US" sz="1030" dirty="0">
                 <a:solidFill>
                   <a:srgbClr val="D8E3F0"/>
                 </a:solidFill>
               </a:rPr>
-              <a:t>• billing and accounting architects</a:t>
-            </a:r>
-            <a:endParaRPr lang="en-US" sz="1040" dirty="0"/>
-          </a:p>
-          <a:p>
-            <a:pPr indent="0" marL="0">
-              <a:buNone/>
-            </a:pPr>
-            <a:r>
-              <a:rPr lang="en-US" sz="1040" dirty="0">
+              <a:t>• Minimum Consent Receipt core</a:t>
+            </a:r>
+            <a:endParaRPr lang="en-US" sz="1030" dirty="0"/>
+          </a:p>
+          <a:p>
+            <a:pPr indent="0" marL="0">
+              <a:buNone/>
+            </a:pPr>
+            <a:r>
+              <a:rPr lang="en-US" sz="1030" dirty="0">
                 <a:solidFill>
                   <a:srgbClr val="D8E3F0"/>
                 </a:solidFill>
               </a:rPr>
-              <a:t>• security and abuse specialists</a:t>
-            </a:r>
-            <a:endParaRPr lang="en-US" sz="1040" dirty="0"/>
-          </a:p>
-          <a:p>
-            <a:pPr indent="0" marL="0">
-              <a:buNone/>
-            </a:pPr>
-            <a:r>
-              <a:rPr lang="en-US" sz="1040" dirty="0">
+              <a:t>• Reconciliation windows</a:t>
+            </a:r>
+            <a:endParaRPr lang="en-US" sz="1030" dirty="0"/>
+          </a:p>
+          <a:p>
+            <a:pPr indent="0" marL="0">
+              <a:buNone/>
+            </a:pPr>
+            <a:r>
+              <a:rPr lang="en-US" sz="1030" dirty="0">
                 <a:solidFill>
                   <a:srgbClr val="D8E3F0"/>
                 </a:solidFill>
               </a:rPr>
-              <a:t>• privacy experts</a:t>
-            </a:r>
-            <a:endParaRPr lang="en-US" sz="1040" dirty="0"/>
-          </a:p>
-          <a:p>
-            <a:pPr indent="0" marL="0">
-              <a:buNone/>
-            </a:pPr>
-            <a:r>
-              <a:rPr lang="en-US" sz="1040" dirty="0">
+              <a:t>• Invoice-level mapping</a:t>
+            </a:r>
+            <a:endParaRPr lang="en-US" sz="1030" dirty="0"/>
+          </a:p>
+          <a:p>
+            <a:pPr indent="0" marL="0">
+              <a:buNone/>
+            </a:pPr>
+            <a:r>
+              <a:rPr lang="en-US" sz="1030" dirty="0">
                 <a:solidFill>
                   <a:srgbClr val="D8E3F0"/>
                 </a:solidFill>
               </a:rPr>
-              <a:t>• consumer AI developers</a:t>
-            </a:r>
-            <a:endParaRPr lang="en-US" sz="1040" dirty="0"/>
-          </a:p>
-          <a:p>
-            <a:pPr indent="0" marL="0">
-              <a:buNone/>
-            </a:pPr>
-            <a:r>
-              <a:rPr lang="en-US" sz="1040" dirty="0">
+              <a:t>• Provider economics</a:t>
+            </a:r>
+            <a:endParaRPr lang="en-US" sz="1030" dirty="0"/>
+          </a:p>
+          <a:p>
+            <a:pPr indent="0" marL="0">
+              <a:buNone/>
+            </a:pPr>
+            <a:r>
+              <a:rPr lang="en-US" sz="1030" dirty="0">
                 <a:solidFill>
                   <a:srgbClr val="D8E3F0"/>
                 </a:solidFill>
               </a:rPr>
-              <a:t>• Sponsor / nonprofit operators</a:t>
-            </a:r>
-            <a:endParaRPr lang="en-US" sz="1040" dirty="0"/>
-          </a:p>
-        </p:txBody>
-      </p:sp>
-      <p:sp>
-        <p:nvSpPr>
-          <p:cNvPr id="16" name="Text 14"/>
-          <p:cNvSpPr/>
-          <p:nvPr/>
-        </p:nvSpPr>
-        <p:spPr>
-          <a:xfrm>
-            <a:off x="685800" y="5532120"/>
-            <a:ext cx="10835640" cy="594360"/>
-          </a:xfrm>
-          <a:prstGeom prst="rect">
-            <a:avLst/>
-          </a:prstGeom>
-          <a:noFill/>
-          <a:ln/>
-        </p:spPr>
-        <p:txBody>
-          <a:bodyPr wrap="square" lIns="0" tIns="0" rIns="0" bIns="0" rtlCol="0" anchor="ctr">
-            <a:normAutofit/>
-          </a:bodyPr>
-          <a:lstStyle/>
-          <a:p>
-            <a:pPr algn="ctr" indent="0" marL="0">
-              <a:buNone/>
-            </a:pPr>
-            <a:r>
-              <a:rPr lang="en-US" sz="1700" b="1" dirty="0">
-                <a:solidFill>
-                  <a:srgbClr val="35D0E6"/>
-                </a:solidFill>
-              </a:rPr>
-              <a:t>Can an AI Provider enforce bounded third-party usage in a way that is auditable, payer-safe, privacy-preserving and interoperable?</a:t>
-            </a:r>
-            <a:endParaRPr lang="en-US" sz="1700" dirty="0"/>
+              <a:t>• OAuth and security review</a:t>
+            </a:r>
+            <a:endParaRPr lang="en-US" sz="1030" dirty="0"/>
+          </a:p>
+          <a:p>
+            <a:pPr indent="0" marL="0">
+              <a:buNone/>
+            </a:pPr>
+            <a:r>
+              <a:rPr lang="en-US" sz="1030" dirty="0">
+                <a:solidFill>
+                  <a:srgbClr val="D8E3F0"/>
+                </a:solidFill>
+              </a:rPr>
+              <a:t>• Privacy-safe Sponsor reporting</a:t>
+            </a:r>
+            <a:endParaRPr lang="en-US" sz="1030" dirty="0"/>
+          </a:p>
+          <a:p>
+            <a:pPr indent="0" marL="0">
+              <a:buNone/>
+            </a:pPr>
+            <a:endParaRPr lang="en-US" sz="1030" dirty="0"/>
+          </a:p>
+          <a:p>
+            <a:pPr indent="0" marL="0">
+              <a:buNone/>
+            </a:pPr>
+            <a:r>
+              <a:rPr lang="en-US" sz="1030" dirty="0">
+                <a:solidFill>
+                  <a:srgbClr val="D8E3F0"/>
+                </a:solidFill>
+              </a:rPr>
+              <a:t>Draft proposal - no Provider adoption claimed.</a:t>
+            </a:r>
+            <a:endParaRPr lang="en-US" sz="1030" dirty="0"/>
           </a:p>
         </p:txBody>
       </p:sp>
